--- a/docs/261002_연구세미나발표자료.pptx
+++ b/docs/261002_연구세미나발표자료.pptx
@@ -5,49 +5,48 @@
     <p:sldMasterId id="2147483648" r:id="rId1"/>
   </p:sldMasterIdLst>
   <p:notesMasterIdLst>
-    <p:notesMasterId r:id="rId35"/>
+    <p:notesMasterId r:id="rId30"/>
   </p:notesMasterIdLst>
   <p:sldIdLst>
     <p:sldId id="256" r:id="rId2"/>
-    <p:sldId id="301" r:id="rId44"/>
-    <p:sldId id="302" r:id="rId45"/>
-    <p:sldId id="303" r:id="rId46"/>
-    <p:sldId id="304" r:id="rId47"/>
-    <p:sldId id="305" r:id="rId48"/>
-    <p:sldId id="306" r:id="rId49"/>
-    <p:sldId id="307" r:id="rId50"/>
-    <p:sldId id="308" r:id="rId51"/>
-    <p:sldId id="309" r:id="rId52"/>
-    <p:sldId id="310" r:id="rId53"/>
-    <p:sldId id="311" r:id="rId54"/>
-    <p:sldId id="312" r:id="rId55"/>
-    <p:sldId id="314" r:id="rId57"/>
-    <p:sldId id="315" r:id="rId58"/>
-    <p:sldId id="316" r:id="rId59"/>
-    <p:sldId id="318" r:id="rId61"/>
-    <p:sldId id="319" r:id="rId62"/>
-    <p:sldId id="320" r:id="rId63"/>
-    <p:sldId id="321" r:id="rId64"/>
-    <p:sldId id="322" r:id="rId65"/>
-    <p:sldId id="323" r:id="rId66"/>
-    <p:sldId id="324" r:id="rId67"/>
-    <p:sldId id="325" r:id="rId68"/>
-    <p:sldId id="326" r:id="rId69"/>
-    <p:sldId id="327" r:id="rId70"/>
-    <p:sldId id="328" r:id="rId71"/>
-    <p:sldId id="329" r:id="rId72"/>
-    <p:sldId id="330" r:id="rId73"/>
+    <p:sldId id="301" r:id="rId3"/>
+    <p:sldId id="302" r:id="rId4"/>
+    <p:sldId id="303" r:id="rId5"/>
+    <p:sldId id="304" r:id="rId6"/>
+    <p:sldId id="305" r:id="rId7"/>
+    <p:sldId id="306" r:id="rId8"/>
+    <p:sldId id="307" r:id="rId9"/>
+    <p:sldId id="308" r:id="rId10"/>
+    <p:sldId id="309" r:id="rId11"/>
+    <p:sldId id="310" r:id="rId12"/>
+    <p:sldId id="311" r:id="rId13"/>
+    <p:sldId id="312" r:id="rId14"/>
+    <p:sldId id="314" r:id="rId15"/>
+    <p:sldId id="315" r:id="rId16"/>
+    <p:sldId id="316" r:id="rId17"/>
+    <p:sldId id="318" r:id="rId18"/>
+    <p:sldId id="319" r:id="rId19"/>
+    <p:sldId id="320" r:id="rId20"/>
+    <p:sldId id="321" r:id="rId21"/>
+    <p:sldId id="323" r:id="rId22"/>
+    <p:sldId id="324" r:id="rId23"/>
+    <p:sldId id="325" r:id="rId24"/>
+    <p:sldId id="326" r:id="rId25"/>
+    <p:sldId id="327" r:id="rId26"/>
+    <p:sldId id="328" r:id="rId27"/>
+    <p:sldId id="329" r:id="rId28"/>
+    <p:sldId id="330" r:id="rId29"/>
   </p:sldIdLst>
   <p:sldSz cx="12192000" cy="6858000"/>
   <p:notesSz cx="6858000" cy="9144000"/>
   <p:embeddedFontLst>
     <p:embeddedFont>
       <p:font typeface="KoPub돋움체 Bold" panose="00000800000000000000" pitchFamily="2" charset="-127"/>
-      <p:bold r:id="rId36"/>
+      <p:bold r:id="rId31"/>
     </p:embeddedFont>
     <p:embeddedFont>
       <p:font typeface="KoPub돋움체 Medium" panose="00000600000000000000" pitchFamily="2" charset="-127"/>
-      <p:regular r:id="rId37"/>
+      <p:regular r:id="rId32"/>
     </p:embeddedFont>
   </p:embeddedFontLst>
   <p:defaultTextStyle>
@@ -151,38 +150,33 @@
         <p14:section name="기본 구역" id="{097B6DF2-66C3-4074-9053-F9AA00FED5D5}">
           <p14:sldIdLst>
             <p14:sldId id="256"/>
-            <p14:sldId id="257"/>
-            <p14:sldId id="290"/>
-            <p14:sldId id="259"/>
-            <p14:sldId id="293"/>
-            <p14:sldId id="294"/>
-            <p14:sldId id="260"/>
-            <p14:sldId id="261"/>
-            <p14:sldId id="262"/>
-            <p14:sldId id="297"/>
-            <p14:sldId id="284"/>
-            <p14:sldId id="265"/>
-            <p14:sldId id="285"/>
-            <p14:sldId id="286"/>
-            <p14:sldId id="298"/>
-            <p14:sldId id="287"/>
-            <p14:sldId id="264"/>
-            <p14:sldId id="266"/>
-            <p14:sldId id="267"/>
-            <p14:sldId id="292"/>
-            <p14:sldId id="269"/>
-            <p14:sldId id="270"/>
-            <p14:sldId id="271"/>
-            <p14:sldId id="299"/>
-            <p14:sldId id="295"/>
-            <p14:sldId id="272"/>
-            <p14:sldId id="296"/>
-            <p14:sldId id="300"/>
-            <p14:sldId id="291"/>
-            <p14:sldId id="274"/>
-            <p14:sldId id="275"/>
-            <p14:sldId id="276"/>
-            <p14:sldId id="277"/>
+            <p14:sldId id="301"/>
+            <p14:sldId id="302"/>
+            <p14:sldId id="303"/>
+            <p14:sldId id="304"/>
+            <p14:sldId id="305"/>
+            <p14:sldId id="306"/>
+            <p14:sldId id="307"/>
+            <p14:sldId id="308"/>
+            <p14:sldId id="309"/>
+            <p14:sldId id="310"/>
+            <p14:sldId id="311"/>
+            <p14:sldId id="312"/>
+            <p14:sldId id="314"/>
+            <p14:sldId id="315"/>
+            <p14:sldId id="316"/>
+            <p14:sldId id="318"/>
+            <p14:sldId id="319"/>
+            <p14:sldId id="320"/>
+            <p14:sldId id="321"/>
+            <p14:sldId id="323"/>
+            <p14:sldId id="324"/>
+            <p14:sldId id="325"/>
+            <p14:sldId id="326"/>
+            <p14:sldId id="327"/>
+            <p14:sldId id="328"/>
+            <p14:sldId id="329"/>
+            <p14:sldId id="330"/>
           </p14:sldIdLst>
         </p14:section>
       </p14:sectionLst>
@@ -1066,7 +1060,7 @@
 </file>
 
 <file path=ppt/notesSlides/notesSlide1.xml><?xml version="1.0" encoding="utf-8"?>
-<p:notes xmlns:a="http://schemas.openxmlformats.org/drawingml/2006/main" xmlns:p="http://schemas.openxmlformats.org/presentationml/2006/main" xmlns:r="http://schemas.openxmlformats.org/officeDocument/2006/relationships">
+<p:notes xmlns:a="http://schemas.openxmlformats.org/drawingml/2006/main" xmlns:r="http://schemas.openxmlformats.org/officeDocument/2006/relationships" xmlns:p="http://schemas.openxmlformats.org/presentationml/2006/main">
   <p:cSld>
     <p:spTree>
       <p:nvGrpSpPr>
@@ -1086,7 +1080,7 @@
         <p:nvSpPr>
           <p:cNvPr id="2" name="Slide Image Placeholder 1"/>
           <p:cNvSpPr>
-            <a:spLocks noGrp="1"/>
+            <a:spLocks noGrp="1" noRot="1" noChangeAspect="1"/>
           </p:cNvSpPr>
           <p:nvPr>
             <p:ph type="sldImg" idx="2"/>
@@ -1101,7 +1095,7 @@
             <a:spLocks noGrp="1"/>
           </p:cNvSpPr>
           <p:nvPr>
-            <p:ph type="body" idx="3" sz="quarter"/>
+            <p:ph type="body" sz="quarter" idx="3"/>
           </p:nvPr>
         </p:nvSpPr>
         <p:spPr/>
@@ -1110,7 +1104,7 @@
           <a:lstStyle/>
           <a:p>
             <a:r>
-              <a:t>만성질환 위험군을 선별하는 데 이미 찍은 CT를 재활용할 수 있는지가 이 연구의 출발점입니다. 기본 정보만으로 얼마나 구분되는지, AEC와 체성분 곡선을 더하면 나아지는지, 그리고 두 병원에서 일관되는지를 봅니다. 성별은 기본 모델에서도 유의한 변수라 곡선 효과를 해석할 때 함께 고려합니다.</a:t>
+              <a:t>안녕하세요, 강남세브란스병원 의료기기공학 소속 천장훈입니다. 오늘은 CT에서 자동으로 얻을 수 있는 AEC 곡선과 체성분 곡선이 만성질환 예측에 얼마나 기여하는지, 그리고 그 한계를 발표드리겠습니다.</a:t>
             </a:r>
           </a:p>
         </p:txBody>
@@ -1122,7 +1116,7 @@
             <a:spLocks noGrp="1"/>
           </p:cNvSpPr>
           <p:nvPr>
-            <p:ph type="sldNum" idx="5" sz="quarter"/>
+            <p:ph type="sldNum" sz="quarter" idx="5"/>
           </p:nvPr>
         </p:nvSpPr>
         <p:spPr/>
@@ -1136,7 +1130,7 @@
 </file>
 
 <file path=ppt/notesSlides/notesSlide10.xml><?xml version="1.0" encoding="utf-8"?>
-<p:notes xmlns:a="http://schemas.openxmlformats.org/drawingml/2006/main" xmlns:p="http://schemas.openxmlformats.org/presentationml/2006/main" xmlns:r="http://schemas.openxmlformats.org/officeDocument/2006/relationships">
+<p:notes xmlns:a="http://schemas.openxmlformats.org/drawingml/2006/main" xmlns:r="http://schemas.openxmlformats.org/officeDocument/2006/relationships" xmlns:p="http://schemas.openxmlformats.org/presentationml/2006/main">
   <p:cSld>
     <p:spTree>
       <p:nvGrpSpPr>
@@ -1156,7 +1150,7 @@
         <p:nvSpPr>
           <p:cNvPr id="2" name="Slide Image Placeholder 1"/>
           <p:cNvSpPr>
-            <a:spLocks noGrp="1"/>
+            <a:spLocks noGrp="1" noRot="1" noChangeAspect="1"/>
           </p:cNvSpPr>
           <p:nvPr>
             <p:ph type="sldImg" idx="2"/>
@@ -1171,7 +1165,7 @@
             <a:spLocks noGrp="1"/>
           </p:cNvSpPr>
           <p:nvPr>
-            <p:ph type="body" idx="3" sz="quarter"/>
+            <p:ph type="body" sz="quarter" idx="3"/>
           </p:nvPr>
         </p:nvSpPr>
         <p:spPr/>
@@ -1180,7 +1174,7 @@
           <a:lstStyle/>
           <a:p>
             <a:r>
-              <a:t>AEC만 더했을 때의 결과입니다. OOF AUC가 고혈압 0.795에서 0.804, 당뇨병 0.714에서 0.732로 올랐지만 DeLong p가 0.050과 0.069이고, 만성신장질환은 0.769에서 0.752로 오히려 낮아졌습니다. Bonferroni 기준에서는 세 질환 모두 비유의입니다. 그래서 체성분을 추가로 검토했습니다.</a:t>
+              <a:t>PC 개수는 성능을 보고 정한 것이 아니라, scree 곡선에서 PC1과 PC20을 잇는 직선과 가장 멀리 떨어진 지점을 Kneedle 방식으로 찾아 정했습니다. 파란 점선이 그 직선이고 빨간 원이 elbow입니다. AEC와 IMATA는 3개, VAT, SAT, LAMA, NAMA는 2개입니다.</a:t>
             </a:r>
           </a:p>
         </p:txBody>
@@ -1192,7 +1186,7 @@
             <a:spLocks noGrp="1"/>
           </p:cNvSpPr>
           <p:nvPr>
-            <p:ph type="sldNum" idx="5" sz="quarter"/>
+            <p:ph type="sldNum" sz="quarter" idx="5"/>
           </p:nvPr>
         </p:nvSpPr>
         <p:spPr/>
@@ -1206,7 +1200,7 @@
 </file>
 
 <file path=ppt/notesSlides/notesSlide11.xml><?xml version="1.0" encoding="utf-8"?>
-<p:notes xmlns:a="http://schemas.openxmlformats.org/drawingml/2006/main" xmlns:p="http://schemas.openxmlformats.org/presentationml/2006/main" xmlns:r="http://schemas.openxmlformats.org/officeDocument/2006/relationships">
+<p:notes xmlns:a="http://schemas.openxmlformats.org/drawingml/2006/main" xmlns:r="http://schemas.openxmlformats.org/officeDocument/2006/relationships" xmlns:p="http://schemas.openxmlformats.org/presentationml/2006/main">
   <p:cSld>
     <p:spTree>
       <p:nvGrpSpPr>
@@ -1226,7 +1220,7 @@
         <p:nvSpPr>
           <p:cNvPr id="2" name="Slide Image Placeholder 1"/>
           <p:cNvSpPr>
-            <a:spLocks noGrp="1"/>
+            <a:spLocks noGrp="1" noRot="1" noChangeAspect="1"/>
           </p:cNvSpPr>
           <p:nvPr>
             <p:ph type="sldImg" idx="2"/>
@@ -1241,7 +1235,7 @@
             <a:spLocks noGrp="1"/>
           </p:cNvSpPr>
           <p:nvPr>
-            <p:ph type="body" idx="3" sz="quarter"/>
+            <p:ph type="body" sz="quarter" idx="3"/>
           </p:nvPr>
         </p:nvSpPr>
         <p:spPr/>
@@ -1250,7 +1244,7 @@
           <a:lstStyle/>
           <a:p>
             <a:r>
-              <a:t>확장 모델별 ΔAUC입니다. 체성분을 포함한 모델에서 개선 폭이 가장 크고 0.014에서 0.066이며, 별표로 표시된 유의한 개선은 주로 신촌에서 나옵니다.</a:t>
+              <a:t>AEC만 더했을 때의 결과입니다. OOF AUC가 고혈압 0.795에서 0.804, 당뇨병 0.714에서 0.732로 올랐지만 DeLong p가 0.050과 0.069이고, 만성신장질환은 0.769에서 0.752로 오히려 낮아졌습니다. Bonferroni 기준에서는 세 질환 모두 비유의입니다. 그래서 체성분을 추가로 검토했습니다.</a:t>
             </a:r>
           </a:p>
         </p:txBody>
@@ -1262,7 +1256,7 @@
             <a:spLocks noGrp="1"/>
           </p:cNvSpPr>
           <p:nvPr>
-            <p:ph type="sldNum" idx="5" sz="quarter"/>
+            <p:ph type="sldNum" sz="quarter" idx="5"/>
           </p:nvPr>
         </p:nvSpPr>
         <p:spPr/>
@@ -1276,7 +1270,7 @@
 </file>
 
 <file path=ppt/notesSlides/notesSlide12.xml><?xml version="1.0" encoding="utf-8"?>
-<p:notes xmlns:a="http://schemas.openxmlformats.org/drawingml/2006/main" xmlns:p="http://schemas.openxmlformats.org/presentationml/2006/main" xmlns:r="http://schemas.openxmlformats.org/officeDocument/2006/relationships">
+<p:notes xmlns:a="http://schemas.openxmlformats.org/drawingml/2006/main" xmlns:r="http://schemas.openxmlformats.org/officeDocument/2006/relationships" xmlns:p="http://schemas.openxmlformats.org/presentationml/2006/main">
   <p:cSld>
     <p:spTree>
       <p:nvGrpSpPr>
@@ -1296,7 +1290,7 @@
         <p:nvSpPr>
           <p:cNvPr id="2" name="Slide Image Placeholder 1"/>
           <p:cNvSpPr>
-            <a:spLocks noGrp="1"/>
+            <a:spLocks noGrp="1" noRot="1" noChangeAspect="1"/>
           </p:cNvSpPr>
           <p:nvPr>
             <p:ph type="sldImg" idx="2"/>
@@ -1311,7 +1305,7 @@
             <a:spLocks noGrp="1"/>
           </p:cNvSpPr>
           <p:nvPr>
-            <p:ph type="body" idx="3" sz="quarter"/>
+            <p:ph type="body" sz="quarter" idx="3"/>
           </p:nvPr>
         </p:nvSpPr>
         <p:spPr/>
@@ -1320,7 +1314,7 @@
           <a:lstStyle/>
           <a:p>
             <a:r>
-              <a:t>Baseline과 AEC·체성분 모델의 비교입니다. 고혈압은 Internal 0.795에서 0.809, p=0.035, External 0.718에서 0.741, p=0.011로 두 코호트 모두 유의합니다. 당뇨병은 Internal 0.714에서 0.735, p=0.078로 비유의, External은 0.665에서 0.706으로 유의하고, 만성신장질환도 Internal은 p=0.39로 비유의, External은 0.615에서 0.681로 유의합니다. 즉 외부에서는 세 질환 모두 개선되고 내부에서는 고혈압만 유의합니다.</a:t>
+              <a:t>확장 모델별 ΔAUC입니다. 체성분을 포함한 모델에서 개선 폭이 가장 크고 0.014에서 0.066이며, 별표로 표시된 유의한 개선은 주로 신촌에서 나옵니다.</a:t>
             </a:r>
           </a:p>
         </p:txBody>
@@ -1332,7 +1326,7 @@
             <a:spLocks noGrp="1"/>
           </p:cNvSpPr>
           <p:nvPr>
-            <p:ph type="sldNum" idx="5" sz="quarter"/>
+            <p:ph type="sldNum" sz="quarter" idx="5"/>
           </p:nvPr>
         </p:nvSpPr>
         <p:spPr/>
@@ -1346,7 +1340,7 @@
 </file>
 
 <file path=ppt/notesSlides/notesSlide13.xml><?xml version="1.0" encoding="utf-8"?>
-<p:notes xmlns:a="http://schemas.openxmlformats.org/drawingml/2006/main" xmlns:p="http://schemas.openxmlformats.org/presentationml/2006/main" xmlns:r="http://schemas.openxmlformats.org/officeDocument/2006/relationships">
+<p:notes xmlns:a="http://schemas.openxmlformats.org/drawingml/2006/main" xmlns:r="http://schemas.openxmlformats.org/officeDocument/2006/relationships" xmlns:p="http://schemas.openxmlformats.org/presentationml/2006/main">
   <p:cSld>
     <p:spTree>
       <p:nvGrpSpPr>
@@ -1366,7 +1360,7 @@
         <p:nvSpPr>
           <p:cNvPr id="2" name="Slide Image Placeholder 1"/>
           <p:cNvSpPr>
-            <a:spLocks noGrp="1"/>
+            <a:spLocks noGrp="1" noRot="1" noChangeAspect="1"/>
           </p:cNvSpPr>
           <p:nvPr>
             <p:ph type="sldImg" idx="2"/>
@@ -1381,7 +1375,7 @@
             <a:spLocks noGrp="1"/>
           </p:cNvSpPr>
           <p:nvPr>
-            <p:ph type="body" idx="3" sz="quarter"/>
+            <p:ph type="body" sz="quarter" idx="3"/>
           </p:nvPr>
         </p:nvSpPr>
         <p:spPr/>
@@ -1390,7 +1384,7 @@
           <a:lstStyle/>
           <a:p>
             <a:r>
-              <a:t>질문 받겠습니다. 감사합니다.</a:t>
+              <a:t>Baseline과 AEC·체성분 모델의 비교입니다. 고혈압은 Internal 0.795에서 0.809, p=0.035, External 0.718에서 0.741, p=0.011로 두 코호트 모두 유의합니다. 당뇨병은 Internal 0.714에서 0.735, p=0.078로 비유의, External은 0.665에서 0.706으로 유의하고, 만성신장질환도 Internal은 p=0.39로 비유의, External은 0.615에서 0.681로 유의합니다. 즉 외부에서는 세 질환 모두 개선되고 내부에서는 고혈압만 유의합니다.</a:t>
             </a:r>
           </a:p>
         </p:txBody>
@@ -1402,7 +1396,7 @@
             <a:spLocks noGrp="1"/>
           </p:cNvSpPr>
           <p:nvPr>
-            <p:ph type="sldNum" idx="5" sz="quarter"/>
+            <p:ph type="sldNum" sz="quarter" idx="5"/>
           </p:nvPr>
         </p:nvSpPr>
         <p:spPr/>
@@ -1416,7 +1410,7 @@
 </file>
 
 <file path=ppt/notesSlides/notesSlide14.xml><?xml version="1.0" encoding="utf-8"?>
-<p:notes xmlns:a="http://schemas.openxmlformats.org/drawingml/2006/main" xmlns:p="http://schemas.openxmlformats.org/presentationml/2006/main" xmlns:r="http://schemas.openxmlformats.org/officeDocument/2006/relationships">
+<p:notes xmlns:a="http://schemas.openxmlformats.org/drawingml/2006/main" xmlns:r="http://schemas.openxmlformats.org/officeDocument/2006/relationships" xmlns:p="http://schemas.openxmlformats.org/presentationml/2006/main">
   <p:cSld>
     <p:spTree>
       <p:nvGrpSpPr>
@@ -1436,7 +1430,7 @@
         <p:nvSpPr>
           <p:cNvPr id="2" name="Slide Image Placeholder 1"/>
           <p:cNvSpPr>
-            <a:spLocks noGrp="1"/>
+            <a:spLocks noGrp="1" noRot="1" noChangeAspect="1"/>
           </p:cNvSpPr>
           <p:nvPr>
             <p:ph type="sldImg" idx="2"/>
@@ -1451,7 +1445,7 @@
             <a:spLocks noGrp="1"/>
           </p:cNvSpPr>
           <p:nvPr>
-            <p:ph type="body" idx="3" sz="quarter"/>
+            <p:ph type="body" sz="quarter" idx="3"/>
           </p:nvPr>
         </p:nvSpPr>
         <p:spPr/>
@@ -1472,7 +1466,7 @@
             <a:spLocks noGrp="1"/>
           </p:cNvSpPr>
           <p:nvPr>
-            <p:ph type="sldNum" idx="5" sz="quarter"/>
+            <p:ph type="sldNum" sz="quarter" idx="5"/>
           </p:nvPr>
         </p:nvSpPr>
         <p:spPr/>
@@ -1486,7 +1480,7 @@
 </file>
 
 <file path=ppt/notesSlides/notesSlide15.xml><?xml version="1.0" encoding="utf-8"?>
-<p:notes xmlns:a="http://schemas.openxmlformats.org/drawingml/2006/main" xmlns:p="http://schemas.openxmlformats.org/presentationml/2006/main" xmlns:r="http://schemas.openxmlformats.org/officeDocument/2006/relationships">
+<p:notes xmlns:a="http://schemas.openxmlformats.org/drawingml/2006/main" xmlns:r="http://schemas.openxmlformats.org/officeDocument/2006/relationships" xmlns:p="http://schemas.openxmlformats.org/presentationml/2006/main">
   <p:cSld>
     <p:spTree>
       <p:nvGrpSpPr>
@@ -1506,7 +1500,7 @@
         <p:nvSpPr>
           <p:cNvPr id="2" name="Slide Image Placeholder 1"/>
           <p:cNvSpPr>
-            <a:spLocks noGrp="1"/>
+            <a:spLocks noGrp="1" noRot="1" noChangeAspect="1"/>
           </p:cNvSpPr>
           <p:nvPr>
             <p:ph type="sldImg" idx="2"/>
@@ -1521,7 +1515,7 @@
             <a:spLocks noGrp="1"/>
           </p:cNvSpPr>
           <p:nvPr>
-            <p:ph type="body" idx="3" sz="quarter"/>
+            <p:ph type="body" sz="quarter" idx="3"/>
           </p:nvPr>
         </p:nvSpPr>
         <p:spPr/>
@@ -1542,7 +1536,7 @@
             <a:spLocks noGrp="1"/>
           </p:cNvSpPr>
           <p:nvPr>
-            <p:ph type="sldNum" idx="5" sz="quarter"/>
+            <p:ph type="sldNum" sz="quarter" idx="5"/>
           </p:nvPr>
         </p:nvSpPr>
         <p:spPr/>
@@ -1556,7 +1550,7 @@
 </file>
 
 <file path=ppt/notesSlides/notesSlide16.xml><?xml version="1.0" encoding="utf-8"?>
-<p:notes xmlns:a="http://schemas.openxmlformats.org/drawingml/2006/main" xmlns:p="http://schemas.openxmlformats.org/presentationml/2006/main" xmlns:r="http://schemas.openxmlformats.org/officeDocument/2006/relationships">
+<p:notes xmlns:a="http://schemas.openxmlformats.org/drawingml/2006/main" xmlns:r="http://schemas.openxmlformats.org/officeDocument/2006/relationships" xmlns:p="http://schemas.openxmlformats.org/presentationml/2006/main">
   <p:cSld>
     <p:spTree>
       <p:nvGrpSpPr>
@@ -1576,7 +1570,7 @@
         <p:nvSpPr>
           <p:cNvPr id="2" name="Slide Image Placeholder 1"/>
           <p:cNvSpPr>
-            <a:spLocks noGrp="1"/>
+            <a:spLocks noGrp="1" noRot="1" noChangeAspect="1"/>
           </p:cNvSpPr>
           <p:nvPr>
             <p:ph type="sldImg" idx="2"/>
@@ -1591,7 +1585,7 @@
             <a:spLocks noGrp="1"/>
           </p:cNvSpPr>
           <p:nvPr>
-            <p:ph type="body" idx="3" sz="quarter"/>
+            <p:ph type="body" sz="quarter" idx="3"/>
           </p:nvPr>
         </p:nvSpPr>
         <p:spPr/>
@@ -1612,7 +1606,7 @@
             <a:spLocks noGrp="1"/>
           </p:cNvSpPr>
           <p:nvPr>
-            <p:ph type="sldNum" idx="5" sz="quarter"/>
+            <p:ph type="sldNum" sz="quarter" idx="5"/>
           </p:nvPr>
         </p:nvSpPr>
         <p:spPr/>
@@ -1626,7 +1620,7 @@
 </file>
 
 <file path=ppt/notesSlides/notesSlide17.xml><?xml version="1.0" encoding="utf-8"?>
-<p:notes xmlns:a="http://schemas.openxmlformats.org/drawingml/2006/main" xmlns:p="http://schemas.openxmlformats.org/presentationml/2006/main" xmlns:r="http://schemas.openxmlformats.org/officeDocument/2006/relationships">
+<p:notes xmlns:a="http://schemas.openxmlformats.org/drawingml/2006/main" xmlns:r="http://schemas.openxmlformats.org/officeDocument/2006/relationships" xmlns:p="http://schemas.openxmlformats.org/presentationml/2006/main">
   <p:cSld>
     <p:spTree>
       <p:nvGrpSpPr>
@@ -1646,7 +1640,7 @@
         <p:nvSpPr>
           <p:cNvPr id="2" name="Slide Image Placeholder 1"/>
           <p:cNvSpPr>
-            <a:spLocks noGrp="1"/>
+            <a:spLocks noGrp="1" noRot="1" noChangeAspect="1"/>
           </p:cNvSpPr>
           <p:nvPr>
             <p:ph type="sldImg" idx="2"/>
@@ -1661,7 +1655,7 @@
             <a:spLocks noGrp="1"/>
           </p:cNvSpPr>
           <p:nvPr>
-            <p:ph type="body" idx="3" sz="quarter"/>
+            <p:ph type="body" sz="quarter" idx="3"/>
           </p:nvPr>
         </p:nvSpPr>
         <p:spPr/>
@@ -1670,7 +1664,7 @@
           <a:lstStyle/>
           <a:p>
             <a:r>
-              <a:t>안녕하세요, 강남세브란스병원 의료기기공학 소속 천장훈입니다. 오늘은 CT에서 자동으로 얻을 수 있는 AEC 곡선과 체성분 곡선이 만성질환 예측에 얼마나 기여하는지, 그리고 그 한계를 발표드리겠습니다.</a:t>
+              <a:t>점수 계수를 곡선 위치별로 되돌린 그림입니다. 위는 그 위치 AEC가 높을수록 질환 확률이 올라가고 아래는 내려갑니다. 세 질환 모두 간 쪽은 양, 치골 쪽은 음이고 전환 위치는 질환마다 다릅니다. slice 번호가 환자마다 같은 위치인지는 확인하지 못해 가설 수준입니다.</a:t>
             </a:r>
           </a:p>
         </p:txBody>
@@ -1682,7 +1676,7 @@
             <a:spLocks noGrp="1"/>
           </p:cNvSpPr>
           <p:nvPr>
-            <p:ph type="sldNum" idx="5" sz="quarter"/>
+            <p:ph type="sldNum" sz="quarter" idx="5"/>
           </p:nvPr>
         </p:nvSpPr>
         <p:spPr/>
@@ -1696,7 +1690,7 @@
 </file>
 
 <file path=ppt/notesSlides/notesSlide18.xml><?xml version="1.0" encoding="utf-8"?>
-<p:notes xmlns:a="http://schemas.openxmlformats.org/drawingml/2006/main" xmlns:p="http://schemas.openxmlformats.org/presentationml/2006/main" xmlns:r="http://schemas.openxmlformats.org/officeDocument/2006/relationships">
+<p:notes xmlns:a="http://schemas.openxmlformats.org/drawingml/2006/main" xmlns:r="http://schemas.openxmlformats.org/officeDocument/2006/relationships" xmlns:p="http://schemas.openxmlformats.org/presentationml/2006/main">
   <p:cSld>
     <p:spTree>
       <p:nvGrpSpPr>
@@ -1716,7 +1710,7 @@
         <p:nvSpPr>
           <p:cNvPr id="2" name="Slide Image Placeholder 1"/>
           <p:cNvSpPr>
-            <a:spLocks noGrp="1"/>
+            <a:spLocks noGrp="1" noRot="1" noChangeAspect="1"/>
           </p:cNvSpPr>
           <p:nvPr>
             <p:ph type="sldImg" idx="2"/>
@@ -1731,7 +1725,7 @@
             <a:spLocks noGrp="1"/>
           </p:cNvSpPr>
           <p:nvPr>
-            <p:ph type="body" idx="3" sz="quarter"/>
+            <p:ph type="body" sz="quarter" idx="3"/>
           </p:nvPr>
         </p:nvSpPr>
         <p:spPr/>
@@ -1740,7 +1734,7 @@
           <a:lstStyle/>
           <a:p>
             <a:r>
-              <a:t>점수 계수를 곡선 위치별로 되돌린 그림입니다. 위는 그 위치 AEC가 높을수록 질환 확률이 올라가고 아래는 내려갑니다. 세 질환 모두 간 쪽은 양, 치골 쪽은 음이고 전환 위치는 질환마다 다릅니다. slice 번호가 환자마다 같은 위치인지는 확인하지 못해 가설 수준입니다.</a:t>
+              <a:t>효과가 병원마다 다른 이유로 두 가지를 생각했습니다. 하나는 환자마다 장기 위치가 달라 같은 slice 번호가 다른 부위일 수 있다는 점이고, 다른 하나는 두 코호트의 구성 차이입니다. 예를 들어 강남 만성신장질환은 체성분만 추가하면 AUC가 0.015 오르는데 AEC만 추가하면 0.016 떨어집니다. Calibration은 두 모델 패턴이 비슷하고 Brier는 대체로 개선되지만, 당뇨병은 과대예측이어서 재보정이 필요합니다. 두 설명 모두 직접 검증하지는 못했습니다.</a:t>
             </a:r>
           </a:p>
         </p:txBody>
@@ -1752,7 +1746,7 @@
             <a:spLocks noGrp="1"/>
           </p:cNvSpPr>
           <p:nvPr>
-            <p:ph type="sldNum" idx="5" sz="quarter"/>
+            <p:ph type="sldNum" sz="quarter" idx="5"/>
           </p:nvPr>
         </p:nvSpPr>
         <p:spPr/>
@@ -1766,7 +1760,7 @@
 </file>
 
 <file path=ppt/notesSlides/notesSlide19.xml><?xml version="1.0" encoding="utf-8"?>
-<p:notes xmlns:a="http://schemas.openxmlformats.org/drawingml/2006/main" xmlns:p="http://schemas.openxmlformats.org/presentationml/2006/main" xmlns:r="http://schemas.openxmlformats.org/officeDocument/2006/relationships">
+<p:notes xmlns:a="http://schemas.openxmlformats.org/drawingml/2006/main" xmlns:r="http://schemas.openxmlformats.org/officeDocument/2006/relationships" xmlns:p="http://schemas.openxmlformats.org/presentationml/2006/main">
   <p:cSld>
     <p:spTree>
       <p:nvGrpSpPr>
@@ -1786,7 +1780,7 @@
         <p:nvSpPr>
           <p:cNvPr id="2" name="Slide Image Placeholder 1"/>
           <p:cNvSpPr>
-            <a:spLocks noGrp="1"/>
+            <a:spLocks noGrp="1" noRot="1" noChangeAspect="1"/>
           </p:cNvSpPr>
           <p:nvPr>
             <p:ph type="sldImg" idx="2"/>
@@ -1801,7 +1795,7 @@
             <a:spLocks noGrp="1"/>
           </p:cNvSpPr>
           <p:nvPr>
-            <p:ph type="body" idx="3" sz="quarter"/>
+            <p:ph type="body" sz="quarter" idx="3"/>
           </p:nvPr>
         </p:nvSpPr>
         <p:spPr/>
@@ -1810,7 +1804,7 @@
           <a:lstStyle/>
           <a:p>
             <a:r>
-              <a:t>효과가 병원마다 다른 이유로 두 가지를 생각했습니다. 하나는 환자마다 장기 위치가 달라 같은 slice 번호가 다른 부위일 수 있다는 점이고, 다른 하나는 두 코호트의 구성 차이입니다. 예를 들어 강남 만성신장질환은 체성분만 추가하면 AUC가 0.015 오르는데 AEC만 추가하면 0.016 떨어집니다. Calibration은 두 모델 패턴이 비슷하고 Brier는 대체로 개선되지만, 당뇨병은 과대예측이어서 재보정이 필요합니다. 두 설명 모두 직접 검증하지는 못했습니다.</a:t>
+              <a:t>정리하면, 기본 정보만으로 AUC는 강남 0.71에서 0.80, 신촌 0.62에서 0.72입니다. AEC만 추가하면 개선이 없었고, 체성분을 더하면 0.014에서 0.066 올랐지만 신촌은 세 질환 모두, 강남은 고혈압만 유의해 병원 간 일관성은 부족했습니다. 통계적 유의성이 곧 임상적 유용성은 아니고 로지스틱 회귀에 한정된 결과입니다. 원인 검증이 다음 과제입니다. 감사합니다.</a:t>
             </a:r>
           </a:p>
         </p:txBody>
@@ -1822,7 +1816,7 @@
             <a:spLocks noGrp="1"/>
           </p:cNvSpPr>
           <p:nvPr>
-            <p:ph type="sldNum" idx="5" sz="quarter"/>
+            <p:ph type="sldNum" sz="quarter" idx="5"/>
           </p:nvPr>
         </p:nvSpPr>
         <p:spPr/>
@@ -1836,7 +1830,7 @@
 </file>
 
 <file path=ppt/notesSlides/notesSlide2.xml><?xml version="1.0" encoding="utf-8"?>
-<p:notes xmlns:a="http://schemas.openxmlformats.org/drawingml/2006/main" xmlns:p="http://schemas.openxmlformats.org/presentationml/2006/main" xmlns:r="http://schemas.openxmlformats.org/officeDocument/2006/relationships">
+<p:notes xmlns:a="http://schemas.openxmlformats.org/drawingml/2006/main" xmlns:r="http://schemas.openxmlformats.org/officeDocument/2006/relationships" xmlns:p="http://schemas.openxmlformats.org/presentationml/2006/main">
   <p:cSld>
     <p:spTree>
       <p:nvGrpSpPr>
@@ -1856,7 +1850,7 @@
         <p:nvSpPr>
           <p:cNvPr id="2" name="Slide Image Placeholder 1"/>
           <p:cNvSpPr>
-            <a:spLocks noGrp="1"/>
+            <a:spLocks noGrp="1" noRot="1" noChangeAspect="1"/>
           </p:cNvSpPr>
           <p:nvPr>
             <p:ph type="sldImg" idx="2"/>
@@ -1871,7 +1865,7 @@
             <a:spLocks noGrp="1"/>
           </p:cNvSpPr>
           <p:nvPr>
-            <p:ph type="body" idx="3" sz="quarter"/>
+            <p:ph type="body" sz="quarter" idx="3"/>
           </p:nvPr>
         </p:nvSpPr>
         <p:spPr/>
@@ -1880,7 +1874,7 @@
           <a:lstStyle/>
           <a:p>
             <a:r>
-              <a:t>AEC는 CT가 환자 몸 두께에 맞춰 튜브 전류를 자동으로 조절하는 기능입니다. 이 전류 곡선이 체형 정보를 담고 있고 촬영할 때마다 자동으로 기록되지만 대부분 버려집니다. 간에서 치골까지를 128구간으로 표준화해 세그멘테이션 없이 바로 입력으로 사용했습니다.</a:t>
+              <a:t>만성질환 위험군을 선별하는 데 이미 찍은 CT를 재활용할 수 있는지가 이 연구의 출발점입니다. 기본 정보만으로 얼마나 구분되는지, AEC와 체성분 곡선을 더하면 나아지는지, 그리고 두 병원에서 일관되는지를 봅니다. 성별은 기본 모델에서도 유의한 변수라 곡선 효과를 해석할 때 함께 고려합니다.</a:t>
             </a:r>
           </a:p>
         </p:txBody>
@@ -1892,7 +1886,7 @@
             <a:spLocks noGrp="1"/>
           </p:cNvSpPr>
           <p:nvPr>
-            <p:ph type="sldNum" idx="5" sz="quarter"/>
+            <p:ph type="sldNum" sz="quarter" idx="5"/>
           </p:nvPr>
         </p:nvSpPr>
         <p:spPr/>
@@ -1906,7 +1900,7 @@
 </file>
 
 <file path=ppt/notesSlides/notesSlide20.xml><?xml version="1.0" encoding="utf-8"?>
-<p:notes xmlns:a="http://schemas.openxmlformats.org/drawingml/2006/main" xmlns:p="http://schemas.openxmlformats.org/presentationml/2006/main" xmlns:r="http://schemas.openxmlformats.org/officeDocument/2006/relationships">
+<p:notes xmlns:a="http://schemas.openxmlformats.org/drawingml/2006/main" xmlns:r="http://schemas.openxmlformats.org/officeDocument/2006/relationships" xmlns:p="http://schemas.openxmlformats.org/presentationml/2006/main">
   <p:cSld>
     <p:spTree>
       <p:nvGrpSpPr>
@@ -1926,7 +1920,7 @@
         <p:nvSpPr>
           <p:cNvPr id="2" name="Slide Image Placeholder 1"/>
           <p:cNvSpPr>
-            <a:spLocks noGrp="1"/>
+            <a:spLocks noGrp="1" noRot="1" noChangeAspect="1"/>
           </p:cNvSpPr>
           <p:nvPr>
             <p:ph type="sldImg" idx="2"/>
@@ -1941,7 +1935,7 @@
             <a:spLocks noGrp="1"/>
           </p:cNvSpPr>
           <p:nvPr>
-            <p:ph type="body" idx="3" sz="quarter"/>
+            <p:ph type="body" sz="quarter" idx="3"/>
           </p:nvPr>
         </p:nvSpPr>
         <p:spPr/>
@@ -1950,7 +1944,7 @@
           <a:lstStyle/>
           <a:p>
             <a:r>
-              <a:t>정리하면, 기본 정보만으로 AUC는 강남 0.71에서 0.80, 신촌 0.62에서 0.72입니다. AEC만 추가하면 개선이 없었고, 체성분을 더하면 0.014에서 0.066 올랐지만 신촌은 세 질환 모두, 강남은 고혈압만 유의해 병원 간 일관성은 부족했습니다. 통계적 유의성이 곧 임상적 유용성은 아니고 로지스틱 회귀에 한정된 결과입니다. 원인 검증이 다음 과제입니다. 감사합니다.</a:t>
+              <a:t>질문 받겠습니다. 감사합니다.</a:t>
             </a:r>
           </a:p>
         </p:txBody>
@@ -1962,7 +1956,7 @@
             <a:spLocks noGrp="1"/>
           </p:cNvSpPr>
           <p:nvPr>
-            <p:ph type="sldNum" idx="5" sz="quarter"/>
+            <p:ph type="sldNum" sz="quarter" idx="5"/>
           </p:nvPr>
         </p:nvSpPr>
         <p:spPr/>
@@ -1976,7 +1970,7 @@
 </file>
 
 <file path=ppt/notesSlides/notesSlide21.xml><?xml version="1.0" encoding="utf-8"?>
-<p:notes xmlns:a="http://schemas.openxmlformats.org/drawingml/2006/main" xmlns:p="http://schemas.openxmlformats.org/presentationml/2006/main" xmlns:r="http://schemas.openxmlformats.org/officeDocument/2006/relationships">
+<p:notes xmlns:a="http://schemas.openxmlformats.org/drawingml/2006/main" xmlns:r="http://schemas.openxmlformats.org/officeDocument/2006/relationships" xmlns:p="http://schemas.openxmlformats.org/presentationml/2006/main">
   <p:cSld>
     <p:spTree>
       <p:nvGrpSpPr>
@@ -1996,7 +1990,7 @@
         <p:nvSpPr>
           <p:cNvPr id="2" name="Slide Image Placeholder 1"/>
           <p:cNvSpPr>
-            <a:spLocks noGrp="1"/>
+            <a:spLocks noGrp="1" noRot="1" noChangeAspect="1"/>
           </p:cNvSpPr>
           <p:nvPr>
             <p:ph type="sldImg" idx="2"/>
@@ -2011,7 +2005,7 @@
             <a:spLocks noGrp="1"/>
           </p:cNvSpPr>
           <p:nvPr>
-            <p:ph type="body" idx="3" sz="quarter"/>
+            <p:ph type="body" sz="quarter" idx="3"/>
           </p:nvPr>
         </p:nvSpPr>
         <p:spPr/>
@@ -2020,7 +2014,7 @@
           <a:lstStyle/>
           <a:p>
             <a:r>
-              <a:t>여기부터는 Appendix, 질문이 있을 때 쓰는 예비 슬라이드입니다.</a:t>
+              <a:t>체성분 곡선별로 Best 모델의 계수를 위치별로 환산한 그림입니다. 곡선마다 기여가 큰 위치가 다르고, IMATA는 치골 쪽에서 당뇨병과 만성신장질환의 기여가 크게 보입니다. 위치 해석은 가설 수준입니다.</a:t>
             </a:r>
           </a:p>
         </p:txBody>
@@ -2032,7 +2026,7 @@
             <a:spLocks noGrp="1"/>
           </p:cNvSpPr>
           <p:nvPr>
-            <p:ph type="sldNum" idx="5" sz="quarter"/>
+            <p:ph type="sldNum" sz="quarter" idx="5"/>
           </p:nvPr>
         </p:nvSpPr>
         <p:spPr/>
@@ -2046,7 +2040,7 @@
 </file>
 
 <file path=ppt/notesSlides/notesSlide22.xml><?xml version="1.0" encoding="utf-8"?>
-<p:notes xmlns:a="http://schemas.openxmlformats.org/drawingml/2006/main" xmlns:p="http://schemas.openxmlformats.org/presentationml/2006/main" xmlns:r="http://schemas.openxmlformats.org/officeDocument/2006/relationships">
+<p:notes xmlns:a="http://schemas.openxmlformats.org/drawingml/2006/main" xmlns:r="http://schemas.openxmlformats.org/officeDocument/2006/relationships" xmlns:p="http://schemas.openxmlformats.org/presentationml/2006/main">
   <p:cSld>
     <p:spTree>
       <p:nvGrpSpPr>
@@ -2066,7 +2060,7 @@
         <p:nvSpPr>
           <p:cNvPr id="2" name="Slide Image Placeholder 1"/>
           <p:cNvSpPr>
-            <a:spLocks noGrp="1"/>
+            <a:spLocks noGrp="1" noRot="1" noChangeAspect="1"/>
           </p:cNvSpPr>
           <p:nvPr>
             <p:ph type="sldImg" idx="2"/>
@@ -2081,7 +2075,7 @@
             <a:spLocks noGrp="1"/>
           </p:cNvSpPr>
           <p:nvPr>
-            <p:ph type="body" idx="3" sz="quarter"/>
+            <p:ph type="body" sz="quarter" idx="3"/>
           </p:nvPr>
         </p:nvSpPr>
         <p:spPr/>
@@ -2090,7 +2084,7 @@
           <a:lstStyle/>
           <a:p>
             <a:r>
-              <a:t>체성분 곡선별로 Best 모델의 계수를 위치별로 환산한 그림입니다. 곡선마다 기여가 큰 위치가 다르고, IMATA는 치골 쪽에서 당뇨병과 만성신장질환의 기여가 크게 보입니다. 위치 해석은 가설 수준입니다.</a:t>
+              <a:t>Calibration plot입니다. 위가 Baseline, 아래가 Best이고 강남은 5-fold 예측, 신촌은 고정 모델 예측입니다. 고혈압은 대체로 대각선 근처이고 당뇨병은 class_weight를 balanced로 둔 영향으로 예측확률이 높게 나옵니다. Brier는 대체로 개선되지만 당뇨병 신촌만 0.238에서 0.247로 나빠졌습니다.</a:t>
             </a:r>
           </a:p>
         </p:txBody>
@@ -2102,7 +2096,7 @@
             <a:spLocks noGrp="1"/>
           </p:cNvSpPr>
           <p:nvPr>
-            <p:ph type="sldNum" idx="5" sz="quarter"/>
+            <p:ph type="sldNum" sz="quarter" idx="5"/>
           </p:nvPr>
         </p:nvSpPr>
         <p:spPr/>
@@ -2116,7 +2110,7 @@
 </file>
 
 <file path=ppt/notesSlides/notesSlide23.xml><?xml version="1.0" encoding="utf-8"?>
-<p:notes xmlns:a="http://schemas.openxmlformats.org/drawingml/2006/main" xmlns:p="http://schemas.openxmlformats.org/presentationml/2006/main" xmlns:r="http://schemas.openxmlformats.org/officeDocument/2006/relationships">
+<p:notes xmlns:a="http://schemas.openxmlformats.org/drawingml/2006/main" xmlns:r="http://schemas.openxmlformats.org/officeDocument/2006/relationships" xmlns:p="http://schemas.openxmlformats.org/presentationml/2006/main">
   <p:cSld>
     <p:spTree>
       <p:nvGrpSpPr>
@@ -2136,7 +2130,7 @@
         <p:nvSpPr>
           <p:cNvPr id="2" name="Slide Image Placeholder 1"/>
           <p:cNvSpPr>
-            <a:spLocks noGrp="1"/>
+            <a:spLocks noGrp="1" noRot="1" noChangeAspect="1"/>
           </p:cNvSpPr>
           <p:nvPr>
             <p:ph type="sldImg" idx="2"/>
@@ -2151,7 +2145,7 @@
             <a:spLocks noGrp="1"/>
           </p:cNvSpPr>
           <p:nvPr>
-            <p:ph type="body" idx="3" sz="quarter"/>
+            <p:ph type="body" sz="quarter" idx="3"/>
           </p:nvPr>
         </p:nvSpPr>
         <p:spPr/>
@@ -2160,7 +2154,7 @@
           <a:lstStyle/>
           <a:p>
             <a:r>
-              <a:t>Calibration plot입니다. 위가 Baseline, 아래가 Best이고 강남은 5-fold 예측, 신촌은 고정 모델 예측입니다. 고혈압은 대체로 대각선 근처이고 당뇨병은 class_weight를 balanced로 둔 영향으로 예측확률이 높게 나옵니다. Brier는 대체로 개선되지만 당뇨병 신촌만 0.238에서 0.247로 나빠졌습니다.</a:t>
+              <a:t>전체 확장 모델의 AUC 비교입니다. Internal은 5-fold 평균과 표준편차, External은 고정 모델 AUC이고 별표는 Baseline 대비 DeLong p&lt;0.05입니다.</a:t>
             </a:r>
           </a:p>
         </p:txBody>
@@ -2172,7 +2166,7 @@
             <a:spLocks noGrp="1"/>
           </p:cNvSpPr>
           <p:nvPr>
-            <p:ph type="sldNum" idx="5" sz="quarter"/>
+            <p:ph type="sldNum" sz="quarter" idx="5"/>
           </p:nvPr>
         </p:nvSpPr>
         <p:spPr/>
@@ -2186,7 +2180,7 @@
 </file>
 
 <file path=ppt/notesSlides/notesSlide24.xml><?xml version="1.0" encoding="utf-8"?>
-<p:notes xmlns:a="http://schemas.openxmlformats.org/drawingml/2006/main" xmlns:p="http://schemas.openxmlformats.org/presentationml/2006/main" xmlns:r="http://schemas.openxmlformats.org/officeDocument/2006/relationships">
+<p:notes xmlns:a="http://schemas.openxmlformats.org/drawingml/2006/main" xmlns:r="http://schemas.openxmlformats.org/officeDocument/2006/relationships" xmlns:p="http://schemas.openxmlformats.org/presentationml/2006/main">
   <p:cSld>
     <p:spTree>
       <p:nvGrpSpPr>
@@ -2206,7 +2200,7 @@
         <p:nvSpPr>
           <p:cNvPr id="2" name="Slide Image Placeholder 1"/>
           <p:cNvSpPr>
-            <a:spLocks noGrp="1"/>
+            <a:spLocks noGrp="1" noRot="1" noChangeAspect="1"/>
           </p:cNvSpPr>
           <p:nvPr>
             <p:ph type="sldImg" idx="2"/>
@@ -2221,7 +2215,7 @@
             <a:spLocks noGrp="1"/>
           </p:cNvSpPr>
           <p:nvPr>
-            <p:ph type="body" idx="3" sz="quarter"/>
+            <p:ph type="body" sz="quarter" idx="3"/>
           </p:nvPr>
         </p:nvSpPr>
         <p:spPr/>
@@ -2230,7 +2224,7 @@
           <a:lstStyle/>
           <a:p>
             <a:r>
-              <a:t>전체 확장 모델의 AUC 비교입니다. Internal은 5-fold 평균과 표준편차, External은 고정 모델 AUC이고 별표는 Baseline 대비 DeLong p&lt;0.05입니다.</a:t>
+              <a:t>AEC FPCA 점수만 추가한 모델의 계수입니다. 세 질환 모두 PC2가 유의하고 PC1은 고혈압에서만 유의합니다.</a:t>
             </a:r>
           </a:p>
         </p:txBody>
@@ -2242,7 +2236,7 @@
             <a:spLocks noGrp="1"/>
           </p:cNvSpPr>
           <p:nvPr>
-            <p:ph type="sldNum" idx="5" sz="quarter"/>
+            <p:ph type="sldNum" sz="quarter" idx="5"/>
           </p:nvPr>
         </p:nvSpPr>
         <p:spPr/>
@@ -2256,7 +2250,7 @@
 </file>
 
 <file path=ppt/notesSlides/notesSlide25.xml><?xml version="1.0" encoding="utf-8"?>
-<p:notes xmlns:a="http://schemas.openxmlformats.org/drawingml/2006/main" xmlns:p="http://schemas.openxmlformats.org/presentationml/2006/main" xmlns:r="http://schemas.openxmlformats.org/officeDocument/2006/relationships">
+<p:notes xmlns:a="http://schemas.openxmlformats.org/drawingml/2006/main" xmlns:r="http://schemas.openxmlformats.org/officeDocument/2006/relationships" xmlns:p="http://schemas.openxmlformats.org/presentationml/2006/main">
   <p:cSld>
     <p:spTree>
       <p:nvGrpSpPr>
@@ -2276,7 +2270,7 @@
         <p:nvSpPr>
           <p:cNvPr id="2" name="Slide Image Placeholder 1"/>
           <p:cNvSpPr>
-            <a:spLocks noGrp="1"/>
+            <a:spLocks noGrp="1" noRot="1" noChangeAspect="1"/>
           </p:cNvSpPr>
           <p:nvPr>
             <p:ph type="sldImg" idx="2"/>
@@ -2291,7 +2285,7 @@
             <a:spLocks noGrp="1"/>
           </p:cNvSpPr>
           <p:nvPr>
-            <p:ph type="body" idx="3" sz="quarter"/>
+            <p:ph type="body" sz="quarter" idx="3"/>
           </p:nvPr>
         </p:nvSpPr>
         <p:spPr/>
@@ -2300,7 +2294,7 @@
           <a:lstStyle/>
           <a:p>
             <a:r>
-              <a:t>AEC FPCA 점수만 추가한 모델의 계수입니다. 세 질환 모두 PC2가 유의하고 PC1은 고혈압에서만 유의합니다.</a:t>
+              <a:t>Baseline 모델의 VIF입니다. 모든 변수가 3보다 작아 기본 모델의 다중공선성은 크지 않습니다.</a:t>
             </a:r>
           </a:p>
         </p:txBody>
@@ -2312,7 +2306,7 @@
             <a:spLocks noGrp="1"/>
           </p:cNvSpPr>
           <p:nvPr>
-            <p:ph type="sldNum" idx="5" sz="quarter"/>
+            <p:ph type="sldNum" sz="quarter" idx="5"/>
           </p:nvPr>
         </p:nvSpPr>
         <p:spPr/>
@@ -2326,7 +2320,7 @@
 </file>
 
 <file path=ppt/notesSlides/notesSlide26.xml><?xml version="1.0" encoding="utf-8"?>
-<p:notes xmlns:a="http://schemas.openxmlformats.org/drawingml/2006/main" xmlns:p="http://schemas.openxmlformats.org/presentationml/2006/main" xmlns:r="http://schemas.openxmlformats.org/officeDocument/2006/relationships">
+<p:notes xmlns:a="http://schemas.openxmlformats.org/drawingml/2006/main" xmlns:r="http://schemas.openxmlformats.org/officeDocument/2006/relationships" xmlns:p="http://schemas.openxmlformats.org/presentationml/2006/main">
   <p:cSld>
     <p:spTree>
       <p:nvGrpSpPr>
@@ -2346,7 +2340,7 @@
         <p:nvSpPr>
           <p:cNvPr id="2" name="Slide Image Placeholder 1"/>
           <p:cNvSpPr>
-            <a:spLocks noGrp="1"/>
+            <a:spLocks noGrp="1" noRot="1" noChangeAspect="1"/>
           </p:cNvSpPr>
           <p:nvPr>
             <p:ph type="sldImg" idx="2"/>
@@ -2361,7 +2355,7 @@
             <a:spLocks noGrp="1"/>
           </p:cNvSpPr>
           <p:nvPr>
-            <p:ph type="body" idx="3" sz="quarter"/>
+            <p:ph type="body" sz="quarter" idx="3"/>
           </p:nvPr>
         </p:nvSpPr>
         <p:spPr/>
@@ -2370,7 +2364,7 @@
           <a:lstStyle/>
           <a:p>
             <a:r>
-              <a:t>Baseline 모델의 VIF입니다. 모든 변수가 3보다 작아 기본 모델의 다중공선성은 크지 않습니다.</a:t>
+              <a:t>고혈압의 fold별 성능입니다. Baseline 대비 AEC·체성분 모델의 평균 AUC는 0.796에서 0.811이고 External은 0.718에서 0.741입니다. ± 값은 표본 표준편차입니다.</a:t>
             </a:r>
           </a:p>
         </p:txBody>
@@ -2382,7 +2376,7 @@
             <a:spLocks noGrp="1"/>
           </p:cNvSpPr>
           <p:nvPr>
-            <p:ph type="sldNum" idx="5" sz="quarter"/>
+            <p:ph type="sldNum" sz="quarter" idx="5"/>
           </p:nvPr>
         </p:nvSpPr>
         <p:spPr/>
@@ -2396,7 +2390,7 @@
 </file>
 
 <file path=ppt/notesSlides/notesSlide27.xml><?xml version="1.0" encoding="utf-8"?>
-<p:notes xmlns:a="http://schemas.openxmlformats.org/drawingml/2006/main" xmlns:p="http://schemas.openxmlformats.org/presentationml/2006/main" xmlns:r="http://schemas.openxmlformats.org/officeDocument/2006/relationships">
+<p:notes xmlns:a="http://schemas.openxmlformats.org/drawingml/2006/main" xmlns:r="http://schemas.openxmlformats.org/officeDocument/2006/relationships" xmlns:p="http://schemas.openxmlformats.org/presentationml/2006/main">
   <p:cSld>
     <p:spTree>
       <p:nvGrpSpPr>
@@ -2416,7 +2410,7 @@
         <p:nvSpPr>
           <p:cNvPr id="2" name="Slide Image Placeholder 1"/>
           <p:cNvSpPr>
-            <a:spLocks noGrp="1"/>
+            <a:spLocks noGrp="1" noRot="1" noChangeAspect="1"/>
           </p:cNvSpPr>
           <p:nvPr>
             <p:ph type="sldImg" idx="2"/>
@@ -2431,7 +2425,7 @@
             <a:spLocks noGrp="1"/>
           </p:cNvSpPr>
           <p:nvPr>
-            <p:ph type="body" idx="3" sz="quarter"/>
+            <p:ph type="body" sz="quarter" idx="3"/>
           </p:nvPr>
         </p:nvSpPr>
         <p:spPr/>
@@ -2440,7 +2434,7 @@
           <a:lstStyle/>
           <a:p>
             <a:r>
-              <a:t>고혈압의 fold별 성능입니다. Baseline 대비 AEC·체성분 모델의 평균 AUC는 0.796에서 0.811이고 External은 0.718에서 0.741입니다. ± 값은 표본 표준편차입니다.</a:t>
+              <a:t>당뇨병의 fold별 성능입니다. 평균 AUC는 0.712에서 0.736, External은 0.665에서 0.706입니다. Fold 4에서 값이 낮아 fold 간 변동이 큽니다.</a:t>
             </a:r>
           </a:p>
         </p:txBody>
@@ -2452,7 +2446,7 @@
             <a:spLocks noGrp="1"/>
           </p:cNvSpPr>
           <p:nvPr>
-            <p:ph type="sldNum" idx="5" sz="quarter"/>
+            <p:ph type="sldNum" sz="quarter" idx="5"/>
           </p:nvPr>
         </p:nvSpPr>
         <p:spPr/>
@@ -2466,7 +2460,7 @@
 </file>
 
 <file path=ppt/notesSlides/notesSlide28.xml><?xml version="1.0" encoding="utf-8"?>
-<p:notes xmlns:a="http://schemas.openxmlformats.org/drawingml/2006/main" xmlns:p="http://schemas.openxmlformats.org/presentationml/2006/main" xmlns:r="http://schemas.openxmlformats.org/officeDocument/2006/relationships">
+<p:notes xmlns:a="http://schemas.openxmlformats.org/drawingml/2006/main" xmlns:r="http://schemas.openxmlformats.org/officeDocument/2006/relationships" xmlns:p="http://schemas.openxmlformats.org/presentationml/2006/main">
   <p:cSld>
     <p:spTree>
       <p:nvGrpSpPr>
@@ -2486,7 +2480,7 @@
         <p:nvSpPr>
           <p:cNvPr id="2" name="Slide Image Placeholder 1"/>
           <p:cNvSpPr>
-            <a:spLocks noGrp="1"/>
+            <a:spLocks noGrp="1" noRot="1" noChangeAspect="1"/>
           </p:cNvSpPr>
           <p:nvPr>
             <p:ph type="sldImg" idx="2"/>
@@ -2501,7 +2495,7 @@
             <a:spLocks noGrp="1"/>
           </p:cNvSpPr>
           <p:nvPr>
-            <p:ph type="body" idx="3" sz="quarter"/>
+            <p:ph type="body" sz="quarter" idx="3"/>
           </p:nvPr>
         </p:nvSpPr>
         <p:spPr/>
@@ -2510,7 +2504,7 @@
           <a:lstStyle/>
           <a:p>
             <a:r>
-              <a:t>당뇨병의 fold별 성능입니다. 평균 AUC는 0.712에서 0.736, External은 0.665에서 0.706입니다. Fold 4에서 값이 낮아 fold 간 변동이 큽니다.</a:t>
+              <a:t>만성신장질환의 fold별 성능입니다. 평균 AUC는 0.770에서 0.784, External은 0.615에서 0.681입니다. 양성이 fold당 21명뿐이라 변동이 큽니다.</a:t>
             </a:r>
           </a:p>
         </p:txBody>
@@ -2522,7 +2516,7 @@
             <a:spLocks noGrp="1"/>
           </p:cNvSpPr>
           <p:nvPr>
-            <p:ph type="sldNum" idx="5" sz="quarter"/>
+            <p:ph type="sldNum" sz="quarter" idx="5"/>
           </p:nvPr>
         </p:nvSpPr>
         <p:spPr/>
@@ -2535,8 +2529,8 @@
 </p:notes>
 </file>
 
-<file path=ppt/notesSlides/notesSlide29.xml><?xml version="1.0" encoding="utf-8"?>
-<p:notes xmlns:a="http://schemas.openxmlformats.org/drawingml/2006/main" xmlns:p="http://schemas.openxmlformats.org/presentationml/2006/main" xmlns:r="http://schemas.openxmlformats.org/officeDocument/2006/relationships">
+<file path=ppt/notesSlides/notesSlide3.xml><?xml version="1.0" encoding="utf-8"?>
+<p:notes xmlns:a="http://schemas.openxmlformats.org/drawingml/2006/main" xmlns:r="http://schemas.openxmlformats.org/officeDocument/2006/relationships" xmlns:p="http://schemas.openxmlformats.org/presentationml/2006/main">
   <p:cSld>
     <p:spTree>
       <p:nvGrpSpPr>
@@ -2556,7 +2550,7 @@
         <p:nvSpPr>
           <p:cNvPr id="2" name="Slide Image Placeholder 1"/>
           <p:cNvSpPr>
-            <a:spLocks noGrp="1"/>
+            <a:spLocks noGrp="1" noRot="1" noChangeAspect="1"/>
           </p:cNvSpPr>
           <p:nvPr>
             <p:ph type="sldImg" idx="2"/>
@@ -2571,7 +2565,7 @@
             <a:spLocks noGrp="1"/>
           </p:cNvSpPr>
           <p:nvPr>
-            <p:ph type="body" idx="3" sz="quarter"/>
+            <p:ph type="body" sz="quarter" idx="3"/>
           </p:nvPr>
         </p:nvSpPr>
         <p:spPr/>
@@ -2580,7 +2574,7 @@
           <a:lstStyle/>
           <a:p>
             <a:r>
-              <a:t>만성신장질환의 fold별 성능입니다. 평균 AUC는 0.770에서 0.784, External은 0.615에서 0.681입니다. 양성이 fold당 21명뿐이라 변동이 큽니다.</a:t>
+              <a:t>AEC는 CT가 환자 몸 두께에 맞춰 튜브 전류를 자동으로 조절하는 기능입니다. 이 전류 곡선이 체형 정보를 담고 있고 촬영할 때마다 자동으로 기록되지만 대부분 버려집니다. 간에서 치골까지를 128구간으로 표준화해 세그멘테이션 없이 바로 입력으로 사용했습니다.</a:t>
             </a:r>
           </a:p>
         </p:txBody>
@@ -2592,7 +2586,7 @@
             <a:spLocks noGrp="1"/>
           </p:cNvSpPr>
           <p:nvPr>
-            <p:ph type="sldNum" idx="5" sz="quarter"/>
+            <p:ph type="sldNum" sz="quarter" idx="5"/>
           </p:nvPr>
         </p:nvSpPr>
         <p:spPr/>
@@ -2605,8 +2599,8 @@
 </p:notes>
 </file>
 
-<file path=ppt/notesSlides/notesSlide3.xml><?xml version="1.0" encoding="utf-8"?>
-<p:notes xmlns:a="http://schemas.openxmlformats.org/drawingml/2006/main" xmlns:p="http://schemas.openxmlformats.org/presentationml/2006/main" xmlns:r="http://schemas.openxmlformats.org/officeDocument/2006/relationships">
+<file path=ppt/notesSlides/notesSlide4.xml><?xml version="1.0" encoding="utf-8"?>
+<p:notes xmlns:a="http://schemas.openxmlformats.org/drawingml/2006/main" xmlns:r="http://schemas.openxmlformats.org/officeDocument/2006/relationships" xmlns:p="http://schemas.openxmlformats.org/presentationml/2006/main">
   <p:cSld>
     <p:spTree>
       <p:nvGrpSpPr>
@@ -2626,7 +2620,7 @@
         <p:nvSpPr>
           <p:cNvPr id="2" name="Slide Image Placeholder 1"/>
           <p:cNvSpPr>
-            <a:spLocks noGrp="1"/>
+            <a:spLocks noGrp="1" noRot="1" noChangeAspect="1"/>
           </p:cNvSpPr>
           <p:nvPr>
             <p:ph type="sldImg" idx="2"/>
@@ -2641,7 +2635,7 @@
             <a:spLocks noGrp="1"/>
           </p:cNvSpPr>
           <p:nvPr>
-            <p:ph type="body" idx="3" sz="quarter"/>
+            <p:ph type="body" sz="quarter" idx="3"/>
           </p:nvPr>
         </p:nvSpPr>
         <p:spPr/>
@@ -2662,7 +2656,7 @@
             <a:spLocks noGrp="1"/>
           </p:cNvSpPr>
           <p:nvPr>
-            <p:ph type="sldNum" idx="5" sz="quarter"/>
+            <p:ph type="sldNum" sz="quarter" idx="5"/>
           </p:nvPr>
         </p:nvSpPr>
         <p:spPr/>
@@ -2675,8 +2669,8 @@
 </p:notes>
 </file>
 
-<file path=ppt/notesSlides/notesSlide4.xml><?xml version="1.0" encoding="utf-8"?>
-<p:notes xmlns:a="http://schemas.openxmlformats.org/drawingml/2006/main" xmlns:p="http://schemas.openxmlformats.org/presentationml/2006/main" xmlns:r="http://schemas.openxmlformats.org/officeDocument/2006/relationships">
+<file path=ppt/notesSlides/notesSlide5.xml><?xml version="1.0" encoding="utf-8"?>
+<p:notes xmlns:a="http://schemas.openxmlformats.org/drawingml/2006/main" xmlns:r="http://schemas.openxmlformats.org/officeDocument/2006/relationships" xmlns:p="http://schemas.openxmlformats.org/presentationml/2006/main">
   <p:cSld>
     <p:spTree>
       <p:nvGrpSpPr>
@@ -2696,7 +2690,7 @@
         <p:nvSpPr>
           <p:cNvPr id="2" name="Slide Image Placeholder 1"/>
           <p:cNvSpPr>
-            <a:spLocks noGrp="1"/>
+            <a:spLocks noGrp="1" noRot="1" noChangeAspect="1"/>
           </p:cNvSpPr>
           <p:nvPr>
             <p:ph type="sldImg" idx="2"/>
@@ -2711,7 +2705,7 @@
             <a:spLocks noGrp="1"/>
           </p:cNvSpPr>
           <p:nvPr>
-            <p:ph type="body" idx="3" sz="quarter"/>
+            <p:ph type="body" sz="quarter" idx="3"/>
           </p:nvPr>
         </p:nvSpPr>
         <p:spPr/>
@@ -2732,7 +2726,7 @@
             <a:spLocks noGrp="1"/>
           </p:cNvSpPr>
           <p:nvPr>
-            <p:ph type="sldNum" idx="5" sz="quarter"/>
+            <p:ph type="sldNum" sz="quarter" idx="5"/>
           </p:nvPr>
         </p:nvSpPr>
         <p:spPr/>
@@ -2745,8 +2739,8 @@
 </p:notes>
 </file>
 
-<file path=ppt/notesSlides/notesSlide5.xml><?xml version="1.0" encoding="utf-8"?>
-<p:notes xmlns:a="http://schemas.openxmlformats.org/drawingml/2006/main" xmlns:p="http://schemas.openxmlformats.org/presentationml/2006/main" xmlns:r="http://schemas.openxmlformats.org/officeDocument/2006/relationships">
+<file path=ppt/notesSlides/notesSlide6.xml><?xml version="1.0" encoding="utf-8"?>
+<p:notes xmlns:a="http://schemas.openxmlformats.org/drawingml/2006/main" xmlns:r="http://schemas.openxmlformats.org/officeDocument/2006/relationships" xmlns:p="http://schemas.openxmlformats.org/presentationml/2006/main">
   <p:cSld>
     <p:spTree>
       <p:nvGrpSpPr>
@@ -2766,7 +2760,7 @@
         <p:nvSpPr>
           <p:cNvPr id="2" name="Slide Image Placeholder 1"/>
           <p:cNvSpPr>
-            <a:spLocks noGrp="1"/>
+            <a:spLocks noGrp="1" noRot="1" noChangeAspect="1"/>
           </p:cNvSpPr>
           <p:nvPr>
             <p:ph type="sldImg" idx="2"/>
@@ -2781,7 +2775,7 @@
             <a:spLocks noGrp="1"/>
           </p:cNvSpPr>
           <p:nvPr>
-            <p:ph type="body" idx="3" sz="quarter"/>
+            <p:ph type="body" sz="quarter" idx="3"/>
           </p:nvPr>
         </p:nvSpPr>
         <p:spPr/>
@@ -2802,7 +2796,7 @@
             <a:spLocks noGrp="1"/>
           </p:cNvSpPr>
           <p:nvPr>
-            <p:ph type="sldNum" idx="5" sz="quarter"/>
+            <p:ph type="sldNum" sz="quarter" idx="5"/>
           </p:nvPr>
         </p:nvSpPr>
         <p:spPr/>
@@ -2815,8 +2809,8 @@
 </p:notes>
 </file>
 
-<file path=ppt/notesSlides/notesSlide6.xml><?xml version="1.0" encoding="utf-8"?>
-<p:notes xmlns:a="http://schemas.openxmlformats.org/drawingml/2006/main" xmlns:p="http://schemas.openxmlformats.org/presentationml/2006/main" xmlns:r="http://schemas.openxmlformats.org/officeDocument/2006/relationships">
+<file path=ppt/notesSlides/notesSlide7.xml><?xml version="1.0" encoding="utf-8"?>
+<p:notes xmlns:a="http://schemas.openxmlformats.org/drawingml/2006/main" xmlns:r="http://schemas.openxmlformats.org/officeDocument/2006/relationships" xmlns:p="http://schemas.openxmlformats.org/presentationml/2006/main">
   <p:cSld>
     <p:spTree>
       <p:nvGrpSpPr>
@@ -2836,7 +2830,7 @@
         <p:nvSpPr>
           <p:cNvPr id="2" name="Slide Image Placeholder 1"/>
           <p:cNvSpPr>
-            <a:spLocks noGrp="1"/>
+            <a:spLocks noGrp="1" noRot="1" noChangeAspect="1"/>
           </p:cNvSpPr>
           <p:nvPr>
             <p:ph type="sldImg" idx="2"/>
@@ -2851,7 +2845,7 @@
             <a:spLocks noGrp="1"/>
           </p:cNvSpPr>
           <p:nvPr>
-            <p:ph type="body" idx="3" sz="quarter"/>
+            <p:ph type="body" sz="quarter" idx="3"/>
           </p:nvPr>
         </p:nvSpPr>
         <p:spPr/>
@@ -2872,7 +2866,7 @@
             <a:spLocks noGrp="1"/>
           </p:cNvSpPr>
           <p:nvPr>
-            <p:ph type="sldNum" idx="5" sz="quarter"/>
+            <p:ph type="sldNum" sz="quarter" idx="5"/>
           </p:nvPr>
         </p:nvSpPr>
         <p:spPr/>
@@ -2885,8 +2879,8 @@
 </p:notes>
 </file>
 
-<file path=ppt/notesSlides/notesSlide7.xml><?xml version="1.0" encoding="utf-8"?>
-<p:notes xmlns:a="http://schemas.openxmlformats.org/drawingml/2006/main" xmlns:p="http://schemas.openxmlformats.org/presentationml/2006/main" xmlns:r="http://schemas.openxmlformats.org/officeDocument/2006/relationships">
+<file path=ppt/notesSlides/notesSlide8.xml><?xml version="1.0" encoding="utf-8"?>
+<p:notes xmlns:a="http://schemas.openxmlformats.org/drawingml/2006/main" xmlns:r="http://schemas.openxmlformats.org/officeDocument/2006/relationships" xmlns:p="http://schemas.openxmlformats.org/presentationml/2006/main">
   <p:cSld>
     <p:spTree>
       <p:nvGrpSpPr>
@@ -2906,7 +2900,7 @@
         <p:nvSpPr>
           <p:cNvPr id="2" name="Slide Image Placeholder 1"/>
           <p:cNvSpPr>
-            <a:spLocks noGrp="1"/>
+            <a:spLocks noGrp="1" noRot="1" noChangeAspect="1"/>
           </p:cNvSpPr>
           <p:nvPr>
             <p:ph type="sldImg" idx="2"/>
@@ -2921,7 +2915,7 @@
             <a:spLocks noGrp="1"/>
           </p:cNvSpPr>
           <p:nvPr>
-            <p:ph type="body" idx="3" sz="quarter"/>
+            <p:ph type="body" sz="quarter" idx="3"/>
           </p:nvPr>
         </p:nvSpPr>
         <p:spPr/>
@@ -2942,7 +2936,7 @@
             <a:spLocks noGrp="1"/>
           </p:cNvSpPr>
           <p:nvPr>
-            <p:ph type="sldNum" idx="5" sz="quarter"/>
+            <p:ph type="sldNum" sz="quarter" idx="5"/>
           </p:nvPr>
         </p:nvSpPr>
         <p:spPr/>
@@ -2955,8 +2949,8 @@
 </p:notes>
 </file>
 
-<file path=ppt/notesSlides/notesSlide8.xml><?xml version="1.0" encoding="utf-8"?>
-<p:notes xmlns:a="http://schemas.openxmlformats.org/drawingml/2006/main" xmlns:p="http://schemas.openxmlformats.org/presentationml/2006/main" xmlns:r="http://schemas.openxmlformats.org/officeDocument/2006/relationships">
+<file path=ppt/notesSlides/notesSlide9.xml><?xml version="1.0" encoding="utf-8"?>
+<p:notes xmlns:a="http://schemas.openxmlformats.org/drawingml/2006/main" xmlns:r="http://schemas.openxmlformats.org/officeDocument/2006/relationships" xmlns:p="http://schemas.openxmlformats.org/presentationml/2006/main">
   <p:cSld>
     <p:spTree>
       <p:nvGrpSpPr>
@@ -2976,7 +2970,7 @@
         <p:nvSpPr>
           <p:cNvPr id="2" name="Slide Image Placeholder 1"/>
           <p:cNvSpPr>
-            <a:spLocks noGrp="1"/>
+            <a:spLocks noGrp="1" noRot="1" noChangeAspect="1"/>
           </p:cNvSpPr>
           <p:nvPr>
             <p:ph type="sldImg" idx="2"/>
@@ -2991,7 +2985,7 @@
             <a:spLocks noGrp="1"/>
           </p:cNvSpPr>
           <p:nvPr>
-            <p:ph type="body" idx="3" sz="quarter"/>
+            <p:ph type="body" sz="quarter" idx="3"/>
           </p:nvPr>
         </p:nvSpPr>
         <p:spPr/>
@@ -3012,77 +3006,7 @@
             <a:spLocks noGrp="1"/>
           </p:cNvSpPr>
           <p:nvPr>
-            <p:ph type="sldNum" idx="5" sz="quarter"/>
-          </p:nvPr>
-        </p:nvSpPr>
-        <p:spPr/>
-      </p:sp>
-    </p:spTree>
-  </p:cSld>
-  <p:clrMapOvr>
-    <a:masterClrMapping/>
-  </p:clrMapOvr>
-</p:notes>
-</file>
-
-<file path=ppt/notesSlides/notesSlide9.xml><?xml version="1.0" encoding="utf-8"?>
-<p:notes xmlns:a="http://schemas.openxmlformats.org/drawingml/2006/main" xmlns:p="http://schemas.openxmlformats.org/presentationml/2006/main" xmlns:r="http://schemas.openxmlformats.org/officeDocument/2006/relationships">
-  <p:cSld>
-    <p:spTree>
-      <p:nvGrpSpPr>
-        <p:cNvPr id="1" name=""/>
-        <p:cNvGrpSpPr/>
-        <p:nvPr/>
-      </p:nvGrpSpPr>
-      <p:grpSpPr>
-        <a:xfrm>
-          <a:off x="0" y="0"/>
-          <a:ext cx="0" cy="0"/>
-          <a:chOff x="0" y="0"/>
-          <a:chExt cx="0" cy="0"/>
-        </a:xfrm>
-      </p:grpSpPr>
-      <p:sp>
-        <p:nvSpPr>
-          <p:cNvPr id="2" name="Slide Image Placeholder 1"/>
-          <p:cNvSpPr>
-            <a:spLocks noGrp="1"/>
-          </p:cNvSpPr>
-          <p:nvPr>
-            <p:ph type="sldImg" idx="2"/>
-          </p:nvPr>
-        </p:nvSpPr>
-        <p:spPr/>
-      </p:sp>
-      <p:sp>
-        <p:nvSpPr>
-          <p:cNvPr id="3" name="Notes Placeholder 2"/>
-          <p:cNvSpPr>
-            <a:spLocks noGrp="1"/>
-          </p:cNvSpPr>
-          <p:nvPr>
-            <p:ph type="body" idx="3" sz="quarter"/>
-          </p:nvPr>
-        </p:nvSpPr>
-        <p:spPr/>
-        <p:txBody>
-          <a:bodyPr/>
-          <a:lstStyle/>
-          <a:p>
-            <a:r>
-              <a:t>PC 개수는 성능을 보고 정한 것이 아니라, scree 곡선에서 PC1과 PC20을 잇는 직선과 가장 멀리 떨어진 지점을 Kneedle 방식으로 찾아 정했습니다. 파란 점선이 그 직선이고 빨간 원이 elbow입니다. AEC와 IMATA는 3개, VAT, SAT, LAMA, NAMA는 2개입니다.</a:t>
-            </a:r>
-          </a:p>
-        </p:txBody>
-      </p:sp>
-      <p:sp>
-        <p:nvSpPr>
-          <p:cNvPr id="4" name="Slide Number Placeholder 3"/>
-          <p:cNvSpPr>
-            <a:spLocks noGrp="1"/>
-          </p:cNvSpPr>
-          <p:nvPr>
-            <p:ph type="sldNum" idx="5" sz="quarter"/>
+            <p:ph type="sldNum" sz="quarter" idx="5"/>
           </p:nvPr>
         </p:nvSpPr>
         <p:spPr/>
@@ -6921,7 +6845,7 @@
 </file>
 
 <file path=ppt/slides/slide10.xml><?xml version="1.0" encoding="utf-8"?>
-<p:sld xmlns:a="http://schemas.openxmlformats.org/drawingml/2006/main" xmlns:p="http://schemas.openxmlformats.org/presentationml/2006/main" xmlns:r="http://schemas.openxmlformats.org/officeDocument/2006/relationships">
+<p:sld xmlns:a="http://schemas.openxmlformats.org/drawingml/2006/main" xmlns:r="http://schemas.openxmlformats.org/officeDocument/2006/relationships" xmlns:p="http://schemas.openxmlformats.org/presentationml/2006/main">
   <p:cSld>
     <p:spTree>
       <p:nvGrpSpPr>
@@ -6929,7 +6853,14 @@
         <p:cNvGrpSpPr/>
         <p:nvPr/>
       </p:nvGrpSpPr>
-      <p:grpSpPr/>
+      <p:grpSpPr>
+        <a:xfrm>
+          <a:off x="0" y="0"/>
+          <a:ext cx="0" cy="0"/>
+          <a:chOff x="0" y="0"/>
+          <a:chExt cx="0" cy="0"/>
+        </a:xfrm>
+      </p:grpSpPr>
       <p:sp>
         <p:nvSpPr>
           <p:cNvPr id="2" name="Title 1"/>
@@ -6976,7 +6907,6 @@
           <a:bodyPr/>
           <a:lstStyle/>
           <a:p>
-            <a:pPr/>
             <a:r>
               <a:rPr sz="1800" b="0">
                 <a:solidFill>
@@ -7003,7 +6933,6 @@
             </a:r>
           </a:p>
           <a:p>
-            <a:pPr/>
             <a:r>
               <a:rPr sz="1800" b="0">
                 <a:solidFill>
@@ -7055,6 +6984,7 @@
           <a:lstStyle/>
           <a:p>
             <a:pPr algn="ctr"/>
+            <a:endParaRPr/>
           </a:p>
         </p:txBody>
       </p:sp>
@@ -7094,7 +7024,7 @@
           </a:fontRef>
         </p:style>
         <p:txBody>
-          <a:bodyPr rtlCol="0" anchor="ctr" tIns="0" bIns="0"/>
+          <a:bodyPr tIns="0" bIns="0" rtlCol="0" anchor="ctr"/>
           <a:lstStyle/>
           <a:p>
             <a:pPr algn="ctr"/>
@@ -7133,7 +7063,7 @@
             <a:fld id="{9F4AF89A-28FA-47FA-B28F-9A9C6913CB7A}" type="slidenum">
               <a:rPr lang="ko-KR" altLang="en-US" smtClean="0"/>
               <a:pPr/>
-              <a:t>3</a:t>
+              <a:t>10</a:t>
             </a:fld>
             <a:endParaRPr lang="ko-KR" altLang="en-US" dirty="0"/>
           </a:p>
@@ -7148,7 +7078,7 @@
           <p:nvPr/>
         </p:nvPicPr>
         <p:blipFill>
-          <a:blip r:embed="rId5"/>
+          <a:blip r:embed="rId3"/>
           <a:stretch>
             <a:fillRect/>
           </a:stretch>
@@ -7172,7 +7102,7 @@
 </file>
 
 <file path=ppt/slides/slide11.xml><?xml version="1.0" encoding="utf-8"?>
-<p:sld xmlns:a="http://schemas.openxmlformats.org/drawingml/2006/main" xmlns:p="http://schemas.openxmlformats.org/presentationml/2006/main" xmlns:r="http://schemas.openxmlformats.org/officeDocument/2006/relationships">
+<p:sld xmlns:a="http://schemas.openxmlformats.org/drawingml/2006/main" xmlns:r="http://schemas.openxmlformats.org/officeDocument/2006/relationships" xmlns:p="http://schemas.openxmlformats.org/presentationml/2006/main">
   <p:cSld>
     <p:spTree>
       <p:nvGrpSpPr>
@@ -7180,7 +7110,14 @@
         <p:cNvGrpSpPr/>
         <p:nvPr/>
       </p:nvGrpSpPr>
-      <p:grpSpPr/>
+      <p:grpSpPr>
+        <a:xfrm>
+          <a:off x="0" y="0"/>
+          <a:ext cx="0" cy="0"/>
+          <a:chOff x="0" y="0"/>
+          <a:chExt cx="0" cy="0"/>
+        </a:xfrm>
+      </p:grpSpPr>
       <p:sp>
         <p:nvSpPr>
           <p:cNvPr id="2" name="Title 1"/>
@@ -7227,7 +7164,6 @@
           <a:bodyPr/>
           <a:lstStyle/>
           <a:p>
-            <a:pPr/>
             <a:r>
               <a:rPr sz="1800" b="0">
                 <a:solidFill>
@@ -7254,7 +7190,6 @@
             </a:r>
           </a:p>
           <a:p>
-            <a:pPr/>
             <a:r>
               <a:rPr sz="1800" b="0">
                 <a:solidFill>
@@ -7265,7 +7200,6 @@
             </a:r>
           </a:p>
           <a:p>
-            <a:pPr/>
             <a:r>
               <a:rPr sz="1800" b="0">
                 <a:solidFill>
@@ -7325,6 +7259,7 @@
           <a:lstStyle/>
           <a:p>
             <a:pPr algn="ctr"/>
+            <a:endParaRPr/>
           </a:p>
         </p:txBody>
       </p:sp>
@@ -7364,7 +7299,7 @@
           </a:fontRef>
         </p:style>
         <p:txBody>
-          <a:bodyPr rtlCol="0" anchor="ctr" tIns="0" bIns="0"/>
+          <a:bodyPr tIns="0" bIns="0" rtlCol="0" anchor="ctr"/>
           <a:lstStyle/>
           <a:p>
             <a:pPr algn="ctr"/>
@@ -7403,7 +7338,7 @@
             <a:fld id="{9F4AF89A-28FA-47FA-B28F-9A9C6913CB7A}" type="slidenum">
               <a:rPr lang="ko-KR" altLang="en-US" smtClean="0"/>
               <a:pPr/>
-              <a:t>3</a:t>
+              <a:t>11</a:t>
             </a:fld>
             <a:endParaRPr lang="ko-KR" altLang="en-US" dirty="0"/>
           </a:p>
@@ -7415,10 +7350,16 @@
           <p:cNvGraphicFramePr>
             <a:graphicFrameLocks noGrp="1"/>
           </p:cNvGraphicFramePr>
-          <p:nvPr/>
+          <p:nvPr>
+            <p:extLst>
+              <p:ext uri="{D42A27DB-BD31-4B8C-83A1-F6EECF244321}">
+                <p14:modId xmlns:p14="http://schemas.microsoft.com/office/powerpoint/2010/main" val="2056362364"/>
+              </p:ext>
+            </p:extLst>
+          </p:nvPr>
         </p:nvGraphicFramePr>
         <p:xfrm>
-          <a:off x="512064" y="2627280"/>
+          <a:off x="1096000" y="3530721"/>
           <a:ext cx="10000000" cy="1760000"/>
         </p:xfrm>
         <a:graphic>
@@ -7689,7 +7630,7 @@
                     <a:p>
                       <a:pPr algn="ctr"/>
                       <a:r>
-                        <a:rPr sz="1200"/>
+                        <a:rPr sz="1200" dirty="0"/>
                         <a:t>0.714</a:t>
                       </a:r>
                     </a:p>
@@ -7822,7 +7763,7 @@
                     <a:p>
                       <a:pPr algn="ctr"/>
                       <a:r>
-                        <a:rPr sz="1200"/>
+                        <a:rPr sz="1200" dirty="0"/>
                         <a:t>0.273</a:t>
                       </a:r>
                     </a:p>
@@ -7848,7 +7789,7 @@
 </file>
 
 <file path=ppt/slides/slide12.xml><?xml version="1.0" encoding="utf-8"?>
-<p:sld xmlns:a="http://schemas.openxmlformats.org/drawingml/2006/main" xmlns:p="http://schemas.openxmlformats.org/presentationml/2006/main" xmlns:r="http://schemas.openxmlformats.org/officeDocument/2006/relationships">
+<p:sld xmlns:a="http://schemas.openxmlformats.org/drawingml/2006/main" xmlns:r="http://schemas.openxmlformats.org/officeDocument/2006/relationships" xmlns:p="http://schemas.openxmlformats.org/presentationml/2006/main">
   <p:cSld>
     <p:spTree>
       <p:nvGrpSpPr>
@@ -7856,7 +7797,14 @@
         <p:cNvGrpSpPr/>
         <p:nvPr/>
       </p:nvGrpSpPr>
-      <p:grpSpPr/>
+      <p:grpSpPr>
+        <a:xfrm>
+          <a:off x="0" y="0"/>
+          <a:ext cx="0" cy="0"/>
+          <a:chOff x="0" y="0"/>
+          <a:chExt cx="0" cy="0"/>
+        </a:xfrm>
+      </p:grpSpPr>
       <p:sp>
         <p:nvSpPr>
           <p:cNvPr id="2" name="Title 1"/>
@@ -7903,7 +7851,6 @@
           <a:bodyPr/>
           <a:lstStyle/>
           <a:p>
-            <a:pPr/>
             <a:r>
               <a:rPr sz="1800" b="0">
                 <a:solidFill>
@@ -7930,7 +7877,6 @@
             </a:r>
           </a:p>
           <a:p>
-            <a:pPr/>
             <a:r>
               <a:rPr sz="1800" b="0">
                 <a:solidFill>
@@ -7998,6 +7944,7 @@
           <a:lstStyle/>
           <a:p>
             <a:pPr algn="ctr"/>
+            <a:endParaRPr/>
           </a:p>
         </p:txBody>
       </p:sp>
@@ -8037,7 +7984,7 @@
           </a:fontRef>
         </p:style>
         <p:txBody>
-          <a:bodyPr rtlCol="0" anchor="ctr" tIns="0" bIns="0"/>
+          <a:bodyPr tIns="0" bIns="0" rtlCol="0" anchor="ctr"/>
           <a:lstStyle/>
           <a:p>
             <a:pPr algn="ctr"/>
@@ -8076,7 +8023,7 @@
             <a:fld id="{9F4AF89A-28FA-47FA-B28F-9A9C6913CB7A}" type="slidenum">
               <a:rPr lang="ko-KR" altLang="en-US" smtClean="0"/>
               <a:pPr/>
-              <a:t>3</a:t>
+              <a:t>12</a:t>
             </a:fld>
             <a:endParaRPr lang="ko-KR" altLang="en-US" dirty="0"/>
           </a:p>
@@ -8098,7 +8045,7 @@
         </p:blipFill>
         <p:spPr>
           <a:xfrm>
-            <a:off x="508000" y="2061520"/>
+            <a:off x="508000" y="2301508"/>
             <a:ext cx="11176000" cy="3895806"/>
           </a:xfrm>
           <a:prstGeom prst="rect">
@@ -8115,7 +8062,7 @@
 </file>
 
 <file path=ppt/slides/slide13.xml><?xml version="1.0" encoding="utf-8"?>
-<p:sld xmlns:a="http://schemas.openxmlformats.org/drawingml/2006/main" xmlns:p="http://schemas.openxmlformats.org/presentationml/2006/main" xmlns:r="http://schemas.openxmlformats.org/officeDocument/2006/relationships">
+<p:sld xmlns:a="http://schemas.openxmlformats.org/drawingml/2006/main" xmlns:r="http://schemas.openxmlformats.org/officeDocument/2006/relationships" xmlns:p="http://schemas.openxmlformats.org/presentationml/2006/main">
   <p:cSld>
     <p:spTree>
       <p:nvGrpSpPr>
@@ -8123,7 +8070,14 @@
         <p:cNvGrpSpPr/>
         <p:nvPr/>
       </p:nvGrpSpPr>
-      <p:grpSpPr/>
+      <p:grpSpPr>
+        <a:xfrm>
+          <a:off x="0" y="0"/>
+          <a:ext cx="0" cy="0"/>
+          <a:chOff x="0" y="0"/>
+          <a:chExt cx="0" cy="0"/>
+        </a:xfrm>
+      </p:grpSpPr>
       <p:sp>
         <p:nvSpPr>
           <p:cNvPr id="2" name="Title 1"/>
@@ -8170,7 +8124,6 @@
           <a:bodyPr/>
           <a:lstStyle/>
           <a:p>
-            <a:pPr/>
             <a:r>
               <a:rPr sz="1800" b="0">
                 <a:solidFill>
@@ -8181,7 +8134,6 @@
             </a:r>
           </a:p>
           <a:p>
-            <a:pPr/>
             <a:r>
               <a:rPr sz="1800" b="0">
                 <a:solidFill>
@@ -8249,6 +8201,7 @@
           <a:lstStyle/>
           <a:p>
             <a:pPr algn="ctr"/>
+            <a:endParaRPr/>
           </a:p>
         </p:txBody>
       </p:sp>
@@ -8288,7 +8241,7 @@
           </a:fontRef>
         </p:style>
         <p:txBody>
-          <a:bodyPr rtlCol="0" anchor="ctr" tIns="0" bIns="0"/>
+          <a:bodyPr tIns="0" bIns="0" rtlCol="0" anchor="ctr"/>
           <a:lstStyle/>
           <a:p>
             <a:pPr algn="ctr"/>
@@ -8327,7 +8280,7 @@
             <a:fld id="{9F4AF89A-28FA-47FA-B28F-9A9C6913CB7A}" type="slidenum">
               <a:rPr lang="ko-KR" altLang="en-US" smtClean="0"/>
               <a:pPr/>
-              <a:t>3</a:t>
+              <a:t>13</a:t>
             </a:fld>
             <a:endParaRPr lang="ko-KR" altLang="en-US" dirty="0"/>
           </a:p>
@@ -8339,10 +8292,16 @@
           <p:cNvGraphicFramePr>
             <a:graphicFrameLocks noGrp="1"/>
           </p:cNvGraphicFramePr>
-          <p:nvPr/>
+          <p:nvPr>
+            <p:extLst>
+              <p:ext uri="{D42A27DB-BD31-4B8C-83A1-F6EECF244321}">
+                <p14:modId xmlns:p14="http://schemas.microsoft.com/office/powerpoint/2010/main" val="2568590592"/>
+              </p:ext>
+            </p:extLst>
+          </p:nvPr>
         </p:nvGraphicFramePr>
         <p:xfrm>
-          <a:off x="512064" y="2211520"/>
+          <a:off x="512064" y="2420242"/>
           <a:ext cx="11173968" cy="3920000"/>
         </p:xfrm>
         <a:graphic>
@@ -8352,12 +8311,48 @@
                 <a:tableStyleId>{C083E6E3-FA7D-4D7B-A595-EF9225AFEA82}</a:tableStyleId>
               </a:tblPr>
               <a:tblGrid>
-                <a:gridCol w="2200000"/>
-                <a:gridCol w="1800000"/>
-                <a:gridCol w="1900000"/>
-                <a:gridCol w="2200000"/>
-                <a:gridCol w="1500000"/>
-                <a:gridCol w="1573968"/>
+                <a:gridCol w="2200000">
+                  <a:extLst>
+                    <a:ext uri="{9D8B030D-6E8A-4147-A177-3AD203B41FA5}">
+                      <a16:colId xmlns:a16="http://schemas.microsoft.com/office/drawing/2014/main" val="20000"/>
+                    </a:ext>
+                  </a:extLst>
+                </a:gridCol>
+                <a:gridCol w="1800000">
+                  <a:extLst>
+                    <a:ext uri="{9D8B030D-6E8A-4147-A177-3AD203B41FA5}">
+                      <a16:colId xmlns:a16="http://schemas.microsoft.com/office/drawing/2014/main" val="20001"/>
+                    </a:ext>
+                  </a:extLst>
+                </a:gridCol>
+                <a:gridCol w="1900000">
+                  <a:extLst>
+                    <a:ext uri="{9D8B030D-6E8A-4147-A177-3AD203B41FA5}">
+                      <a16:colId xmlns:a16="http://schemas.microsoft.com/office/drawing/2014/main" val="20002"/>
+                    </a:ext>
+                  </a:extLst>
+                </a:gridCol>
+                <a:gridCol w="2200000">
+                  <a:extLst>
+                    <a:ext uri="{9D8B030D-6E8A-4147-A177-3AD203B41FA5}">
+                      <a16:colId xmlns:a16="http://schemas.microsoft.com/office/drawing/2014/main" val="20003"/>
+                    </a:ext>
+                  </a:extLst>
+                </a:gridCol>
+                <a:gridCol w="1500000">
+                  <a:extLst>
+                    <a:ext uri="{9D8B030D-6E8A-4147-A177-3AD203B41FA5}">
+                      <a16:colId xmlns:a16="http://schemas.microsoft.com/office/drawing/2014/main" val="20004"/>
+                    </a:ext>
+                  </a:extLst>
+                </a:gridCol>
+                <a:gridCol w="1573968">
+                  <a:extLst>
+                    <a:ext uri="{9D8B030D-6E8A-4147-A177-3AD203B41FA5}">
+                      <a16:colId xmlns:a16="http://schemas.microsoft.com/office/drawing/2014/main" val="20005"/>
+                    </a:ext>
+                  </a:extLst>
+                </a:gridCol>
               </a:tblGrid>
               <a:tr h="560000">
                 <a:tc>
@@ -8444,6 +8439,11 @@
                   </a:txBody>
                   <a:tcPr anchor="ctr"/>
                 </a:tc>
+                <a:extLst>
+                  <a:ext uri="{0D108BD9-81ED-4DB2-BD59-A6C34878D82A}">
+                    <a16:rowId xmlns:a16="http://schemas.microsoft.com/office/drawing/2014/main" val="10000"/>
+                  </a:ext>
+                </a:extLst>
               </a:tr>
               <a:tr h="560000">
                 <a:tc rowSpan="2">
@@ -8530,6 +8530,11 @@
                   </a:txBody>
                   <a:tcPr anchor="ctr"/>
                 </a:tc>
+                <a:extLst>
+                  <a:ext uri="{0D108BD9-81ED-4DB2-BD59-A6C34878D82A}">
+                    <a16:rowId xmlns:a16="http://schemas.microsoft.com/office/drawing/2014/main" val="10001"/>
+                  </a:ext>
+                </a:extLst>
               </a:tr>
               <a:tr h="560000">
                 <a:tc vMerge="1">
@@ -8538,10 +8543,7 @@
                     <a:lstStyle/>
                     <a:p>
                       <a:pPr algn="ctr"/>
-                      <a:r>
-                        <a:rPr sz="1600" b="0"/>
-                        <a:t/>
-                      </a:r>
+                      <a:endParaRPr/>
                     </a:p>
                   </a:txBody>
                   <a:tcPr anchor="ctr"/>
@@ -8616,6 +8618,11 @@
                   </a:txBody>
                   <a:tcPr anchor="ctr"/>
                 </a:tc>
+                <a:extLst>
+                  <a:ext uri="{0D108BD9-81ED-4DB2-BD59-A6C34878D82A}">
+                    <a16:rowId xmlns:a16="http://schemas.microsoft.com/office/drawing/2014/main" val="10002"/>
+                  </a:ext>
+                </a:extLst>
               </a:tr>
               <a:tr h="560000">
                 <a:tc rowSpan="2">
@@ -8702,6 +8709,11 @@
                   </a:txBody>
                   <a:tcPr anchor="ctr"/>
                 </a:tc>
+                <a:extLst>
+                  <a:ext uri="{0D108BD9-81ED-4DB2-BD59-A6C34878D82A}">
+                    <a16:rowId xmlns:a16="http://schemas.microsoft.com/office/drawing/2014/main" val="10003"/>
+                  </a:ext>
+                </a:extLst>
               </a:tr>
               <a:tr h="560000">
                 <a:tc vMerge="1">
@@ -8710,10 +8722,7 @@
                     <a:lstStyle/>
                     <a:p>
                       <a:pPr algn="ctr"/>
-                      <a:r>
-                        <a:rPr sz="1600" b="0"/>
-                        <a:t/>
-                      </a:r>
+                      <a:endParaRPr/>
                     </a:p>
                   </a:txBody>
                   <a:tcPr anchor="ctr"/>
@@ -8788,6 +8797,11 @@
                   </a:txBody>
                   <a:tcPr anchor="ctr"/>
                 </a:tc>
+                <a:extLst>
+                  <a:ext uri="{0D108BD9-81ED-4DB2-BD59-A6C34878D82A}">
+                    <a16:rowId xmlns:a16="http://schemas.microsoft.com/office/drawing/2014/main" val="10004"/>
+                  </a:ext>
+                </a:extLst>
               </a:tr>
               <a:tr h="560000">
                 <a:tc rowSpan="2">
@@ -8874,6 +8888,11 @@
                   </a:txBody>
                   <a:tcPr anchor="ctr"/>
                 </a:tc>
+                <a:extLst>
+                  <a:ext uri="{0D108BD9-81ED-4DB2-BD59-A6C34878D82A}">
+                    <a16:rowId xmlns:a16="http://schemas.microsoft.com/office/drawing/2014/main" val="10005"/>
+                  </a:ext>
+                </a:extLst>
               </a:tr>
               <a:tr h="560000">
                 <a:tc vMerge="1">
@@ -8882,10 +8901,7 @@
                     <a:lstStyle/>
                     <a:p>
                       <a:pPr algn="ctr"/>
-                      <a:r>
-                        <a:rPr sz="1600" b="0"/>
-                        <a:t/>
-                      </a:r>
+                      <a:endParaRPr/>
                     </a:p>
                   </a:txBody>
                   <a:tcPr anchor="ctr"/>
@@ -8953,13 +8969,18 @@
                     <a:p>
                       <a:pPr algn="ctr"/>
                       <a:r>
-                        <a:rPr sz="1600" b="0"/>
+                        <a:rPr sz="1600" b="0" dirty="0"/>
                         <a:t>&lt;0.001*</a:t>
                       </a:r>
                     </a:p>
                   </a:txBody>
                   <a:tcPr anchor="ctr"/>
                 </a:tc>
+                <a:extLst>
+                  <a:ext uri="{0D108BD9-81ED-4DB2-BD59-A6C34878D82A}">
+                    <a16:rowId xmlns:a16="http://schemas.microsoft.com/office/drawing/2014/main" val="10006"/>
+                  </a:ext>
+                </a:extLst>
               </a:tr>
             </a:tbl>
           </a:graphicData>
@@ -8974,7 +8995,7 @@
 </file>
 
 <file path=ppt/slides/slide14.xml><?xml version="1.0" encoding="utf-8"?>
-<p:sld xmlns:a="http://schemas.openxmlformats.org/drawingml/2006/main" xmlns:p="http://schemas.openxmlformats.org/presentationml/2006/main" xmlns:r="http://schemas.openxmlformats.org/officeDocument/2006/relationships">
+<p:sld xmlns:a="http://schemas.openxmlformats.org/drawingml/2006/main" xmlns:r="http://schemas.openxmlformats.org/officeDocument/2006/relationships" xmlns:p="http://schemas.openxmlformats.org/presentationml/2006/main">
   <p:cSld>
     <p:spTree>
       <p:nvGrpSpPr>
@@ -8982,7 +9003,14 @@
         <p:cNvGrpSpPr/>
         <p:nvPr/>
       </p:nvGrpSpPr>
-      <p:grpSpPr/>
+      <p:grpSpPr>
+        <a:xfrm>
+          <a:off x="0" y="0"/>
+          <a:ext cx="0" cy="0"/>
+          <a:chOff x="0" y="0"/>
+          <a:chExt cx="0" cy="0"/>
+        </a:xfrm>
+      </p:grpSpPr>
       <p:sp>
         <p:nvSpPr>
           <p:cNvPr id="2" name="Title 1"/>
@@ -9029,99 +9057,613 @@
           <a:bodyPr/>
           <a:lstStyle/>
           <a:p>
-            <a:pPr/>
-            <a:r>
-              <a:rPr sz="1800" b="0">
+            <a:r>
+              <a:rPr sz="1800" b="0" dirty="0" err="1">
                 <a:solidFill>
                   <a:srgbClr val="333F4D"/>
                 </a:solidFill>
               </a:rPr>
-              <a:t>대상: 강남 코호트 1,260명</a:t>
-            </a:r>
-          </a:p>
-          <a:p>
-            <a:pPr/>
-            <a:r>
-              <a:rPr sz="1800" b="0">
+              <a:t>대상</a:t>
+            </a:r>
+            <a:r>
+              <a:rPr sz="1800" b="0" dirty="0">
                 <a:solidFill>
                   <a:srgbClr val="333F4D"/>
                 </a:solidFill>
               </a:rPr>
-              <a:t>Input: Baseline(성별·나이·키·몸무게) + Best(FPCA 점수 14개 추가, Table 5)</a:t>
-            </a:r>
-          </a:p>
-          <a:p>
-            <a:pPr/>
-            <a:r>
-              <a:rPr sz="1800" b="0">
+              <a:t>: </a:t>
+            </a:r>
+            <a:r>
+              <a:rPr sz="1800" b="0" dirty="0" err="1">
                 <a:solidFill>
                   <a:srgbClr val="333F4D"/>
                 </a:solidFill>
               </a:rPr>
-              <a:t>모델: 질환별 Logistic Regression (규제 없음)</a:t>
-            </a:r>
-          </a:p>
-          <a:p>
-            <a:pPr/>
-            <a:r>
-              <a:rPr sz="1800" b="0">
+              <a:t>강남</a:t>
+            </a:r>
+            <a:r>
+              <a:rPr sz="1800" b="0" dirty="0">
                 <a:solidFill>
                   <a:srgbClr val="333F4D"/>
                 </a:solidFill>
               </a:rPr>
-              <a:t>Coefficient: 변수 1SD 증가 시 log-odds 변화</a:t>
-            </a:r>
-          </a:p>
-          <a:p>
-            <a:pPr/>
-            <a:r>
-              <a:rPr sz="1800" b="0">
+              <a:t> </a:t>
+            </a:r>
+            <a:r>
+              <a:rPr sz="1800" b="0" dirty="0" err="1">
                 <a:solidFill>
                   <a:srgbClr val="333F4D"/>
                 </a:solidFill>
               </a:rPr>
+              <a:t>코호트</a:t>
+            </a:r>
+            <a:r>
+              <a:rPr sz="1800" b="0" dirty="0">
+                <a:solidFill>
+                  <a:srgbClr val="333F4D"/>
+                </a:solidFill>
+              </a:rPr>
+              <a:t> 1,260명</a:t>
+            </a:r>
+          </a:p>
+          <a:p>
+            <a:r>
+              <a:rPr sz="1800" b="0" dirty="0">
+                <a:solidFill>
+                  <a:srgbClr val="333F4D"/>
+                </a:solidFill>
+              </a:rPr>
+              <a:t>Input: Baseline(</a:t>
+            </a:r>
+            <a:r>
+              <a:rPr sz="1800" b="0" dirty="0" err="1">
+                <a:solidFill>
+                  <a:srgbClr val="333F4D"/>
+                </a:solidFill>
+              </a:rPr>
+              <a:t>성별·나이·키·몸무게</a:t>
+            </a:r>
+            <a:r>
+              <a:rPr sz="1800" b="0" dirty="0">
+                <a:solidFill>
+                  <a:srgbClr val="333F4D"/>
+                </a:solidFill>
+              </a:rPr>
+              <a:t>) + Best(FPCA </a:t>
+            </a:r>
+            <a:r>
+              <a:rPr sz="1800" b="0" dirty="0" err="1">
+                <a:solidFill>
+                  <a:srgbClr val="333F4D"/>
+                </a:solidFill>
+              </a:rPr>
+              <a:t>점수</a:t>
+            </a:r>
+            <a:r>
+              <a:rPr sz="1800" b="0" dirty="0">
+                <a:solidFill>
+                  <a:srgbClr val="333F4D"/>
+                </a:solidFill>
+              </a:rPr>
+              <a:t> 14개 </a:t>
+            </a:r>
+            <a:r>
+              <a:rPr sz="1800" b="0" dirty="0" err="1">
+                <a:solidFill>
+                  <a:srgbClr val="333F4D"/>
+                </a:solidFill>
+              </a:rPr>
+              <a:t>추가</a:t>
+            </a:r>
+            <a:r>
+              <a:rPr sz="1800" b="0" dirty="0">
+                <a:solidFill>
+                  <a:srgbClr val="333F4D"/>
+                </a:solidFill>
+              </a:rPr>
+              <a:t>, Table 5)</a:t>
+            </a:r>
+          </a:p>
+          <a:p>
+            <a:r>
+              <a:rPr sz="1800" b="0" dirty="0" err="1">
+                <a:solidFill>
+                  <a:srgbClr val="333F4D"/>
+                </a:solidFill>
+              </a:rPr>
+              <a:t>모델</a:t>
+            </a:r>
+            <a:r>
+              <a:rPr sz="1800" b="0" dirty="0">
+                <a:solidFill>
+                  <a:srgbClr val="333F4D"/>
+                </a:solidFill>
+              </a:rPr>
+              <a:t>: </a:t>
+            </a:r>
+            <a:r>
+              <a:rPr sz="1800" b="0" dirty="0" err="1">
+                <a:solidFill>
+                  <a:srgbClr val="333F4D"/>
+                </a:solidFill>
+              </a:rPr>
+              <a:t>질환별</a:t>
+            </a:r>
+            <a:r>
+              <a:rPr sz="1800" b="0" dirty="0">
+                <a:solidFill>
+                  <a:srgbClr val="333F4D"/>
+                </a:solidFill>
+              </a:rPr>
+              <a:t> Logistic Regression (</a:t>
+            </a:r>
+            <a:r>
+              <a:rPr sz="1800" b="0" dirty="0" err="1">
+                <a:solidFill>
+                  <a:srgbClr val="333F4D"/>
+                </a:solidFill>
+              </a:rPr>
+              <a:t>규제</a:t>
+            </a:r>
+            <a:r>
+              <a:rPr sz="1800" b="0" dirty="0">
+                <a:solidFill>
+                  <a:srgbClr val="333F4D"/>
+                </a:solidFill>
+              </a:rPr>
+              <a:t> </a:t>
+            </a:r>
+            <a:r>
+              <a:rPr sz="1800" b="0" dirty="0" err="1">
+                <a:solidFill>
+                  <a:srgbClr val="333F4D"/>
+                </a:solidFill>
+              </a:rPr>
+              <a:t>없음</a:t>
+            </a:r>
+            <a:r>
+              <a:rPr sz="1800" b="0" dirty="0">
+                <a:solidFill>
+                  <a:srgbClr val="333F4D"/>
+                </a:solidFill>
+              </a:rPr>
+              <a:t>)</a:t>
+            </a:r>
+          </a:p>
+          <a:p>
+            <a:r>
+              <a:rPr sz="1800" b="0" dirty="0">
+                <a:solidFill>
+                  <a:srgbClr val="333F4D"/>
+                </a:solidFill>
+              </a:rPr>
+              <a:t>Coefficient: </a:t>
+            </a:r>
+            <a:r>
+              <a:rPr sz="1800" b="0" dirty="0" err="1">
+                <a:solidFill>
+                  <a:srgbClr val="333F4D"/>
+                </a:solidFill>
+              </a:rPr>
+              <a:t>변수</a:t>
+            </a:r>
+            <a:r>
+              <a:rPr sz="1800" b="0" dirty="0">
+                <a:solidFill>
+                  <a:srgbClr val="333F4D"/>
+                </a:solidFill>
+              </a:rPr>
+              <a:t> 1SD </a:t>
+            </a:r>
+            <a:r>
+              <a:rPr sz="1800" b="0" dirty="0" err="1">
+                <a:solidFill>
+                  <a:srgbClr val="333F4D"/>
+                </a:solidFill>
+              </a:rPr>
+              <a:t>증가</a:t>
+            </a:r>
+            <a:r>
+              <a:rPr sz="1800" b="0" dirty="0">
+                <a:solidFill>
+                  <a:srgbClr val="333F4D"/>
+                </a:solidFill>
+              </a:rPr>
+              <a:t> 시 log-odds </a:t>
+            </a:r>
+            <a:r>
+              <a:rPr sz="1800" b="0" dirty="0" err="1">
+                <a:solidFill>
+                  <a:srgbClr val="333F4D"/>
+                </a:solidFill>
+              </a:rPr>
+              <a:t>변화</a:t>
+            </a:r>
+            <a:endParaRPr sz="1800" b="0" dirty="0">
+              <a:solidFill>
+                <a:srgbClr val="333F4D"/>
+              </a:solidFill>
+            </a:endParaRPr>
+          </a:p>
+          <a:p>
+            <a:r>
+              <a:rPr sz="1800" b="0" dirty="0">
+                <a:solidFill>
+                  <a:srgbClr val="333F4D"/>
+                </a:solidFill>
+              </a:rPr>
               <a:t>p-value: </a:t>
             </a:r>
             <a:r>
-              <a:rPr sz="1800" b="1">
+              <a:rPr sz="1800" b="1" dirty="0">
                 <a:solidFill>
                   <a:srgbClr val="1F3B63"/>
                 </a:solidFill>
               </a:rPr>
-              <a:t>Wald 검정</a:t>
-            </a:r>
+              <a:t>Wald </a:t>
+            </a:r>
+            <a:r>
+              <a:rPr sz="1800" b="1" dirty="0" err="1">
+                <a:solidFill>
+                  <a:srgbClr val="1F3B63"/>
+                </a:solidFill>
+              </a:rPr>
+              <a:t>검정</a:t>
+            </a:r>
+            <a:endParaRPr sz="1800" b="1" dirty="0">
+              <a:solidFill>
+                <a:srgbClr val="1F3B63"/>
+              </a:solidFill>
+            </a:endParaRPr>
           </a:p>
           <a:p>
             <a:pPr lvl="1"/>
             <a:r>
-              <a:rPr sz="1600" b="0">
+              <a:rPr sz="1600" b="0" dirty="0" err="1">
                 <a:solidFill>
                   <a:srgbClr val="333F4D"/>
                 </a:solidFill>
               </a:rPr>
-              <a:t>계수가 0(영향 없음)이라는 가정 하에 Z = Coefficient ÷ 표준오차 계산</a:t>
-            </a:r>
+              <a:t>계수가</a:t>
+            </a:r>
+            <a:r>
+              <a:rPr sz="1600" b="0" dirty="0">
+                <a:solidFill>
+                  <a:srgbClr val="333F4D"/>
+                </a:solidFill>
+              </a:rPr>
+              <a:t> 0(</a:t>
+            </a:r>
+            <a:r>
+              <a:rPr sz="1600" b="0" dirty="0" err="1">
+                <a:solidFill>
+                  <a:srgbClr val="333F4D"/>
+                </a:solidFill>
+              </a:rPr>
+              <a:t>영향</a:t>
+            </a:r>
+            <a:r>
+              <a:rPr sz="1600" b="0" dirty="0">
+                <a:solidFill>
+                  <a:srgbClr val="333F4D"/>
+                </a:solidFill>
+              </a:rPr>
+              <a:t> </a:t>
+            </a:r>
+            <a:r>
+              <a:rPr sz="1600" b="0" dirty="0" err="1">
+                <a:solidFill>
+                  <a:srgbClr val="333F4D"/>
+                </a:solidFill>
+              </a:rPr>
+              <a:t>없음</a:t>
+            </a:r>
+            <a:r>
+              <a:rPr sz="1600" b="0" dirty="0">
+                <a:solidFill>
+                  <a:srgbClr val="333F4D"/>
+                </a:solidFill>
+              </a:rPr>
+              <a:t>)</a:t>
+            </a:r>
+            <a:r>
+              <a:rPr sz="1600" b="0" dirty="0" err="1">
+                <a:solidFill>
+                  <a:srgbClr val="333F4D"/>
+                </a:solidFill>
+              </a:rPr>
+              <a:t>이라는</a:t>
+            </a:r>
+            <a:r>
+              <a:rPr sz="1600" b="0" dirty="0">
+                <a:solidFill>
+                  <a:srgbClr val="333F4D"/>
+                </a:solidFill>
+              </a:rPr>
+              <a:t> </a:t>
+            </a:r>
+            <a:r>
+              <a:rPr sz="1600" b="0" dirty="0" err="1">
+                <a:solidFill>
+                  <a:srgbClr val="333F4D"/>
+                </a:solidFill>
+              </a:rPr>
+              <a:t>가정</a:t>
+            </a:r>
+            <a:r>
+              <a:rPr sz="1600" b="0" dirty="0">
+                <a:solidFill>
+                  <a:srgbClr val="333F4D"/>
+                </a:solidFill>
+              </a:rPr>
+              <a:t> </a:t>
+            </a:r>
+            <a:r>
+              <a:rPr sz="1600" b="0" dirty="0" err="1">
+                <a:solidFill>
+                  <a:srgbClr val="333F4D"/>
+                </a:solidFill>
+              </a:rPr>
+              <a:t>하에</a:t>
+            </a:r>
+            <a:r>
+              <a:rPr sz="1600" b="0" dirty="0">
+                <a:solidFill>
+                  <a:srgbClr val="333F4D"/>
+                </a:solidFill>
+              </a:rPr>
+              <a:t> Z = Coefficient ÷ </a:t>
+            </a:r>
+            <a:r>
+              <a:rPr sz="1600" b="0" dirty="0" err="1">
+                <a:solidFill>
+                  <a:srgbClr val="333F4D"/>
+                </a:solidFill>
+              </a:rPr>
+              <a:t>표준오차</a:t>
+            </a:r>
+            <a:r>
+              <a:rPr sz="1600" b="0" dirty="0">
+                <a:solidFill>
+                  <a:srgbClr val="333F4D"/>
+                </a:solidFill>
+              </a:rPr>
+              <a:t> </a:t>
+            </a:r>
+            <a:r>
+              <a:rPr sz="1600" b="0" dirty="0" err="1">
+                <a:solidFill>
+                  <a:srgbClr val="333F4D"/>
+                </a:solidFill>
+              </a:rPr>
+              <a:t>계산</a:t>
+            </a:r>
+            <a:endParaRPr sz="1600" b="0" dirty="0">
+              <a:solidFill>
+                <a:srgbClr val="333F4D"/>
+              </a:solidFill>
+            </a:endParaRPr>
           </a:p>
           <a:p>
             <a:pPr lvl="1"/>
             <a:r>
-              <a:rPr sz="1600" b="0">
+              <a:rPr sz="1600" b="0" dirty="0">
                 <a:solidFill>
                   <a:srgbClr val="333F4D"/>
                 </a:solidFill>
               </a:rPr>
-              <a:t>|Z|가 클수록 p-value 작아짐, p&lt;0.05는 *</a:t>
+              <a:t>|</a:t>
+            </a:r>
+            <a:r>
+              <a:rPr sz="1600" b="0" dirty="0" err="1">
+                <a:solidFill>
+                  <a:srgbClr val="333F4D"/>
+                </a:solidFill>
+              </a:rPr>
+              <a:t>Z|가</a:t>
+            </a:r>
+            <a:r>
+              <a:rPr sz="1600" b="0" dirty="0">
+                <a:solidFill>
+                  <a:srgbClr val="333F4D"/>
+                </a:solidFill>
+              </a:rPr>
+              <a:t> </a:t>
+            </a:r>
+            <a:r>
+              <a:rPr sz="1600" b="0" dirty="0" err="1">
+                <a:solidFill>
+                  <a:srgbClr val="333F4D"/>
+                </a:solidFill>
+              </a:rPr>
+              <a:t>클수록</a:t>
+            </a:r>
+            <a:r>
+              <a:rPr sz="1600" b="0" dirty="0">
+                <a:solidFill>
+                  <a:srgbClr val="333F4D"/>
+                </a:solidFill>
+              </a:rPr>
+              <a:t> p-value </a:t>
+            </a:r>
+            <a:r>
+              <a:rPr sz="1600" b="0" dirty="0" err="1">
+                <a:solidFill>
+                  <a:srgbClr val="333F4D"/>
+                </a:solidFill>
+              </a:rPr>
+              <a:t>작아짐</a:t>
+            </a:r>
+            <a:r>
+              <a:rPr sz="1600" b="0" dirty="0">
+                <a:solidFill>
+                  <a:srgbClr val="333F4D"/>
+                </a:solidFill>
+              </a:rPr>
+              <a:t>, p&lt;0.05는 *</a:t>
             </a:r>
           </a:p>
           <a:p>
             <a:pPr lvl="1"/>
             <a:r>
-              <a:rPr sz="1600" b="0">
+              <a:rPr sz="1600" b="0" dirty="0" err="1">
                 <a:solidFill>
                   <a:srgbClr val="333F4D"/>
                 </a:solidFill>
               </a:rPr>
-              <a:t>다른 변수 보정 후의 독립적 효과 (질환군-비질환군 평균 비교 아님)</a:t>
+              <a:t>다른</a:t>
+            </a:r>
+            <a:r>
+              <a:rPr sz="1600" b="0" dirty="0">
+                <a:solidFill>
+                  <a:srgbClr val="333F4D"/>
+                </a:solidFill>
+              </a:rPr>
+              <a:t> </a:t>
+            </a:r>
+            <a:r>
+              <a:rPr sz="1600" b="0" dirty="0" err="1">
+                <a:solidFill>
+                  <a:srgbClr val="333F4D"/>
+                </a:solidFill>
+              </a:rPr>
+              <a:t>변수</a:t>
+            </a:r>
+            <a:r>
+              <a:rPr sz="1600" b="0" dirty="0">
+                <a:solidFill>
+                  <a:srgbClr val="333F4D"/>
+                </a:solidFill>
+              </a:rPr>
+              <a:t> </a:t>
+            </a:r>
+            <a:r>
+              <a:rPr sz="1600" b="0" dirty="0" err="1">
+                <a:solidFill>
+                  <a:srgbClr val="333F4D"/>
+                </a:solidFill>
+              </a:rPr>
+              <a:t>보정</a:t>
+            </a:r>
+            <a:r>
+              <a:rPr sz="1600" b="0" dirty="0">
+                <a:solidFill>
+                  <a:srgbClr val="333F4D"/>
+                </a:solidFill>
+              </a:rPr>
+              <a:t> </a:t>
+            </a:r>
+            <a:r>
+              <a:rPr sz="1600" b="0" dirty="0" err="1">
+                <a:solidFill>
+                  <a:srgbClr val="333F4D"/>
+                </a:solidFill>
+              </a:rPr>
+              <a:t>후의</a:t>
+            </a:r>
+            <a:r>
+              <a:rPr sz="1600" b="0" dirty="0">
+                <a:solidFill>
+                  <a:srgbClr val="333F4D"/>
+                </a:solidFill>
+              </a:rPr>
+              <a:t> </a:t>
+            </a:r>
+            <a:r>
+              <a:rPr sz="1600" b="0" dirty="0" err="1">
+                <a:solidFill>
+                  <a:srgbClr val="333F4D"/>
+                </a:solidFill>
+              </a:rPr>
+              <a:t>독립적</a:t>
+            </a:r>
+            <a:r>
+              <a:rPr sz="1600" b="0" dirty="0">
+                <a:solidFill>
+                  <a:srgbClr val="333F4D"/>
+                </a:solidFill>
+              </a:rPr>
+              <a:t> </a:t>
+            </a:r>
+            <a:r>
+              <a:rPr sz="1600" b="0" dirty="0" err="1">
+                <a:solidFill>
+                  <a:srgbClr val="333F4D"/>
+                </a:solidFill>
+              </a:rPr>
+              <a:t>효과</a:t>
+            </a:r>
+            <a:r>
+              <a:rPr sz="1600" b="0" dirty="0">
+                <a:solidFill>
+                  <a:srgbClr val="333F4D"/>
+                </a:solidFill>
+              </a:rPr>
+              <a:t> (</a:t>
+            </a:r>
+            <a:r>
+              <a:rPr sz="1600" b="0" dirty="0" err="1">
+                <a:solidFill>
+                  <a:srgbClr val="333F4D"/>
+                </a:solidFill>
+              </a:rPr>
+              <a:t>질환군-비질환군</a:t>
+            </a:r>
+            <a:r>
+              <a:rPr sz="1600" b="0" dirty="0">
+                <a:solidFill>
+                  <a:srgbClr val="333F4D"/>
+                </a:solidFill>
+              </a:rPr>
+              <a:t> </a:t>
+            </a:r>
+            <a:r>
+              <a:rPr sz="1600" b="0" dirty="0" err="1">
+                <a:solidFill>
+                  <a:srgbClr val="333F4D"/>
+                </a:solidFill>
+              </a:rPr>
+              <a:t>평균</a:t>
+            </a:r>
+            <a:r>
+              <a:rPr sz="1600" b="0" dirty="0">
+                <a:solidFill>
+                  <a:srgbClr val="333F4D"/>
+                </a:solidFill>
+              </a:rPr>
+              <a:t> </a:t>
+            </a:r>
+            <a:r>
+              <a:rPr sz="1600" b="0" dirty="0" err="1">
+                <a:solidFill>
+                  <a:srgbClr val="333F4D"/>
+                </a:solidFill>
+              </a:rPr>
+              <a:t>비교</a:t>
+            </a:r>
+            <a:r>
+              <a:rPr sz="1600" b="0" dirty="0">
+                <a:solidFill>
+                  <a:srgbClr val="333F4D"/>
+                </a:solidFill>
+              </a:rPr>
+              <a:t> </a:t>
+            </a:r>
+            <a:r>
+              <a:rPr sz="1600" b="0" dirty="0" err="1">
+                <a:solidFill>
+                  <a:srgbClr val="333F4D"/>
+                </a:solidFill>
+              </a:rPr>
+              <a:t>아님</a:t>
+            </a:r>
+            <a:r>
+              <a:rPr sz="1600" b="0" dirty="0">
+                <a:solidFill>
+                  <a:srgbClr val="333F4D"/>
+                </a:solidFill>
+              </a:rPr>
+              <a:t>)</a:t>
             </a:r>
           </a:p>
         </p:txBody>
@@ -9166,6 +9708,7 @@
           <a:lstStyle/>
           <a:p>
             <a:pPr algn="ctr"/>
+            <a:endParaRPr/>
           </a:p>
         </p:txBody>
       </p:sp>
@@ -9205,7 +9748,7 @@
           </a:fontRef>
         </p:style>
         <p:txBody>
-          <a:bodyPr rtlCol="0" anchor="ctr" tIns="0" bIns="0"/>
+          <a:bodyPr tIns="0" bIns="0" rtlCol="0" anchor="ctr"/>
           <a:lstStyle/>
           <a:p>
             <a:pPr algn="ctr"/>
@@ -9244,7 +9787,7 @@
             <a:fld id="{9F4AF89A-28FA-47FA-B28F-9A9C6913CB7A}" type="slidenum">
               <a:rPr lang="ko-KR" altLang="en-US" smtClean="0"/>
               <a:pPr/>
-              <a:t>3</a:t>
+              <a:t>14</a:t>
             </a:fld>
             <a:endParaRPr lang="ko-KR" altLang="en-US" dirty="0"/>
           </a:p>
@@ -9259,7 +9802,7 @@
 </file>
 
 <file path=ppt/slides/slide15.xml><?xml version="1.0" encoding="utf-8"?>
-<p:sld xmlns:a="http://schemas.openxmlformats.org/drawingml/2006/main" xmlns:p="http://schemas.openxmlformats.org/presentationml/2006/main" xmlns:r="http://schemas.openxmlformats.org/officeDocument/2006/relationships">
+<p:sld xmlns:a="http://schemas.openxmlformats.org/drawingml/2006/main" xmlns:r="http://schemas.openxmlformats.org/officeDocument/2006/relationships" xmlns:p="http://schemas.openxmlformats.org/presentationml/2006/main">
   <p:cSld>
     <p:spTree>
       <p:nvGrpSpPr>
@@ -9267,7 +9810,14 @@
         <p:cNvGrpSpPr/>
         <p:nvPr/>
       </p:nvGrpSpPr>
-      <p:grpSpPr/>
+      <p:grpSpPr>
+        <a:xfrm>
+          <a:off x="0" y="0"/>
+          <a:ext cx="0" cy="0"/>
+          <a:chOff x="0" y="0"/>
+          <a:chExt cx="0" cy="0"/>
+        </a:xfrm>
+      </p:grpSpPr>
       <p:sp>
         <p:nvSpPr>
           <p:cNvPr id="2" name="Title 1"/>
@@ -9307,52 +9857,351 @@
         <p:spPr>
           <a:xfrm>
             <a:off x="508000" y="1050000"/>
-            <a:ext cx="11176000" cy="1275360"/>
+            <a:ext cx="11176000" cy="1793212"/>
           </a:xfrm>
         </p:spPr>
         <p:txBody>
-          <a:bodyPr/>
+          <a:bodyPr>
+            <a:normAutofit/>
+          </a:bodyPr>
           <a:lstStyle/>
           <a:p>
-            <a:pPr/>
-            <a:r>
-              <a:rPr sz="1600" b="0">
+            <a:r>
+              <a:rPr sz="1600" b="1" dirty="0" err="1">
                 <a:solidFill>
                   <a:srgbClr val="333F4D"/>
                 </a:solidFill>
               </a:rPr>
-              <a:t>성별·나이는 대체로 유의, </a:t>
-            </a:r>
-            <a:r>
-              <a:rPr sz="1600" b="1">
+              <a:t>성별·나이는</a:t>
+            </a:r>
+            <a:r>
+              <a:rPr sz="1600" b="1" dirty="0">
+                <a:solidFill>
+                  <a:srgbClr val="333F4D"/>
+                </a:solidFill>
+              </a:rPr>
+              <a:t> </a:t>
+            </a:r>
+            <a:r>
+              <a:rPr sz="1600" b="1" dirty="0" err="1">
+                <a:solidFill>
+                  <a:srgbClr val="333F4D"/>
+                </a:solidFill>
+              </a:rPr>
+              <a:t>대체로</a:t>
+            </a:r>
+            <a:r>
+              <a:rPr sz="1600" b="1" dirty="0">
+                <a:solidFill>
+                  <a:srgbClr val="333F4D"/>
+                </a:solidFill>
+              </a:rPr>
+              <a:t> </a:t>
+            </a:r>
+            <a:r>
+              <a:rPr sz="1600" b="1" dirty="0" err="1">
+                <a:solidFill>
+                  <a:srgbClr val="333F4D"/>
+                </a:solidFill>
+              </a:rPr>
+              <a:t>유의</a:t>
+            </a:r>
+            <a:r>
+              <a:rPr sz="1600" b="1" dirty="0">
+                <a:solidFill>
+                  <a:srgbClr val="333F4D"/>
+                </a:solidFill>
+              </a:rPr>
+              <a:t>, </a:t>
+            </a:r>
+            <a:r>
+              <a:rPr sz="1600" b="1" dirty="0" err="1">
                 <a:solidFill>
                   <a:srgbClr val="1F3B63"/>
                 </a:solidFill>
               </a:rPr>
-              <a:t>키·몸무게는 대부분 비유의</a:t>
-            </a:r>
-          </a:p>
-          <a:p>
-            <a:pPr/>
-            <a:r>
-              <a:rPr sz="1600" b="0">
+              <a:t>키·몸무게는</a:t>
+            </a:r>
+            <a:r>
+              <a:rPr sz="1600" b="1" dirty="0">
+                <a:solidFill>
+                  <a:srgbClr val="1F3B63"/>
+                </a:solidFill>
+              </a:rPr>
+              <a:t> </a:t>
+            </a:r>
+            <a:r>
+              <a:rPr sz="1600" b="1" dirty="0" err="1">
+                <a:solidFill>
+                  <a:srgbClr val="1F3B63"/>
+                </a:solidFill>
+              </a:rPr>
+              <a:t>대부분</a:t>
+            </a:r>
+            <a:r>
+              <a:rPr sz="1600" b="1" dirty="0">
+                <a:solidFill>
+                  <a:srgbClr val="1F3B63"/>
+                </a:solidFill>
+              </a:rPr>
+              <a:t> </a:t>
+            </a:r>
+            <a:r>
+              <a:rPr sz="1600" b="1" dirty="0" err="1">
+                <a:solidFill>
+                  <a:srgbClr val="1F3B63"/>
+                </a:solidFill>
+              </a:rPr>
+              <a:t>비유의</a:t>
+            </a:r>
+            <a:endParaRPr sz="1600" b="1" dirty="0">
+              <a:solidFill>
+                <a:srgbClr val="1F3B63"/>
+              </a:solidFill>
+            </a:endParaRPr>
+          </a:p>
+          <a:p>
+            <a:r>
+              <a:rPr sz="1600" b="0" dirty="0" err="1">
                 <a:solidFill>
                   <a:srgbClr val="333F4D"/>
                 </a:solidFill>
               </a:rPr>
-              <a:t>원인: 신호 이전 또는 다중공선성(VIF, Appendix S5) 가능성, 미확정</a:t>
-            </a:r>
-          </a:p>
-          <a:p>
-            <a:pPr/>
-            <a:r>
-              <a:rPr sz="1600" b="0">
+              <a:t>원인</a:t>
+            </a:r>
+            <a:r>
+              <a:rPr sz="1600" b="0" dirty="0">
                 <a:solidFill>
                   <a:srgbClr val="333F4D"/>
                 </a:solidFill>
               </a:rPr>
-              <a:t>CKD는 양성 105명 대비 변수가 많아(EPV≈5) 계수가 불안정할 수 있음</a:t>
-            </a:r>
+              <a:t>: </a:t>
+            </a:r>
+            <a:r>
+              <a:rPr sz="1600" b="0" dirty="0" err="1">
+                <a:solidFill>
+                  <a:srgbClr val="333F4D"/>
+                </a:solidFill>
+              </a:rPr>
+              <a:t>신호</a:t>
+            </a:r>
+            <a:r>
+              <a:rPr sz="1600" b="0" dirty="0">
+                <a:solidFill>
+                  <a:srgbClr val="333F4D"/>
+                </a:solidFill>
+              </a:rPr>
+              <a:t> </a:t>
+            </a:r>
+            <a:r>
+              <a:rPr sz="1600" b="0" dirty="0" err="1">
+                <a:solidFill>
+                  <a:srgbClr val="333F4D"/>
+                </a:solidFill>
+              </a:rPr>
+              <a:t>이전</a:t>
+            </a:r>
+            <a:r>
+              <a:rPr sz="1600" b="0" dirty="0">
+                <a:solidFill>
+                  <a:srgbClr val="333F4D"/>
+                </a:solidFill>
+              </a:rPr>
+              <a:t> </a:t>
+            </a:r>
+            <a:r>
+              <a:rPr sz="1600" b="0" dirty="0" err="1">
+                <a:solidFill>
+                  <a:srgbClr val="333F4D"/>
+                </a:solidFill>
+              </a:rPr>
+              <a:t>또는</a:t>
+            </a:r>
+            <a:r>
+              <a:rPr sz="1600" b="0" dirty="0">
+                <a:solidFill>
+                  <a:srgbClr val="333F4D"/>
+                </a:solidFill>
+              </a:rPr>
+              <a:t> </a:t>
+            </a:r>
+            <a:r>
+              <a:rPr sz="1600" b="0" dirty="0" err="1">
+                <a:solidFill>
+                  <a:srgbClr val="333F4D"/>
+                </a:solidFill>
+              </a:rPr>
+              <a:t>다중공선성</a:t>
+            </a:r>
+            <a:r>
+              <a:rPr sz="1600" b="0" dirty="0">
+                <a:solidFill>
+                  <a:srgbClr val="333F4D"/>
+                </a:solidFill>
+              </a:rPr>
+              <a:t>(VIF, Appendix S5) </a:t>
+            </a:r>
+            <a:r>
+              <a:rPr sz="1600" b="0" dirty="0" err="1">
+                <a:solidFill>
+                  <a:srgbClr val="333F4D"/>
+                </a:solidFill>
+              </a:rPr>
+              <a:t>가능성</a:t>
+            </a:r>
+            <a:r>
+              <a:rPr sz="1600" b="0" dirty="0">
+                <a:solidFill>
+                  <a:srgbClr val="333F4D"/>
+                </a:solidFill>
+              </a:rPr>
+              <a:t>, </a:t>
+            </a:r>
+            <a:r>
+              <a:rPr sz="1600" b="0" dirty="0" err="1">
+                <a:solidFill>
+                  <a:srgbClr val="333F4D"/>
+                </a:solidFill>
+              </a:rPr>
+              <a:t>미확정</a:t>
+            </a:r>
+            <a:endParaRPr sz="1600" b="0" dirty="0">
+              <a:solidFill>
+                <a:srgbClr val="333F4D"/>
+              </a:solidFill>
+            </a:endParaRPr>
+          </a:p>
+          <a:p>
+            <a:pPr>
+              <a:lnSpc>
+                <a:spcPct val="150000"/>
+              </a:lnSpc>
+            </a:pPr>
+            <a:r>
+              <a:rPr sz="1600" b="0" dirty="0" err="1">
+                <a:solidFill>
+                  <a:srgbClr val="333F4D"/>
+                </a:solidFill>
+              </a:rPr>
+              <a:t>CKD는</a:t>
+            </a:r>
+            <a:r>
+              <a:rPr sz="1600" b="0" dirty="0">
+                <a:solidFill>
+                  <a:srgbClr val="333F4D"/>
+                </a:solidFill>
+              </a:rPr>
+              <a:t> </a:t>
+            </a:r>
+            <a:r>
+              <a:rPr sz="1600" b="0" dirty="0" err="1">
+                <a:solidFill>
+                  <a:srgbClr val="333F4D"/>
+                </a:solidFill>
+              </a:rPr>
+              <a:t>양성</a:t>
+            </a:r>
+            <a:r>
+              <a:rPr sz="1600" b="0" dirty="0">
+                <a:solidFill>
+                  <a:srgbClr val="333F4D"/>
+                </a:solidFill>
+              </a:rPr>
+              <a:t> 105명 </a:t>
+            </a:r>
+            <a:r>
+              <a:rPr sz="1600" b="0" dirty="0" err="1">
+                <a:solidFill>
+                  <a:srgbClr val="333F4D"/>
+                </a:solidFill>
+              </a:rPr>
+              <a:t>대비</a:t>
+            </a:r>
+            <a:r>
+              <a:rPr sz="1600" b="0" dirty="0">
+                <a:solidFill>
+                  <a:srgbClr val="333F4D"/>
+                </a:solidFill>
+              </a:rPr>
+              <a:t> </a:t>
+            </a:r>
+            <a:r>
+              <a:rPr sz="1600" b="0" dirty="0" err="1">
+                <a:solidFill>
+                  <a:srgbClr val="333F4D"/>
+                </a:solidFill>
+              </a:rPr>
+              <a:t>변수가</a:t>
+            </a:r>
+            <a:r>
+              <a:rPr sz="1600" b="0" dirty="0">
+                <a:solidFill>
+                  <a:srgbClr val="333F4D"/>
+                </a:solidFill>
+              </a:rPr>
+              <a:t> </a:t>
+            </a:r>
+            <a:r>
+              <a:rPr sz="1600" b="0" dirty="0" err="1">
+                <a:solidFill>
+                  <a:srgbClr val="333F4D"/>
+                </a:solidFill>
+              </a:rPr>
+              <a:t>많아</a:t>
+            </a:r>
+            <a:r>
+              <a:rPr sz="1600" b="0" dirty="0">
+                <a:solidFill>
+                  <a:srgbClr val="333F4D"/>
+                </a:solidFill>
+              </a:rPr>
+              <a:t>(EPV≈5) </a:t>
+            </a:r>
+            <a:r>
+              <a:rPr sz="1600" b="0" dirty="0" err="1">
+                <a:solidFill>
+                  <a:srgbClr val="333F4D"/>
+                </a:solidFill>
+              </a:rPr>
+              <a:t>계수가</a:t>
+            </a:r>
+            <a:r>
+              <a:rPr sz="1600" b="0" dirty="0">
+                <a:solidFill>
+                  <a:srgbClr val="333F4D"/>
+                </a:solidFill>
+              </a:rPr>
+              <a:t> </a:t>
+            </a:r>
+            <a:r>
+              <a:rPr sz="1600" b="0" dirty="0" err="1">
+                <a:solidFill>
+                  <a:srgbClr val="333F4D"/>
+                </a:solidFill>
+              </a:rPr>
+              <a:t>불안정할</a:t>
+            </a:r>
+            <a:r>
+              <a:rPr sz="1600" b="0" dirty="0">
+                <a:solidFill>
+                  <a:srgbClr val="333F4D"/>
+                </a:solidFill>
+              </a:rPr>
+              <a:t> 수 </a:t>
+            </a:r>
+            <a:r>
+              <a:rPr sz="1600" b="0" dirty="0" err="1">
+                <a:solidFill>
+                  <a:srgbClr val="333F4D"/>
+                </a:solidFill>
+              </a:rPr>
+              <a:t>있음</a:t>
+            </a:r>
+            <a:endParaRPr sz="1600" b="0" dirty="0">
+              <a:solidFill>
+                <a:srgbClr val="333F4D"/>
+              </a:solidFill>
+            </a:endParaRPr>
           </a:p>
         </p:txBody>
       </p:sp>
@@ -9396,6 +10245,7 @@
           <a:lstStyle/>
           <a:p>
             <a:pPr algn="ctr"/>
+            <a:endParaRPr/>
           </a:p>
         </p:txBody>
       </p:sp>
@@ -9435,7 +10285,7 @@
           </a:fontRef>
         </p:style>
         <p:txBody>
-          <a:bodyPr rtlCol="0" anchor="ctr" tIns="0" bIns="0"/>
+          <a:bodyPr tIns="0" bIns="0" rtlCol="0" anchor="ctr"/>
           <a:lstStyle/>
           <a:p>
             <a:pPr algn="ctr"/>
@@ -9474,7 +10324,7 @@
             <a:fld id="{9F4AF89A-28FA-47FA-B28F-9A9C6913CB7A}" type="slidenum">
               <a:rPr lang="ko-KR" altLang="en-US" smtClean="0"/>
               <a:pPr/>
-              <a:t>3</a:t>
+              <a:t>15</a:t>
             </a:fld>
             <a:endParaRPr lang="ko-KR" altLang="en-US" dirty="0"/>
           </a:p>
@@ -9486,11 +10336,17 @@
           <p:cNvGraphicFramePr>
             <a:graphicFrameLocks noGrp="1"/>
           </p:cNvGraphicFramePr>
-          <p:nvPr/>
+          <p:nvPr>
+            <p:extLst>
+              <p:ext uri="{D42A27DB-BD31-4B8C-83A1-F6EECF244321}">
+                <p14:modId xmlns:p14="http://schemas.microsoft.com/office/powerpoint/2010/main" val="4186270118"/>
+              </p:ext>
+            </p:extLst>
+          </p:nvPr>
         </p:nvGraphicFramePr>
         <p:xfrm>
-          <a:off x="512064" y="2505360"/>
-          <a:ext cx="11173967" cy="3535680"/>
+          <a:off x="510033" y="2843212"/>
+          <a:ext cx="11173967" cy="3429920"/>
         </p:xfrm>
         <a:graphic>
           <a:graphicData uri="http://schemas.openxmlformats.org/drawingml/2006/table">
@@ -9550,7 +10406,7 @@
                     <a:p>
                       <a:pPr algn="ctr"/>
                       <a:r>
-                        <a:rPr sz="1000" b="1"/>
+                        <a:rPr sz="1000" b="1" dirty="0"/>
                         <a:t>Disease</a:t>
                       </a:r>
                     </a:p>
@@ -9564,7 +10420,7 @@
                     <a:p>
                       <a:pPr algn="ctr"/>
                       <a:r>
-                        <a:rPr sz="1000" b="1"/>
+                        <a:rPr sz="1000" b="1" dirty="0"/>
                         <a:t>Term</a:t>
                       </a:r>
                     </a:p>
@@ -9578,7 +10434,7 @@
                     <a:p>
                       <a:pPr algn="ctr"/>
                       <a:r>
-                        <a:rPr sz="1000" b="1"/>
+                        <a:rPr sz="1000" b="1" dirty="0"/>
                         <a:t>Baseline</a:t>
                       </a:r>
                     </a:p>
@@ -9601,11 +10457,20 @@
                     <a:bodyPr/>
                     <a:lstStyle/>
                     <a:p>
-                      <a:pPr latinLnBrk="1"/>
-                      <a:r>
-                        <a:t>Best (+AEC+체성분)</a:t>
-                      </a:r>
-                      <a:endParaRPr lang="ko-KR" altLang="en-US"/>
+                      <a:pPr algn="ctr" latinLnBrk="1"/>
+                      <a:r>
+                        <a:rPr sz="1000" dirty="0"/>
+                        <a:t>Best (+</a:t>
+                      </a:r>
+                      <a:r>
+                        <a:rPr sz="1000" dirty="0" err="1"/>
+                        <a:t>AEC+체성분</a:t>
+                      </a:r>
+                      <a:r>
+                        <a:rPr sz="1000" dirty="0"/>
+                        <a:t>)</a:t>
+                      </a:r>
+                      <a:endParaRPr lang="ko-KR" altLang="en-US" sz="1000" dirty="0"/>
                     </a:p>
                   </a:txBody>
                   <a:tcPr/>
@@ -10737,7 +11602,7 @@
                     <a:p>
                       <a:pPr algn="ctr"/>
                       <a:r>
-                        <a:rPr sz="1000"/>
+                        <a:rPr sz="1000" dirty="0"/>
                         <a:t>&lt;0.001*</a:t>
                       </a:r>
                     </a:p>
@@ -10791,7 +11656,7 @@
 </file>
 
 <file path=ppt/slides/slide16.xml><?xml version="1.0" encoding="utf-8"?>
-<p:sld xmlns:a="http://schemas.openxmlformats.org/drawingml/2006/main" xmlns:p="http://schemas.openxmlformats.org/presentationml/2006/main" xmlns:r="http://schemas.openxmlformats.org/officeDocument/2006/relationships">
+<p:sld xmlns:a="http://schemas.openxmlformats.org/drawingml/2006/main" xmlns:r="http://schemas.openxmlformats.org/officeDocument/2006/relationships" xmlns:p="http://schemas.openxmlformats.org/presentationml/2006/main">
   <p:cSld>
     <p:spTree>
       <p:nvGrpSpPr>
@@ -10799,7 +11664,14 @@
         <p:cNvGrpSpPr/>
         <p:nvPr/>
       </p:nvGrpSpPr>
-      <p:grpSpPr/>
+      <p:grpSpPr>
+        <a:xfrm>
+          <a:off x="0" y="0"/>
+          <a:ext cx="0" cy="0"/>
+          <a:chOff x="0" y="0"/>
+          <a:chExt cx="0" cy="0"/>
+        </a:xfrm>
+      </p:grpSpPr>
       <p:sp>
         <p:nvSpPr>
           <p:cNvPr id="2" name="Title 1"/>
@@ -10838,25 +11710,120 @@
         </p:nvSpPr>
         <p:spPr>
           <a:xfrm>
-            <a:off x="508000" y="1050000"/>
-            <a:ext cx="11176000" cy="850240"/>
+            <a:off x="508000" y="1049999"/>
+            <a:ext cx="11176000" cy="1322595"/>
           </a:xfrm>
         </p:spPr>
         <p:txBody>
           <a:bodyPr/>
           <a:lstStyle/>
           <a:p>
-            <a:pPr/>
-            <a:r>
-              <a:rPr sz="1600" b="0">
+            <a:r>
+              <a:rPr sz="1600" b="0" dirty="0">
                 <a:solidFill>
                   <a:srgbClr val="333F4D"/>
                 </a:solidFill>
               </a:rPr>
-              <a:t>AEC 점수는 세 질환 모두 비유의, 유의한 점수는 </a:t>
-            </a:r>
-            <a:r>
-              <a:rPr sz="1600" b="1">
+              <a:t>AEC </a:t>
+            </a:r>
+            <a:r>
+              <a:rPr sz="1600" b="0" dirty="0" err="1">
+                <a:solidFill>
+                  <a:srgbClr val="333F4D"/>
+                </a:solidFill>
+              </a:rPr>
+              <a:t>점수는</a:t>
+            </a:r>
+            <a:r>
+              <a:rPr sz="1600" b="0" dirty="0">
+                <a:solidFill>
+                  <a:srgbClr val="333F4D"/>
+                </a:solidFill>
+              </a:rPr>
+              <a:t> 세 </a:t>
+            </a:r>
+            <a:r>
+              <a:rPr sz="1600" b="0" dirty="0" err="1">
+                <a:solidFill>
+                  <a:srgbClr val="333F4D"/>
+                </a:solidFill>
+              </a:rPr>
+              <a:t>질환</a:t>
+            </a:r>
+            <a:r>
+              <a:rPr sz="1600" b="0" dirty="0">
+                <a:solidFill>
+                  <a:srgbClr val="333F4D"/>
+                </a:solidFill>
+              </a:rPr>
+              <a:t> </a:t>
+            </a:r>
+            <a:r>
+              <a:rPr sz="1600" b="0" dirty="0" err="1">
+                <a:solidFill>
+                  <a:srgbClr val="333F4D"/>
+                </a:solidFill>
+              </a:rPr>
+              <a:t>모두</a:t>
+            </a:r>
+            <a:r>
+              <a:rPr sz="1600" b="0" dirty="0">
+                <a:solidFill>
+                  <a:srgbClr val="333F4D"/>
+                </a:solidFill>
+              </a:rPr>
+              <a:t> </a:t>
+            </a:r>
+            <a:r>
+              <a:rPr sz="1600" b="0" dirty="0" err="1">
+                <a:solidFill>
+                  <a:srgbClr val="333F4D"/>
+                </a:solidFill>
+              </a:rPr>
+              <a:t>비유의</a:t>
+            </a:r>
+            <a:r>
+              <a:rPr sz="1600" b="0" dirty="0">
+                <a:solidFill>
+                  <a:srgbClr val="333F4D"/>
+                </a:solidFill>
+              </a:rPr>
+              <a:t>, </a:t>
+            </a:r>
+            <a:r>
+              <a:rPr sz="1600" b="0" dirty="0" err="1">
+                <a:solidFill>
+                  <a:srgbClr val="333F4D"/>
+                </a:solidFill>
+              </a:rPr>
+              <a:t>유의한</a:t>
+            </a:r>
+            <a:r>
+              <a:rPr sz="1600" b="0" dirty="0">
+                <a:solidFill>
+                  <a:srgbClr val="333F4D"/>
+                </a:solidFill>
+              </a:rPr>
+              <a:t> </a:t>
+            </a:r>
+            <a:r>
+              <a:rPr sz="1600" b="0" dirty="0" err="1">
+                <a:solidFill>
+                  <a:srgbClr val="333F4D"/>
+                </a:solidFill>
+              </a:rPr>
+              <a:t>점수는</a:t>
+            </a:r>
+            <a:r>
+              <a:rPr sz="1600" b="0" dirty="0">
+                <a:solidFill>
+                  <a:srgbClr val="333F4D"/>
+                </a:solidFill>
+              </a:rPr>
+              <a:t> </a:t>
+            </a:r>
+            <a:r>
+              <a:rPr sz="1600" b="1" dirty="0" err="1">
                 <a:solidFill>
                   <a:srgbClr val="1F3B63"/>
                 </a:solidFill>
@@ -10864,23 +11831,158 @@
               <a:t>체성분에서만</a:t>
             </a:r>
             <a:r>
-              <a:rPr sz="1600" b="0">
+              <a:rPr sz="1600" b="0" dirty="0">
                 <a:solidFill>
                   <a:srgbClr val="333F4D"/>
                 </a:solidFill>
               </a:rPr>
-              <a:t> 나옴 (p-value는 보정 전)</a:t>
-            </a:r>
-          </a:p>
-          <a:p>
-            <a:pPr/>
-            <a:r>
-              <a:rPr sz="1600" b="0">
+              <a:t> </a:t>
+            </a:r>
+            <a:r>
+              <a:rPr sz="1600" b="0" dirty="0" err="1">
                 <a:solidFill>
                   <a:srgbClr val="333F4D"/>
                 </a:solidFill>
               </a:rPr>
-              <a:t>점수 하나만으로는 해석이 어려움 (위치별 해석은 Figure 2)</a:t>
+              <a:t>나옴</a:t>
+            </a:r>
+            <a:r>
+              <a:rPr sz="1600" b="0" dirty="0">
+                <a:solidFill>
+                  <a:srgbClr val="333F4D"/>
+                </a:solidFill>
+              </a:rPr>
+              <a:t> (p-</a:t>
+            </a:r>
+            <a:r>
+              <a:rPr sz="1600" b="0" dirty="0" err="1">
+                <a:solidFill>
+                  <a:srgbClr val="333F4D"/>
+                </a:solidFill>
+              </a:rPr>
+              <a:t>value는</a:t>
+            </a:r>
+            <a:r>
+              <a:rPr sz="1600" b="0" dirty="0">
+                <a:solidFill>
+                  <a:srgbClr val="333F4D"/>
+                </a:solidFill>
+              </a:rPr>
+              <a:t> </a:t>
+            </a:r>
+            <a:r>
+              <a:rPr sz="1600" b="0" dirty="0" err="1">
+                <a:solidFill>
+                  <a:srgbClr val="333F4D"/>
+                </a:solidFill>
+              </a:rPr>
+              <a:t>보정</a:t>
+            </a:r>
+            <a:r>
+              <a:rPr sz="1600" b="0" dirty="0">
+                <a:solidFill>
+                  <a:srgbClr val="333F4D"/>
+                </a:solidFill>
+              </a:rPr>
+              <a:t> 전)</a:t>
+            </a:r>
+          </a:p>
+          <a:p>
+            <a:r>
+              <a:rPr sz="1600" b="0" dirty="0" err="1">
+                <a:solidFill>
+                  <a:srgbClr val="333F4D"/>
+                </a:solidFill>
+              </a:rPr>
+              <a:t>점수</a:t>
+            </a:r>
+            <a:r>
+              <a:rPr sz="1600" b="0" dirty="0">
+                <a:solidFill>
+                  <a:srgbClr val="333F4D"/>
+                </a:solidFill>
+              </a:rPr>
+              <a:t> </a:t>
+            </a:r>
+            <a:r>
+              <a:rPr sz="1600" b="0" dirty="0" err="1">
+                <a:solidFill>
+                  <a:srgbClr val="333F4D"/>
+                </a:solidFill>
+              </a:rPr>
+              <a:t>하나만으로는</a:t>
+            </a:r>
+            <a:r>
+              <a:rPr sz="1600" b="0" dirty="0">
+                <a:solidFill>
+                  <a:srgbClr val="333F4D"/>
+                </a:solidFill>
+              </a:rPr>
+              <a:t> </a:t>
+            </a:r>
+            <a:r>
+              <a:rPr sz="1600" b="0" dirty="0" err="1">
+                <a:solidFill>
+                  <a:srgbClr val="333F4D"/>
+                </a:solidFill>
+              </a:rPr>
+              <a:t>해석이</a:t>
+            </a:r>
+            <a:r>
+              <a:rPr sz="1600" b="0" dirty="0">
+                <a:solidFill>
+                  <a:srgbClr val="333F4D"/>
+                </a:solidFill>
+              </a:rPr>
+              <a:t> </a:t>
+            </a:r>
+            <a:r>
+              <a:rPr sz="1600" b="0" dirty="0" err="1">
+                <a:solidFill>
+                  <a:srgbClr val="333F4D"/>
+                </a:solidFill>
+              </a:rPr>
+              <a:t>어려움</a:t>
+            </a:r>
+            <a:r>
+              <a:rPr sz="1600" b="0" dirty="0">
+                <a:solidFill>
+                  <a:srgbClr val="333F4D"/>
+                </a:solidFill>
+              </a:rPr>
+              <a:t> (</a:t>
+            </a:r>
+            <a:r>
+              <a:rPr sz="1600" b="0" dirty="0" err="1">
+                <a:solidFill>
+                  <a:srgbClr val="333F4D"/>
+                </a:solidFill>
+              </a:rPr>
+              <a:t>위치별</a:t>
+            </a:r>
+            <a:r>
+              <a:rPr sz="1600" b="0" dirty="0">
+                <a:solidFill>
+                  <a:srgbClr val="333F4D"/>
+                </a:solidFill>
+              </a:rPr>
+              <a:t> </a:t>
+            </a:r>
+            <a:r>
+              <a:rPr sz="1600" b="0" dirty="0" err="1">
+                <a:solidFill>
+                  <a:srgbClr val="333F4D"/>
+                </a:solidFill>
+              </a:rPr>
+              <a:t>해석은</a:t>
+            </a:r>
+            <a:r>
+              <a:rPr sz="1600" b="0" dirty="0">
+                <a:solidFill>
+                  <a:srgbClr val="333F4D"/>
+                </a:solidFill>
+              </a:rPr>
+              <a:t> Figure 2)</a:t>
             </a:r>
           </a:p>
         </p:txBody>
@@ -10925,6 +12027,7 @@
           <a:lstStyle/>
           <a:p>
             <a:pPr algn="ctr"/>
+            <a:endParaRPr/>
           </a:p>
         </p:txBody>
       </p:sp>
@@ -10964,7 +12067,7 @@
           </a:fontRef>
         </p:style>
         <p:txBody>
-          <a:bodyPr rtlCol="0" anchor="ctr" tIns="0" bIns="0"/>
+          <a:bodyPr tIns="0" bIns="0" rtlCol="0" anchor="ctr"/>
           <a:lstStyle/>
           <a:p>
             <a:pPr algn="ctr"/>
@@ -11003,7 +12106,7 @@
             <a:fld id="{9F4AF89A-28FA-47FA-B28F-9A9C6913CB7A}" type="slidenum">
               <a:rPr lang="ko-KR" altLang="en-US" smtClean="0"/>
               <a:pPr/>
-              <a:t>3</a:t>
+              <a:t>16</a:t>
             </a:fld>
             <a:endParaRPr lang="ko-KR" altLang="en-US" dirty="0"/>
           </a:p>
@@ -11015,10 +12118,16 @@
           <p:cNvGraphicFramePr>
             <a:graphicFrameLocks noGrp="1"/>
           </p:cNvGraphicFramePr>
-          <p:nvPr/>
+          <p:nvPr>
+            <p:extLst>
+              <p:ext uri="{D42A27DB-BD31-4B8C-83A1-F6EECF244321}">
+                <p14:modId xmlns:p14="http://schemas.microsoft.com/office/powerpoint/2010/main" val="1984047811"/>
+              </p:ext>
+            </p:extLst>
+          </p:nvPr>
         </p:nvGraphicFramePr>
         <p:xfrm>
-          <a:off x="512064" y="2060240"/>
+          <a:off x="512064" y="2427987"/>
           <a:ext cx="11173967" cy="3936000"/>
         </p:xfrm>
         <a:graphic>
@@ -12729,7 +13838,7 @@
                     <a:p>
                       <a:pPr algn="ctr"/>
                       <a:r>
-                        <a:rPr sz="1000" b="0"/>
+                        <a:rPr sz="1000" b="0" dirty="0"/>
                         <a:t>0.214</a:t>
                       </a:r>
                     </a:p>
@@ -12755,7 +13864,7 @@
 </file>
 
 <file path=ppt/slides/slide17.xml><?xml version="1.0" encoding="utf-8"?>
-<p:sld xmlns:a="http://schemas.openxmlformats.org/drawingml/2006/main" xmlns:p="http://schemas.openxmlformats.org/presentationml/2006/main" xmlns:r="http://schemas.openxmlformats.org/officeDocument/2006/relationships">
+<p:sld xmlns:a="http://schemas.openxmlformats.org/drawingml/2006/main" xmlns:r="http://schemas.openxmlformats.org/officeDocument/2006/relationships" xmlns:p="http://schemas.openxmlformats.org/presentationml/2006/main">
   <p:cSld>
     <p:spTree>
       <p:nvGrpSpPr>
@@ -12763,7 +13872,14 @@
         <p:cNvGrpSpPr/>
         <p:nvPr/>
       </p:nvGrpSpPr>
-      <p:grpSpPr/>
+      <p:grpSpPr>
+        <a:xfrm>
+          <a:off x="0" y="0"/>
+          <a:ext cx="0" cy="0"/>
+          <a:chOff x="0" y="0"/>
+          <a:chExt cx="0" cy="0"/>
+        </a:xfrm>
+      </p:grpSpPr>
       <p:sp>
         <p:nvSpPr>
           <p:cNvPr id="2" name="Title 1"/>
@@ -12810,7 +13926,6 @@
           <a:bodyPr/>
           <a:lstStyle/>
           <a:p>
-            <a:pPr/>
             <a:r>
               <a:rPr sz="1600" b="0">
                 <a:solidFill>
@@ -12821,7 +13936,6 @@
             </a:r>
           </a:p>
           <a:p>
-            <a:pPr/>
             <a:r>
               <a:rPr sz="1600" b="0">
                 <a:solidFill>
@@ -12832,7 +13946,6 @@
             </a:r>
           </a:p>
           <a:p>
-            <a:pPr/>
             <a:r>
               <a:rPr sz="1600" b="0">
                 <a:solidFill>
@@ -12884,6 +13997,7 @@
           <a:lstStyle/>
           <a:p>
             <a:pPr algn="ctr"/>
+            <a:endParaRPr/>
           </a:p>
         </p:txBody>
       </p:sp>
@@ -12923,7 +14037,7 @@
           </a:fontRef>
         </p:style>
         <p:txBody>
-          <a:bodyPr rtlCol="0" anchor="ctr" tIns="0" bIns="0"/>
+          <a:bodyPr tIns="0" bIns="0" rtlCol="0" anchor="ctr"/>
           <a:lstStyle/>
           <a:p>
             <a:pPr algn="ctr"/>
@@ -12962,7 +14076,7 @@
             <a:fld id="{9F4AF89A-28FA-47FA-B28F-9A9C6913CB7A}" type="slidenum">
               <a:rPr lang="ko-KR" altLang="en-US" smtClean="0"/>
               <a:pPr/>
-              <a:t>3</a:t>
+              <a:t>17</a:t>
             </a:fld>
             <a:endParaRPr lang="ko-KR" altLang="en-US" dirty="0"/>
           </a:p>
@@ -13001,7 +14115,7 @@
 </file>
 
 <file path=ppt/slides/slide18.xml><?xml version="1.0" encoding="utf-8"?>
-<p:sld xmlns:a="http://schemas.openxmlformats.org/drawingml/2006/main" xmlns:p="http://schemas.openxmlformats.org/presentationml/2006/main" xmlns:r="http://schemas.openxmlformats.org/officeDocument/2006/relationships">
+<p:sld xmlns:a="http://schemas.openxmlformats.org/drawingml/2006/main" xmlns:r="http://schemas.openxmlformats.org/officeDocument/2006/relationships" xmlns:p="http://schemas.openxmlformats.org/presentationml/2006/main">
   <p:cSld>
     <p:spTree>
       <p:nvGrpSpPr>
@@ -13009,7 +14123,14 @@
         <p:cNvGrpSpPr/>
         <p:nvPr/>
       </p:nvGrpSpPr>
-      <p:grpSpPr/>
+      <p:grpSpPr>
+        <a:xfrm>
+          <a:off x="0" y="0"/>
+          <a:ext cx="0" cy="0"/>
+          <a:chOff x="0" y="0"/>
+          <a:chExt cx="0" cy="0"/>
+        </a:xfrm>
+      </p:grpSpPr>
       <p:sp>
         <p:nvSpPr>
           <p:cNvPr id="2" name="Title 1"/>
@@ -13056,7 +14177,6 @@
           <a:bodyPr/>
           <a:lstStyle/>
           <a:p>
-            <a:pPr/>
             <a:r>
               <a:rPr sz="1800" b="0">
                 <a:solidFill>
@@ -13075,7 +14195,6 @@
             </a:r>
           </a:p>
           <a:p>
-            <a:pPr/>
             <a:r>
               <a:rPr sz="1800" b="0">
                 <a:solidFill>
@@ -13086,7 +14205,6 @@
             </a:r>
           </a:p>
           <a:p>
-            <a:pPr/>
             <a:r>
               <a:rPr sz="1800" b="0">
                 <a:solidFill>
@@ -13097,7 +14215,6 @@
             </a:r>
           </a:p>
           <a:p>
-            <a:pPr/>
             <a:r>
               <a:rPr sz="1800" b="0">
                 <a:solidFill>
@@ -13108,7 +14225,6 @@
             </a:r>
           </a:p>
           <a:p>
-            <a:pPr/>
             <a:r>
               <a:rPr sz="1800" b="0">
                 <a:solidFill>
@@ -13119,7 +14235,6 @@
             </a:r>
           </a:p>
           <a:p>
-            <a:pPr/>
             <a:r>
               <a:rPr sz="1800" b="0">
                 <a:solidFill>
@@ -13171,6 +14286,7 @@
           <a:lstStyle/>
           <a:p>
             <a:pPr algn="ctr"/>
+            <a:endParaRPr/>
           </a:p>
         </p:txBody>
       </p:sp>
@@ -13210,7 +14326,7 @@
           </a:fontRef>
         </p:style>
         <p:txBody>
-          <a:bodyPr rtlCol="0" anchor="ctr" tIns="0" bIns="0"/>
+          <a:bodyPr tIns="0" bIns="0" rtlCol="0" anchor="ctr"/>
           <a:lstStyle/>
           <a:p>
             <a:pPr algn="ctr"/>
@@ -13249,7 +14365,7 @@
             <a:fld id="{9F4AF89A-28FA-47FA-B28F-9A9C6913CB7A}" type="slidenum">
               <a:rPr lang="ko-KR" altLang="en-US" smtClean="0"/>
               <a:pPr/>
-              <a:t>3</a:t>
+              <a:t>18</a:t>
             </a:fld>
             <a:endParaRPr lang="ko-KR" altLang="en-US" dirty="0"/>
           </a:p>
@@ -13264,7 +14380,7 @@
 </file>
 
 <file path=ppt/slides/slide19.xml><?xml version="1.0" encoding="utf-8"?>
-<p:sld xmlns:a="http://schemas.openxmlformats.org/drawingml/2006/main" xmlns:p="http://schemas.openxmlformats.org/presentationml/2006/main" xmlns:r="http://schemas.openxmlformats.org/officeDocument/2006/relationships">
+<p:sld xmlns:a="http://schemas.openxmlformats.org/drawingml/2006/main" xmlns:r="http://schemas.openxmlformats.org/officeDocument/2006/relationships" xmlns:p="http://schemas.openxmlformats.org/presentationml/2006/main">
   <p:cSld>
     <p:spTree>
       <p:nvGrpSpPr>
@@ -13272,7 +14388,14 @@
         <p:cNvGrpSpPr/>
         <p:nvPr/>
       </p:nvGrpSpPr>
-      <p:grpSpPr/>
+      <p:grpSpPr>
+        <a:xfrm>
+          <a:off x="0" y="0"/>
+          <a:ext cx="0" cy="0"/>
+          <a:chOff x="0" y="0"/>
+          <a:chExt cx="0" cy="0"/>
+        </a:xfrm>
+      </p:grpSpPr>
       <p:sp>
         <p:nvSpPr>
           <p:cNvPr id="2" name="Title 1"/>
@@ -13319,7 +14442,6 @@
           <a:bodyPr/>
           <a:lstStyle/>
           <a:p>
-            <a:pPr/>
             <a:r>
               <a:rPr sz="1800" b="0">
                 <a:solidFill>
@@ -13354,7 +14476,6 @@
             </a:r>
           </a:p>
           <a:p>
-            <a:pPr/>
             <a:r>
               <a:rPr sz="1800" b="0">
                 <a:solidFill>
@@ -13365,7 +14486,6 @@
             </a:r>
           </a:p>
           <a:p>
-            <a:pPr/>
             <a:r>
               <a:rPr sz="1800" b="0">
                 <a:solidFill>
@@ -13392,7 +14512,6 @@
             </a:r>
           </a:p>
           <a:p>
-            <a:pPr/>
             <a:r>
               <a:rPr sz="1800" b="0">
                 <a:solidFill>
@@ -13403,7 +14522,6 @@
             </a:r>
           </a:p>
           <a:p>
-            <a:pPr/>
             <a:r>
               <a:rPr sz="1800" b="0">
                 <a:solidFill>
@@ -13414,7 +14532,6 @@
             </a:r>
           </a:p>
           <a:p>
-            <a:pPr/>
             <a:r>
               <a:rPr sz="1800" b="0">
                 <a:solidFill>
@@ -13466,6 +14583,7 @@
           <a:lstStyle/>
           <a:p>
             <a:pPr algn="ctr"/>
+            <a:endParaRPr/>
           </a:p>
         </p:txBody>
       </p:sp>
@@ -13505,7 +14623,7 @@
           </a:fontRef>
         </p:style>
         <p:txBody>
-          <a:bodyPr rtlCol="0" anchor="ctr" tIns="0" bIns="0"/>
+          <a:bodyPr tIns="0" bIns="0" rtlCol="0" anchor="ctr"/>
           <a:lstStyle/>
           <a:p>
             <a:pPr algn="ctr"/>
@@ -13544,7 +14662,7 @@
             <a:fld id="{9F4AF89A-28FA-47FA-B28F-9A9C6913CB7A}" type="slidenum">
               <a:rPr lang="ko-KR" altLang="en-US" smtClean="0"/>
               <a:pPr/>
-              <a:t>3</a:t>
+              <a:t>19</a:t>
             </a:fld>
             <a:endParaRPr lang="ko-KR" altLang="en-US" dirty="0"/>
           </a:p>
@@ -13559,7 +14677,7 @@
 </file>
 
 <file path=ppt/slides/slide2.xml><?xml version="1.0" encoding="utf-8"?>
-<p:sld xmlns:a="http://schemas.openxmlformats.org/drawingml/2006/main" xmlns:p="http://schemas.openxmlformats.org/presentationml/2006/main" xmlns:r="http://schemas.openxmlformats.org/officeDocument/2006/relationships">
+<p:sld xmlns:a="http://schemas.openxmlformats.org/drawingml/2006/main" xmlns:r="http://schemas.openxmlformats.org/officeDocument/2006/relationships" xmlns:p="http://schemas.openxmlformats.org/presentationml/2006/main">
   <p:cSld>
     <p:spTree>
       <p:nvGrpSpPr>
@@ -13567,7 +14685,14 @@
         <p:cNvGrpSpPr/>
         <p:nvPr/>
       </p:nvGrpSpPr>
-      <p:grpSpPr/>
+      <p:grpSpPr>
+        <a:xfrm>
+          <a:off x="0" y="0"/>
+          <a:ext cx="0" cy="0"/>
+          <a:chOff x="0" y="0"/>
+          <a:chExt cx="0" cy="0"/>
+        </a:xfrm>
+      </p:grpSpPr>
       <p:sp>
         <p:nvSpPr>
           <p:cNvPr id="2" name="Title 1"/>
@@ -13614,7 +14739,6 @@
           <a:bodyPr/>
           <a:lstStyle/>
           <a:p>
-            <a:pPr/>
             <a:r>
               <a:rPr sz="2000" b="1">
                 <a:solidFill>
@@ -13633,7 +14757,6 @@
             </a:r>
           </a:p>
           <a:p>
-            <a:pPr/>
             <a:r>
               <a:rPr sz="2000" b="0">
                 <a:solidFill>
@@ -13660,7 +14783,6 @@
             </a:r>
           </a:p>
           <a:p>
-            <a:pPr/>
             <a:r>
               <a:rPr sz="2000" b="0">
                 <a:solidFill>
@@ -13687,7 +14809,6 @@
             </a:r>
           </a:p>
           <a:p>
-            <a:pPr/>
             <a:r>
               <a:rPr sz="2000" b="0">
                 <a:solidFill>
@@ -13750,6 +14871,7 @@
           <a:lstStyle/>
           <a:p>
             <a:pPr algn="ctr"/>
+            <a:endParaRPr/>
           </a:p>
         </p:txBody>
       </p:sp>
@@ -13789,7 +14911,7 @@
           </a:fontRef>
         </p:style>
         <p:txBody>
-          <a:bodyPr rtlCol="0" anchor="ctr" tIns="0" bIns="0"/>
+          <a:bodyPr tIns="0" bIns="0" rtlCol="0" anchor="ctr"/>
           <a:lstStyle/>
           <a:p>
             <a:pPr algn="ctr"/>
@@ -13828,7 +14950,7 @@
             <a:fld id="{9F4AF89A-28FA-47FA-B28F-9A9C6913CB7A}" type="slidenum">
               <a:rPr lang="ko-KR" altLang="en-US" smtClean="0"/>
               <a:pPr/>
-              <a:t>3</a:t>
+              <a:t>2</a:t>
             </a:fld>
             <a:endParaRPr lang="ko-KR" altLang="en-US" dirty="0"/>
           </a:p>
@@ -13843,7 +14965,7 @@
 </file>
 
 <file path=ppt/slides/slide20.xml><?xml version="1.0" encoding="utf-8"?>
-<p:sld xmlns:a="http://schemas.openxmlformats.org/drawingml/2006/main" xmlns:p="http://schemas.openxmlformats.org/presentationml/2006/main" xmlns:r="http://schemas.openxmlformats.org/officeDocument/2006/relationships">
+<p:sld xmlns:a="http://schemas.openxmlformats.org/drawingml/2006/main" xmlns:r="http://schemas.openxmlformats.org/officeDocument/2006/relationships" xmlns:p="http://schemas.openxmlformats.org/presentationml/2006/main">
   <p:cSld>
     <p:spTree>
       <p:nvGrpSpPr>
@@ -13851,7 +14973,14 @@
         <p:cNvGrpSpPr/>
         <p:nvPr/>
       </p:nvGrpSpPr>
-      <p:grpSpPr/>
+      <p:grpSpPr>
+        <a:xfrm>
+          <a:off x="0" y="0"/>
+          <a:ext cx="0" cy="0"/>
+          <a:chOff x="0" y="0"/>
+          <a:chExt cx="0" cy="0"/>
+        </a:xfrm>
+      </p:grpSpPr>
       <p:pic>
         <p:nvPicPr>
           <p:cNvPr id="2" name="Picture 1" descr="image.png"/>
@@ -13861,7 +14990,7 @@
           <p:nvPr/>
         </p:nvPicPr>
         <p:blipFill>
-          <a:blip r:embed="rId2"/>
+          <a:blip r:embed="rId3"/>
           <a:stretch>
             <a:fillRect/>
           </a:stretch>
@@ -13885,7 +15014,7 @@
 </file>
 
 <file path=ppt/slides/slide21.xml><?xml version="1.0" encoding="utf-8"?>
-<p:sld xmlns:a="http://schemas.openxmlformats.org/drawingml/2006/main" xmlns:p="http://schemas.openxmlformats.org/presentationml/2006/main" xmlns:r="http://schemas.openxmlformats.org/officeDocument/2006/relationships">
+<p:sld xmlns:a="http://schemas.openxmlformats.org/drawingml/2006/main" xmlns:r="http://schemas.openxmlformats.org/officeDocument/2006/relationships" xmlns:p="http://schemas.openxmlformats.org/presentationml/2006/main">
   <p:cSld>
     <p:spTree>
       <p:nvGrpSpPr>
@@ -13893,67 +15022,14 @@
         <p:cNvGrpSpPr/>
         <p:nvPr/>
       </p:nvGrpSpPr>
-      <p:grpSpPr/>
-      <p:sp>
-        <p:nvSpPr>
-          <p:cNvPr id="2" name="Title 1"/>
-          <p:cNvSpPr>
-            <a:spLocks noGrp="1"/>
-          </p:cNvSpPr>
-          <p:nvPr>
-            <p:ph type="title"/>
-          </p:nvPr>
-        </p:nvSpPr>
-        <p:spPr/>
-        <p:txBody>
-          <a:bodyPr/>
-          <a:lstStyle/>
-          <a:p>
-            <a:r>
-              <a:t>Appendix</a:t>
-            </a:r>
-          </a:p>
-        </p:txBody>
-      </p:sp>
-      <p:sp>
-        <p:nvSpPr>
-          <p:cNvPr id="3" name="Text Placeholder 2"/>
-          <p:cNvSpPr>
-            <a:spLocks noGrp="1"/>
-          </p:cNvSpPr>
-          <p:nvPr>
-            <p:ph type="body" idx="1"/>
-          </p:nvPr>
-        </p:nvSpPr>
-        <p:spPr/>
-        <p:txBody>
-          <a:bodyPr/>
-          <a:lstStyle/>
-          <a:p>
-            <a:r>
-              <a:t>보충 표·그림 (Supplementary Tables &amp; Figures)</a:t>
-            </a:r>
-          </a:p>
-        </p:txBody>
-      </p:sp>
-    </p:spTree>
-  </p:cSld>
-  <p:clrMapOvr>
-    <a:masterClrMapping/>
-  </p:clrMapOvr>
-</p:sld>
-</file>
-
-<file path=ppt/slides/slide22.xml><?xml version="1.0" encoding="utf-8"?>
-<p:sld xmlns:a="http://schemas.openxmlformats.org/drawingml/2006/main" xmlns:p="http://schemas.openxmlformats.org/presentationml/2006/main" xmlns:r="http://schemas.openxmlformats.org/officeDocument/2006/relationships">
-  <p:cSld>
-    <p:spTree>
-      <p:nvGrpSpPr>
-        <p:cNvPr id="1" name=""/>
-        <p:cNvGrpSpPr/>
-        <p:nvPr/>
-      </p:nvGrpSpPr>
-      <p:grpSpPr/>
+      <p:grpSpPr>
+        <a:xfrm>
+          <a:off x="0" y="0"/>
+          <a:ext cx="0" cy="0"/>
+          <a:chOff x="0" y="0"/>
+          <a:chExt cx="0" cy="0"/>
+        </a:xfrm>
+      </p:grpSpPr>
       <p:sp>
         <p:nvSpPr>
           <p:cNvPr id="2" name="Title 1"/>
@@ -14000,7 +15076,6 @@
           <a:bodyPr/>
           <a:lstStyle/>
           <a:p>
-            <a:pPr/>
             <a:r>
               <a:rPr sz="1600" b="0">
                 <a:solidFill>
@@ -14052,6 +15127,7 @@
           <a:lstStyle/>
           <a:p>
             <a:pPr algn="ctr"/>
+            <a:endParaRPr/>
           </a:p>
         </p:txBody>
       </p:sp>
@@ -14091,7 +15167,7 @@
           </a:fontRef>
         </p:style>
         <p:txBody>
-          <a:bodyPr rtlCol="0" anchor="ctr" tIns="0" bIns="0"/>
+          <a:bodyPr tIns="0" bIns="0" rtlCol="0" anchor="ctr"/>
           <a:lstStyle/>
           <a:p>
             <a:pPr algn="ctr"/>
@@ -14130,7 +15206,7 @@
             <a:fld id="{9F4AF89A-28FA-47FA-B28F-9A9C6913CB7A}" type="slidenum">
               <a:rPr lang="ko-KR" altLang="en-US" smtClean="0"/>
               <a:pPr/>
-              <a:t>3</a:t>
+              <a:t>21</a:t>
             </a:fld>
             <a:endParaRPr lang="ko-KR" altLang="en-US" dirty="0"/>
           </a:p>
@@ -14168,8 +15244,8 @@
 </p:sld>
 </file>
 
-<file path=ppt/slides/slide23.xml><?xml version="1.0" encoding="utf-8"?>
-<p:sld xmlns:a="http://schemas.openxmlformats.org/drawingml/2006/main" xmlns:p="http://schemas.openxmlformats.org/presentationml/2006/main" xmlns:r="http://schemas.openxmlformats.org/officeDocument/2006/relationships">
+<file path=ppt/slides/slide22.xml><?xml version="1.0" encoding="utf-8"?>
+<p:sld xmlns:a="http://schemas.openxmlformats.org/drawingml/2006/main" xmlns:r="http://schemas.openxmlformats.org/officeDocument/2006/relationships" xmlns:p="http://schemas.openxmlformats.org/presentationml/2006/main">
   <p:cSld>
     <p:spTree>
       <p:nvGrpSpPr>
@@ -14177,7 +15253,14 @@
         <p:cNvGrpSpPr/>
         <p:nvPr/>
       </p:nvGrpSpPr>
-      <p:grpSpPr/>
+      <p:grpSpPr>
+        <a:xfrm>
+          <a:off x="0" y="0"/>
+          <a:ext cx="0" cy="0"/>
+          <a:chOff x="0" y="0"/>
+          <a:chExt cx="0" cy="0"/>
+        </a:xfrm>
+      </p:grpSpPr>
       <p:sp>
         <p:nvSpPr>
           <p:cNvPr id="2" name="Title 1"/>
@@ -14224,7 +15307,6 @@
           <a:bodyPr/>
           <a:lstStyle/>
           <a:p>
-            <a:pPr/>
             <a:r>
               <a:rPr sz="1600" b="0">
                 <a:solidFill>
@@ -14276,6 +15358,7 @@
           <a:lstStyle/>
           <a:p>
             <a:pPr algn="ctr"/>
+            <a:endParaRPr/>
           </a:p>
         </p:txBody>
       </p:sp>
@@ -14315,7 +15398,7 @@
           </a:fontRef>
         </p:style>
         <p:txBody>
-          <a:bodyPr rtlCol="0" anchor="ctr" tIns="0" bIns="0"/>
+          <a:bodyPr tIns="0" bIns="0" rtlCol="0" anchor="ctr"/>
           <a:lstStyle/>
           <a:p>
             <a:pPr algn="ctr"/>
@@ -14354,7 +15437,7 @@
             <a:fld id="{9F4AF89A-28FA-47FA-B28F-9A9C6913CB7A}" type="slidenum">
               <a:rPr lang="ko-KR" altLang="en-US" smtClean="0"/>
               <a:pPr/>
-              <a:t>3</a:t>
+              <a:t>22</a:t>
             </a:fld>
             <a:endParaRPr lang="ko-KR" altLang="en-US" dirty="0"/>
           </a:p>
@@ -14369,7 +15452,7 @@
           <p:nvPr/>
         </p:nvPicPr>
         <p:blipFill>
-          <a:blip r:embed="rId4"/>
+          <a:blip r:embed="rId3"/>
           <a:stretch>
             <a:fillRect/>
           </a:stretch>
@@ -14393,7 +15476,7 @@
           <p:nvPr/>
         </p:nvPicPr>
         <p:blipFill>
-          <a:blip r:embed="rId5"/>
+          <a:blip r:embed="rId4"/>
           <a:stretch>
             <a:fillRect/>
           </a:stretch>
@@ -14416,8 +15499,8 @@
 </p:sld>
 </file>
 
-<file path=ppt/slides/slide24.xml><?xml version="1.0" encoding="utf-8"?>
-<p:sld xmlns:a="http://schemas.openxmlformats.org/drawingml/2006/main" xmlns:p="http://schemas.openxmlformats.org/presentationml/2006/main" xmlns:r="http://schemas.openxmlformats.org/officeDocument/2006/relationships">
+<file path=ppt/slides/slide23.xml><?xml version="1.0" encoding="utf-8"?>
+<p:sld xmlns:a="http://schemas.openxmlformats.org/drawingml/2006/main" xmlns:r="http://schemas.openxmlformats.org/officeDocument/2006/relationships" xmlns:p="http://schemas.openxmlformats.org/presentationml/2006/main">
   <p:cSld>
     <p:spTree>
       <p:nvGrpSpPr>
@@ -14425,7 +15508,14 @@
         <p:cNvGrpSpPr/>
         <p:nvPr/>
       </p:nvGrpSpPr>
-      <p:grpSpPr/>
+      <p:grpSpPr>
+        <a:xfrm>
+          <a:off x="0" y="0"/>
+          <a:ext cx="0" cy="0"/>
+          <a:chOff x="0" y="0"/>
+          <a:chExt cx="0" cy="0"/>
+        </a:xfrm>
+      </p:grpSpPr>
       <p:sp>
         <p:nvSpPr>
           <p:cNvPr id="2" name="Title 1"/>
@@ -14472,7 +15562,6 @@
           <a:bodyPr/>
           <a:lstStyle/>
           <a:p>
-            <a:pPr/>
             <a:r>
               <a:rPr sz="1600" b="0">
                 <a:solidFill>
@@ -14524,6 +15613,7 @@
           <a:lstStyle/>
           <a:p>
             <a:pPr algn="ctr"/>
+            <a:endParaRPr/>
           </a:p>
         </p:txBody>
       </p:sp>
@@ -14563,7 +15653,7 @@
           </a:fontRef>
         </p:style>
         <p:txBody>
-          <a:bodyPr rtlCol="0" anchor="ctr" tIns="0" bIns="0"/>
+          <a:bodyPr tIns="0" bIns="0" rtlCol="0" anchor="ctr"/>
           <a:lstStyle/>
           <a:p>
             <a:pPr algn="ctr"/>
@@ -14602,7 +15692,7 @@
             <a:fld id="{9F4AF89A-28FA-47FA-B28F-9A9C6913CB7A}" type="slidenum">
               <a:rPr lang="ko-KR" altLang="en-US" smtClean="0"/>
               <a:pPr/>
-              <a:t>3</a:t>
+              <a:t>23</a:t>
             </a:fld>
             <a:endParaRPr lang="ko-KR" altLang="en-US" dirty="0"/>
           </a:p>
@@ -14614,11 +15704,17 @@
           <p:cNvGraphicFramePr>
             <a:graphicFrameLocks noGrp="1"/>
           </p:cNvGraphicFramePr>
-          <p:nvPr/>
+          <p:nvPr>
+            <p:extLst>
+              <p:ext uri="{D42A27DB-BD31-4B8C-83A1-F6EECF244321}">
+                <p14:modId xmlns:p14="http://schemas.microsoft.com/office/powerpoint/2010/main" val="352380475"/>
+              </p:ext>
+            </p:extLst>
+          </p:nvPr>
         </p:nvGraphicFramePr>
         <p:xfrm>
-          <a:off x="512064" y="1655120"/>
-          <a:ext cx="11530000" cy="4700000"/>
+          <a:off x="331000" y="1789443"/>
+          <a:ext cx="11530000" cy="3592739"/>
         </p:xfrm>
         <a:graphic>
           <a:graphicData uri="http://schemas.openxmlformats.org/drawingml/2006/table">
@@ -14698,15 +15794,15 @@
                   </a:extLst>
                 </a:gridCol>
               </a:tblGrid>
-              <a:tr h="500000">
-                <a:tc>
-                  <a:txBody>
-                    <a:bodyPr/>
-                    <a:lstStyle/>
-                    <a:p>
-                      <a:pPr algn="ctr"/>
-                      <a:r>
-                        <a:rPr sz="800" b="1"/>
+              <a:tr h="724343">
+                <a:tc>
+                  <a:txBody>
+                    <a:bodyPr/>
+                    <a:lstStyle/>
+                    <a:p>
+                      <a:pPr algn="ctr"/>
+                      <a:r>
+                        <a:rPr sz="1000" b="1"/>
                         <a:t>Disease</a:t>
                       </a:r>
                     </a:p>
@@ -14720,7 +15816,7 @@
                     <a:p>
                       <a:pPr algn="ctr"/>
                       <a:r>
-                        <a:rPr sz="800" b="1"/>
+                        <a:rPr sz="1000" b="1"/>
                         <a:t>Cohort</a:t>
                       </a:r>
                     </a:p>
@@ -14734,7 +15830,7 @@
                     <a:p>
                       <a:pPr algn="ctr"/>
                       <a:r>
-                        <a:rPr sz="800" b="1"/>
+                        <a:rPr sz="1000" b="1"/>
                         <a:t>Baseline</a:t>
                       </a:r>
                     </a:p>
@@ -14748,21 +15844,37 @@
                     <a:p>
                       <a:pPr algn="ctr"/>
                       <a:r>
-                        <a:rPr sz="800" b="1"/>
-                        <a:t>+AEC (FPCA+Ratio)</a:t>
-                      </a:r>
-                    </a:p>
-                  </a:txBody>
-                  <a:tcPr anchor="ctr"/>
-                </a:tc>
-                <a:tc>
-                  <a:txBody>
-                    <a:bodyPr/>
-                    <a:lstStyle/>
-                    <a:p>
-                      <a:pPr algn="ctr"/>
-                      <a:r>
-                        <a:rPr sz="800" b="1"/>
+                        <a:rPr sz="1000" b="1" dirty="0"/>
+                        <a:t>+AEC</a:t>
+                      </a:r>
+                      <a:endParaRPr lang="en-US" sz="1000" b="1" dirty="0"/>
+                    </a:p>
+                    <a:p>
+                      <a:pPr algn="ctr"/>
+                      <a:r>
+                        <a:rPr sz="1000" b="1" dirty="0"/>
+                        <a:t>(</a:t>
+                      </a:r>
+                      <a:r>
+                        <a:rPr sz="1000" b="1" dirty="0" err="1"/>
+                        <a:t>FPCA+Ratio</a:t>
+                      </a:r>
+                      <a:r>
+                        <a:rPr sz="1000" b="1" dirty="0"/>
+                        <a:t>)</a:t>
+                      </a:r>
+                    </a:p>
+                  </a:txBody>
+                  <a:tcPr anchor="ctr"/>
+                </a:tc>
+                <a:tc>
+                  <a:txBody>
+                    <a:bodyPr/>
+                    <a:lstStyle/>
+                    <a:p>
+                      <a:pPr algn="ctr"/>
+                      <a:r>
+                        <a:rPr sz="1000" b="1"/>
                         <a:t>+AEC (FPCA)</a:t>
                       </a:r>
                     </a:p>
@@ -14776,7 +15888,7 @@
                     <a:p>
                       <a:pPr algn="ctr"/>
                       <a:r>
-                        <a:rPr sz="800" b="1"/>
+                        <a:rPr sz="1000" b="1"/>
                         <a:t>+AEC (Ratio)</a:t>
                       </a:r>
                     </a:p>
@@ -14790,7 +15902,7 @@
                     <a:p>
                       <a:pPr algn="ctr"/>
                       <a:r>
-                        <a:rPr sz="800" b="1"/>
+                        <a:rPr sz="1000" b="1"/>
                         <a:t>+AEC +VAT</a:t>
                       </a:r>
                     </a:p>
@@ -14804,7 +15916,7 @@
                     <a:p>
                       <a:pPr algn="ctr"/>
                       <a:r>
-                        <a:rPr sz="800" b="1"/>
+                        <a:rPr sz="1000" b="1"/>
                         <a:t>+AEC +LAMA</a:t>
                       </a:r>
                     </a:p>
@@ -14818,7 +15930,7 @@
                     <a:p>
                       <a:pPr algn="ctr"/>
                       <a:r>
-                        <a:rPr sz="800" b="1"/>
+                        <a:rPr sz="1000" b="1"/>
                         <a:t>+AEC +NAMA</a:t>
                       </a:r>
                     </a:p>
@@ -14832,7 +15944,7 @@
                     <a:p>
                       <a:pPr algn="ctr"/>
                       <a:r>
-                        <a:rPr sz="800" b="1"/>
+                        <a:rPr sz="1000" b="1"/>
                         <a:t>+AEC +체성분</a:t>
                       </a:r>
                     </a:p>
@@ -14845,14 +15957,15 @@
                   </a:ext>
                 </a:extLst>
               </a:tr>
-              <a:tr h="330000">
-                <a:tc>
-                  <a:txBody>
-                    <a:bodyPr/>
-                    <a:lstStyle/>
-                    <a:p>
-                      <a:r>
-                        <a:rPr sz="800"/>
+              <a:tr h="478066">
+                <a:tc>
+                  <a:txBody>
+                    <a:bodyPr/>
+                    <a:lstStyle/>
+                    <a:p>
+                      <a:pPr algn="ctr"/>
+                      <a:r>
+                        <a:rPr sz="1000"/>
                         <a:t>HTN</a:t>
                       </a:r>
                     </a:p>
@@ -14864,8 +15977,9 @@
                     <a:bodyPr/>
                     <a:lstStyle/>
                     <a:p>
-                      <a:r>
-                        <a:rPr sz="800"/>
+                      <a:pPr algn="ctr"/>
+                      <a:r>
+                        <a:rPr sz="1000"/>
                         <a:t>Internal</a:t>
                       </a:r>
                     </a:p>
@@ -14879,7 +15993,7 @@
                     <a:p>
                       <a:pPr algn="ctr"/>
                       <a:r>
-                        <a:rPr sz="800"/>
+                        <a:rPr sz="1000"/>
                         <a:t>0.796±0.020</a:t>
                       </a:r>
                     </a:p>
@@ -14893,7 +16007,7 @@
                     <a:p>
                       <a:pPr algn="ctr"/>
                       <a:r>
-                        <a:rPr sz="800"/>
+                        <a:rPr sz="1000"/>
                         <a:t>0.804±0.033</a:t>
                       </a:r>
                     </a:p>
@@ -14907,7 +16021,7 @@
                     <a:p>
                       <a:pPr algn="ctr"/>
                       <a:r>
-                        <a:rPr sz="800"/>
+                        <a:rPr sz="1000"/>
                         <a:t>0.805±0.031</a:t>
                       </a:r>
                     </a:p>
@@ -14921,7 +16035,7 @@
                     <a:p>
                       <a:pPr algn="ctr"/>
                       <a:r>
-                        <a:rPr sz="800"/>
+                        <a:rPr sz="1000"/>
                         <a:t>0.800±0.028</a:t>
                       </a:r>
                     </a:p>
@@ -14935,7 +16049,7 @@
                     <a:p>
                       <a:pPr algn="ctr"/>
                       <a:r>
-                        <a:rPr sz="800"/>
+                        <a:rPr sz="1000"/>
                         <a:t>0.810±0.042</a:t>
                       </a:r>
                     </a:p>
@@ -14949,7 +16063,7 @@
                     <a:p>
                       <a:pPr algn="ctr"/>
                       <a:r>
-                        <a:rPr sz="800"/>
+                        <a:rPr sz="1000"/>
                         <a:t>0.808±0.029*</a:t>
                       </a:r>
                     </a:p>
@@ -14963,7 +16077,7 @@
                     <a:p>
                       <a:pPr algn="ctr"/>
                       <a:r>
-                        <a:rPr sz="800"/>
+                        <a:rPr sz="1000"/>
                         <a:t>0.811±0.032*</a:t>
                       </a:r>
                     </a:p>
@@ -14977,7 +16091,7 @@
                     <a:p>
                       <a:pPr algn="ctr"/>
                       <a:r>
-                        <a:rPr sz="800"/>
+                        <a:rPr sz="1000"/>
                         <a:t>0.811±0.036*</a:t>
                       </a:r>
                     </a:p>
@@ -14990,14 +16104,15 @@
                   </a:ext>
                 </a:extLst>
               </a:tr>
-              <a:tr h="330000">
-                <a:tc>
-                  <a:txBody>
-                    <a:bodyPr/>
-                    <a:lstStyle/>
-                    <a:p>
-                      <a:r>
-                        <a:rPr sz="800"/>
+              <a:tr h="478066">
+                <a:tc>
+                  <a:txBody>
+                    <a:bodyPr/>
+                    <a:lstStyle/>
+                    <a:p>
+                      <a:pPr algn="ctr"/>
+                      <a:r>
+                        <a:rPr sz="1000"/>
                         <a:t> </a:t>
                       </a:r>
                     </a:p>
@@ -15009,8 +16124,9 @@
                     <a:bodyPr/>
                     <a:lstStyle/>
                     <a:p>
-                      <a:r>
-                        <a:rPr sz="800"/>
+                      <a:pPr algn="ctr"/>
+                      <a:r>
+                        <a:rPr sz="1000"/>
                         <a:t>External</a:t>
                       </a:r>
                     </a:p>
@@ -15024,7 +16140,7 @@
                     <a:p>
                       <a:pPr algn="ctr"/>
                       <a:r>
-                        <a:rPr sz="800"/>
+                        <a:rPr sz="1000"/>
                         <a:t>0.718</a:t>
                       </a:r>
                     </a:p>
@@ -15038,7 +16154,7 @@
                     <a:p>
                       <a:pPr algn="ctr"/>
                       <a:r>
-                        <a:rPr sz="800"/>
+                        <a:rPr sz="1000"/>
                         <a:t>0.730*</a:t>
                       </a:r>
                     </a:p>
@@ -15052,7 +16168,7 @@
                     <a:p>
                       <a:pPr algn="ctr"/>
                       <a:r>
-                        <a:rPr sz="800"/>
+                        <a:rPr sz="1000"/>
                         <a:t>0.730*</a:t>
                       </a:r>
                     </a:p>
@@ -15066,7 +16182,7 @@
                     <a:p>
                       <a:pPr algn="ctr"/>
                       <a:r>
-                        <a:rPr sz="800"/>
+                        <a:rPr sz="1000"/>
                         <a:t>0.728</a:t>
                       </a:r>
                     </a:p>
@@ -15080,7 +16196,7 @@
                     <a:p>
                       <a:pPr algn="ctr"/>
                       <a:r>
-                        <a:rPr sz="800"/>
+                        <a:rPr sz="1000"/>
                         <a:t>0.735*</a:t>
                       </a:r>
                     </a:p>
@@ -15094,7 +16210,7 @@
                     <a:p>
                       <a:pPr algn="ctr"/>
                       <a:r>
-                        <a:rPr sz="800"/>
+                        <a:rPr sz="1000"/>
                         <a:t>0.743*</a:t>
                       </a:r>
                     </a:p>
@@ -15108,7 +16224,7 @@
                     <a:p>
                       <a:pPr algn="ctr"/>
                       <a:r>
-                        <a:rPr sz="800"/>
+                        <a:rPr sz="1000"/>
                         <a:t>0.732</a:t>
                       </a:r>
                     </a:p>
@@ -15122,7 +16238,7 @@
                     <a:p>
                       <a:pPr algn="ctr"/>
                       <a:r>
-                        <a:rPr sz="800"/>
+                        <a:rPr sz="1000"/>
                         <a:t>0.741*</a:t>
                       </a:r>
                     </a:p>
@@ -15135,14 +16251,15 @@
                   </a:ext>
                 </a:extLst>
               </a:tr>
-              <a:tr h="330000">
-                <a:tc>
-                  <a:txBody>
-                    <a:bodyPr/>
-                    <a:lstStyle/>
-                    <a:p>
-                      <a:r>
-                        <a:rPr sz="800"/>
+              <a:tr h="478066">
+                <a:tc>
+                  <a:txBody>
+                    <a:bodyPr/>
+                    <a:lstStyle/>
+                    <a:p>
+                      <a:pPr algn="ctr"/>
+                      <a:r>
+                        <a:rPr sz="1000"/>
                         <a:t>DM</a:t>
                       </a:r>
                     </a:p>
@@ -15154,8 +16271,9 @@
                     <a:bodyPr/>
                     <a:lstStyle/>
                     <a:p>
-                      <a:r>
-                        <a:rPr sz="800"/>
+                      <a:pPr algn="ctr"/>
+                      <a:r>
+                        <a:rPr sz="1000"/>
                         <a:t>Internal</a:t>
                       </a:r>
                     </a:p>
@@ -15169,7 +16287,7 @@
                     <a:p>
                       <a:pPr algn="ctr"/>
                       <a:r>
-                        <a:rPr sz="800"/>
+                        <a:rPr sz="1000"/>
                         <a:t>0.712±0.055</a:t>
                       </a:r>
                     </a:p>
@@ -15183,7 +16301,7 @@
                     <a:p>
                       <a:pPr algn="ctr"/>
                       <a:r>
-                        <a:rPr sz="800"/>
+                        <a:rPr sz="1000"/>
                         <a:t>0.733±0.051*</a:t>
                       </a:r>
                     </a:p>
@@ -15197,7 +16315,7 @@
                     <a:p>
                       <a:pPr algn="ctr"/>
                       <a:r>
-                        <a:rPr sz="800"/>
+                        <a:rPr sz="1000"/>
                         <a:t>0.732±0.054</a:t>
                       </a:r>
                     </a:p>
@@ -15211,7 +16329,7 @@
                     <a:p>
                       <a:pPr algn="ctr"/>
                       <a:r>
-                        <a:rPr sz="800"/>
+                        <a:rPr sz="1000"/>
                         <a:t>0.730±0.038</a:t>
                       </a:r>
                     </a:p>
@@ -15225,7 +16343,7 @@
                     <a:p>
                       <a:pPr algn="ctr"/>
                       <a:r>
-                        <a:rPr sz="800"/>
+                        <a:rPr sz="1000"/>
                         <a:t>0.732±0.048</a:t>
                       </a:r>
                     </a:p>
@@ -15239,7 +16357,7 @@
                     <a:p>
                       <a:pPr algn="ctr"/>
                       <a:r>
-                        <a:rPr sz="800"/>
+                        <a:rPr sz="1000"/>
                         <a:t>0.738±0.052*</a:t>
                       </a:r>
                     </a:p>
@@ -15253,7 +16371,7 @@
                     <a:p>
                       <a:pPr algn="ctr"/>
                       <a:r>
-                        <a:rPr sz="800"/>
+                        <a:rPr sz="1000"/>
                         <a:t>0.732±0.053</a:t>
                       </a:r>
                     </a:p>
@@ -15267,7 +16385,7 @@
                     <a:p>
                       <a:pPr algn="ctr"/>
                       <a:r>
-                        <a:rPr sz="800"/>
+                        <a:rPr sz="1000"/>
                         <a:t>0.736±0.044</a:t>
                       </a:r>
                     </a:p>
@@ -15280,14 +16398,15 @@
                   </a:ext>
                 </a:extLst>
               </a:tr>
-              <a:tr h="330000">
-                <a:tc>
-                  <a:txBody>
-                    <a:bodyPr/>
-                    <a:lstStyle/>
-                    <a:p>
-                      <a:r>
-                        <a:rPr sz="800"/>
+              <a:tr h="478066">
+                <a:tc>
+                  <a:txBody>
+                    <a:bodyPr/>
+                    <a:lstStyle/>
+                    <a:p>
+                      <a:pPr algn="ctr"/>
+                      <a:r>
+                        <a:rPr sz="1000"/>
                         <a:t> </a:t>
                       </a:r>
                     </a:p>
@@ -15299,8 +16418,9 @@
                     <a:bodyPr/>
                     <a:lstStyle/>
                     <a:p>
-                      <a:r>
-                        <a:rPr sz="800"/>
+                      <a:pPr algn="ctr"/>
+                      <a:r>
+                        <a:rPr sz="1000"/>
                         <a:t>External</a:t>
                       </a:r>
                     </a:p>
@@ -15314,7 +16434,7 @@
                     <a:p>
                       <a:pPr algn="ctr"/>
                       <a:r>
-                        <a:rPr sz="800"/>
+                        <a:rPr sz="1000"/>
                         <a:t>0.665</a:t>
                       </a:r>
                     </a:p>
@@ -15328,7 +16448,7 @@
                     <a:p>
                       <a:pPr algn="ctr"/>
                       <a:r>
-                        <a:rPr sz="800"/>
+                        <a:rPr sz="1000"/>
                         <a:t>0.679</a:t>
                       </a:r>
                     </a:p>
@@ -15342,7 +16462,7 @@
                     <a:p>
                       <a:pPr algn="ctr"/>
                       <a:r>
-                        <a:rPr sz="800"/>
+                        <a:rPr sz="1000"/>
                         <a:t>0.674</a:t>
                       </a:r>
                     </a:p>
@@ -15356,7 +16476,7 @@
                     <a:p>
                       <a:pPr algn="ctr"/>
                       <a:r>
-                        <a:rPr sz="800"/>
+                        <a:rPr sz="1000"/>
                         <a:t>0.665</a:t>
                       </a:r>
                     </a:p>
@@ -15370,7 +16490,7 @@
                     <a:p>
                       <a:pPr algn="ctr"/>
                       <a:r>
-                        <a:rPr sz="800"/>
+                        <a:rPr sz="1000"/>
                         <a:t>0.681</a:t>
                       </a:r>
                     </a:p>
@@ -15384,7 +16504,7 @@
                     <a:p>
                       <a:pPr algn="ctr"/>
                       <a:r>
-                        <a:rPr sz="800"/>
+                        <a:rPr sz="1000"/>
                         <a:t>0.683</a:t>
                       </a:r>
                     </a:p>
@@ -15398,7 +16518,7 @@
                     <a:p>
                       <a:pPr algn="ctr"/>
                       <a:r>
-                        <a:rPr sz="800"/>
+                        <a:rPr sz="1000"/>
                         <a:t>0.673</a:t>
                       </a:r>
                     </a:p>
@@ -15412,7 +16532,7 @@
                     <a:p>
                       <a:pPr algn="ctr"/>
                       <a:r>
-                        <a:rPr sz="800"/>
+                        <a:rPr sz="1000"/>
                         <a:t>0.706*</a:t>
                       </a:r>
                     </a:p>
@@ -15425,14 +16545,15 @@
                   </a:ext>
                 </a:extLst>
               </a:tr>
-              <a:tr h="330000">
-                <a:tc>
-                  <a:txBody>
-                    <a:bodyPr/>
-                    <a:lstStyle/>
-                    <a:p>
-                      <a:r>
-                        <a:rPr sz="800"/>
+              <a:tr h="478066">
+                <a:tc>
+                  <a:txBody>
+                    <a:bodyPr/>
+                    <a:lstStyle/>
+                    <a:p>
+                      <a:pPr algn="ctr"/>
+                      <a:r>
+                        <a:rPr sz="1000"/>
                         <a:t>CKD</a:t>
                       </a:r>
                     </a:p>
@@ -15444,8 +16565,9 @@
                     <a:bodyPr/>
                     <a:lstStyle/>
                     <a:p>
-                      <a:r>
-                        <a:rPr sz="800"/>
+                      <a:pPr algn="ctr"/>
+                      <a:r>
+                        <a:rPr sz="1000"/>
                         <a:t>Internal</a:t>
                       </a:r>
                     </a:p>
@@ -15459,7 +16581,7 @@
                     <a:p>
                       <a:pPr algn="ctr"/>
                       <a:r>
-                        <a:rPr sz="800"/>
+                        <a:rPr sz="1000"/>
                         <a:t>0.770±0.038</a:t>
                       </a:r>
                     </a:p>
@@ -15473,7 +16595,7 @@
                     <a:p>
                       <a:pPr algn="ctr"/>
                       <a:r>
-                        <a:rPr sz="800"/>
+                        <a:rPr sz="1000"/>
                         <a:t>0.774±0.035</a:t>
                       </a:r>
                     </a:p>
@@ -15487,7 +16609,7 @@
                     <a:p>
                       <a:pPr algn="ctr"/>
                       <a:r>
-                        <a:rPr sz="800"/>
+                        <a:rPr sz="1000"/>
                         <a:t>0.754±0.041</a:t>
                       </a:r>
                     </a:p>
@@ -15501,7 +16623,7 @@
                     <a:p>
                       <a:pPr algn="ctr"/>
                       <a:r>
-                        <a:rPr sz="800"/>
+                        <a:rPr sz="1000"/>
                         <a:t>0.776±0.035</a:t>
                       </a:r>
                     </a:p>
@@ -15515,7 +16637,7 @@
                     <a:p>
                       <a:pPr algn="ctr"/>
                       <a:r>
-                        <a:rPr sz="800"/>
+                        <a:rPr sz="1000"/>
                         <a:t>0.772±0.039</a:t>
                       </a:r>
                     </a:p>
@@ -15529,7 +16651,7 @@
                     <a:p>
                       <a:pPr algn="ctr"/>
                       <a:r>
-                        <a:rPr sz="800"/>
+                        <a:rPr sz="1000"/>
                         <a:t>0.793±0.032*</a:t>
                       </a:r>
                     </a:p>
@@ -15543,7 +16665,7 @@
                     <a:p>
                       <a:pPr algn="ctr"/>
                       <a:r>
-                        <a:rPr sz="800"/>
+                        <a:rPr sz="1000"/>
                         <a:t>0.783±0.037</a:t>
                       </a:r>
                     </a:p>
@@ -15557,7 +16679,7 @@
                     <a:p>
                       <a:pPr algn="ctr"/>
                       <a:r>
-                        <a:rPr sz="800"/>
+                        <a:rPr sz="1000"/>
                         <a:t>0.784±0.038</a:t>
                       </a:r>
                     </a:p>
@@ -15570,14 +16692,15 @@
                   </a:ext>
                 </a:extLst>
               </a:tr>
-              <a:tr h="330000">
-                <a:tc>
-                  <a:txBody>
-                    <a:bodyPr/>
-                    <a:lstStyle/>
-                    <a:p>
-                      <a:r>
-                        <a:rPr sz="800"/>
+              <a:tr h="478066">
+                <a:tc>
+                  <a:txBody>
+                    <a:bodyPr/>
+                    <a:lstStyle/>
+                    <a:p>
+                      <a:pPr algn="ctr"/>
+                      <a:r>
+                        <a:rPr sz="1000"/>
                         <a:t> </a:t>
                       </a:r>
                     </a:p>
@@ -15589,8 +16712,9 @@
                     <a:bodyPr/>
                     <a:lstStyle/>
                     <a:p>
-                      <a:r>
-                        <a:rPr sz="800"/>
+                      <a:pPr algn="ctr"/>
+                      <a:r>
+                        <a:rPr sz="1000" dirty="0"/>
                         <a:t>External</a:t>
                       </a:r>
                     </a:p>
@@ -15604,7 +16728,7 @@
                     <a:p>
                       <a:pPr algn="ctr"/>
                       <a:r>
-                        <a:rPr sz="800"/>
+                        <a:rPr sz="1000"/>
                         <a:t>0.615</a:t>
                       </a:r>
                     </a:p>
@@ -15618,7 +16742,7 @@
                     <a:p>
                       <a:pPr algn="ctr"/>
                       <a:r>
-                        <a:rPr sz="800"/>
+                        <a:rPr sz="1000"/>
                         <a:t>0.622</a:t>
                       </a:r>
                     </a:p>
@@ -15632,7 +16756,7 @@
                     <a:p>
                       <a:pPr algn="ctr"/>
                       <a:r>
-                        <a:rPr sz="800"/>
+                        <a:rPr sz="1000"/>
                         <a:t>0.643*</a:t>
                       </a:r>
                     </a:p>
@@ -15646,7 +16770,7 @@
                     <a:p>
                       <a:pPr algn="ctr"/>
                       <a:r>
-                        <a:rPr sz="800"/>
+                        <a:rPr sz="1000"/>
                         <a:t>0.633*</a:t>
                       </a:r>
                     </a:p>
@@ -15660,7 +16784,7 @@
                     <a:p>
                       <a:pPr algn="ctr"/>
                       <a:r>
-                        <a:rPr sz="800"/>
+                        <a:rPr sz="1000" dirty="0"/>
                         <a:t>0.638*</a:t>
                       </a:r>
                     </a:p>
@@ -15674,7 +16798,7 @@
                     <a:p>
                       <a:pPr algn="ctr"/>
                       <a:r>
-                        <a:rPr sz="800"/>
+                        <a:rPr sz="1000"/>
                         <a:t>0.669*</a:t>
                       </a:r>
                     </a:p>
@@ -15688,7 +16812,7 @@
                     <a:p>
                       <a:pPr algn="ctr"/>
                       <a:r>
-                        <a:rPr sz="800"/>
+                        <a:rPr sz="1000"/>
                         <a:t>0.646*</a:t>
                       </a:r>
                     </a:p>
@@ -15702,7 +16826,7 @@
                     <a:p>
                       <a:pPr algn="ctr"/>
                       <a:r>
-                        <a:rPr sz="800"/>
+                        <a:rPr sz="1000" dirty="0"/>
                         <a:t>0.681*</a:t>
                       </a:r>
                     </a:p>
@@ -15727,8 +16851,8 @@
 </p:sld>
 </file>
 
-<file path=ppt/slides/slide25.xml><?xml version="1.0" encoding="utf-8"?>
-<p:sld xmlns:a="http://schemas.openxmlformats.org/drawingml/2006/main" xmlns:p="http://schemas.openxmlformats.org/presentationml/2006/main" xmlns:r="http://schemas.openxmlformats.org/officeDocument/2006/relationships">
+<file path=ppt/slides/slide24.xml><?xml version="1.0" encoding="utf-8"?>
+<p:sld xmlns:a="http://schemas.openxmlformats.org/drawingml/2006/main" xmlns:r="http://schemas.openxmlformats.org/officeDocument/2006/relationships" xmlns:p="http://schemas.openxmlformats.org/presentationml/2006/main">
   <p:cSld>
     <p:spTree>
       <p:nvGrpSpPr>
@@ -15736,7 +16860,14 @@
         <p:cNvGrpSpPr/>
         <p:nvPr/>
       </p:nvGrpSpPr>
-      <p:grpSpPr/>
+      <p:grpSpPr>
+        <a:xfrm>
+          <a:off x="0" y="0"/>
+          <a:ext cx="0" cy="0"/>
+          <a:chOff x="0" y="0"/>
+          <a:chExt cx="0" cy="0"/>
+        </a:xfrm>
+      </p:grpSpPr>
       <p:sp>
         <p:nvSpPr>
           <p:cNvPr id="2" name="Title 1"/>
@@ -15783,7 +16914,6 @@
           <a:bodyPr/>
           <a:lstStyle/>
           <a:p>
-            <a:pPr/>
             <a:r>
               <a:rPr sz="1600" b="0">
                 <a:solidFill>
@@ -15835,6 +16965,7 @@
           <a:lstStyle/>
           <a:p>
             <a:pPr algn="ctr"/>
+            <a:endParaRPr/>
           </a:p>
         </p:txBody>
       </p:sp>
@@ -15874,7 +17005,7 @@
           </a:fontRef>
         </p:style>
         <p:txBody>
-          <a:bodyPr rtlCol="0" anchor="ctr" tIns="0" bIns="0"/>
+          <a:bodyPr tIns="0" bIns="0" rtlCol="0" anchor="ctr"/>
           <a:lstStyle/>
           <a:p>
             <a:pPr algn="ctr"/>
@@ -15913,7 +17044,7 @@
             <a:fld id="{9F4AF89A-28FA-47FA-B28F-9A9C6913CB7A}" type="slidenum">
               <a:rPr lang="ko-KR" altLang="en-US" smtClean="0"/>
               <a:pPr/>
-              <a:t>3</a:t>
+              <a:t>24</a:t>
             </a:fld>
             <a:endParaRPr lang="ko-KR" altLang="en-US" dirty="0"/>
           </a:p>
@@ -15925,11 +17056,17 @@
           <p:cNvGraphicFramePr>
             <a:graphicFrameLocks noGrp="1"/>
           </p:cNvGraphicFramePr>
-          <p:nvPr/>
+          <p:nvPr>
+            <p:extLst>
+              <p:ext uri="{D42A27DB-BD31-4B8C-83A1-F6EECF244321}">
+                <p14:modId xmlns:p14="http://schemas.microsoft.com/office/powerpoint/2010/main" val="1514947027"/>
+              </p:ext>
+            </p:extLst>
+          </p:nvPr>
         </p:nvGraphicFramePr>
         <p:xfrm>
-          <a:off x="512064" y="1655120"/>
-          <a:ext cx="9000000" cy="4400000"/>
+          <a:off x="1596000" y="2122259"/>
+          <a:ext cx="9000000" cy="3350000"/>
         </p:xfrm>
         <a:graphic>
           <a:graphicData uri="http://schemas.openxmlformats.org/drawingml/2006/table">
@@ -16566,7 +17703,7 @@
                     <a:p>
                       <a:pPr algn="ctr"/>
                       <a:r>
-                        <a:rPr sz="1100"/>
+                        <a:rPr sz="1100" dirty="0"/>
                         <a:t>0.359</a:t>
                       </a:r>
                     </a:p>
@@ -16591,8 +17728,8 @@
 </p:sld>
 </file>
 
-<file path=ppt/slides/slide26.xml><?xml version="1.0" encoding="utf-8"?>
-<p:sld xmlns:a="http://schemas.openxmlformats.org/drawingml/2006/main" xmlns:p="http://schemas.openxmlformats.org/presentationml/2006/main" xmlns:r="http://schemas.openxmlformats.org/officeDocument/2006/relationships">
+<file path=ppt/slides/slide25.xml><?xml version="1.0" encoding="utf-8"?>
+<p:sld xmlns:a="http://schemas.openxmlformats.org/drawingml/2006/main" xmlns:r="http://schemas.openxmlformats.org/officeDocument/2006/relationships" xmlns:p="http://schemas.openxmlformats.org/presentationml/2006/main">
   <p:cSld>
     <p:spTree>
       <p:nvGrpSpPr>
@@ -16600,7 +17737,14 @@
         <p:cNvGrpSpPr/>
         <p:nvPr/>
       </p:nvGrpSpPr>
-      <p:grpSpPr/>
+      <p:grpSpPr>
+        <a:xfrm>
+          <a:off x="0" y="0"/>
+          <a:ext cx="0" cy="0"/>
+          <a:chOff x="0" y="0"/>
+          <a:chExt cx="0" cy="0"/>
+        </a:xfrm>
+      </p:grpSpPr>
       <p:sp>
         <p:nvSpPr>
           <p:cNvPr id="2" name="Title 1"/>
@@ -16647,7 +17791,6 @@
           <a:bodyPr/>
           <a:lstStyle/>
           <a:p>
-            <a:pPr/>
             <a:r>
               <a:rPr sz="1600" b="0">
                 <a:solidFill>
@@ -16699,6 +17842,7 @@
           <a:lstStyle/>
           <a:p>
             <a:pPr algn="ctr"/>
+            <a:endParaRPr/>
           </a:p>
         </p:txBody>
       </p:sp>
@@ -16738,7 +17882,7 @@
           </a:fontRef>
         </p:style>
         <p:txBody>
-          <a:bodyPr rtlCol="0" anchor="ctr" tIns="0" bIns="0"/>
+          <a:bodyPr tIns="0" bIns="0" rtlCol="0" anchor="ctr"/>
           <a:lstStyle/>
           <a:p>
             <a:pPr algn="ctr"/>
@@ -16777,7 +17921,7 @@
             <a:fld id="{9F4AF89A-28FA-47FA-B28F-9A9C6913CB7A}" type="slidenum">
               <a:rPr lang="ko-KR" altLang="en-US" smtClean="0"/>
               <a:pPr/>
-              <a:t>3</a:t>
+              <a:t>25</a:t>
             </a:fld>
             <a:endParaRPr lang="ko-KR" altLang="en-US" dirty="0"/>
           </a:p>
@@ -16789,11 +17933,17 @@
           <p:cNvGraphicFramePr>
             <a:graphicFrameLocks noGrp="1"/>
           </p:cNvGraphicFramePr>
-          <p:nvPr/>
+          <p:nvPr>
+            <p:extLst>
+              <p:ext uri="{D42A27DB-BD31-4B8C-83A1-F6EECF244321}">
+                <p14:modId xmlns:p14="http://schemas.microsoft.com/office/powerpoint/2010/main" val="16397446"/>
+              </p:ext>
+            </p:extLst>
+          </p:nvPr>
         </p:nvGraphicFramePr>
         <p:xfrm>
-          <a:off x="512064" y="1655120"/>
-          <a:ext cx="2700000" cy="1500000"/>
+          <a:off x="4746000" y="1928559"/>
+          <a:ext cx="2700000" cy="1490000"/>
         </p:xfrm>
         <a:graphic>
           <a:graphicData uri="http://schemas.openxmlformats.org/drawingml/2006/table">
@@ -16975,7 +18125,7 @@
                     <a:p>
                       <a:pPr algn="ctr"/>
                       <a:r>
-                        <a:rPr sz="1000"/>
+                        <a:rPr sz="1000" dirty="0"/>
                         <a:t>1.820</a:t>
                       </a:r>
                     </a:p>
@@ -17000,8 +18150,8 @@
 </p:sld>
 </file>
 
-<file path=ppt/slides/slide27.xml><?xml version="1.0" encoding="utf-8"?>
-<p:sld xmlns:a="http://schemas.openxmlformats.org/drawingml/2006/main" xmlns:p="http://schemas.openxmlformats.org/presentationml/2006/main" xmlns:r="http://schemas.openxmlformats.org/officeDocument/2006/relationships">
+<file path=ppt/slides/slide26.xml><?xml version="1.0" encoding="utf-8"?>
+<p:sld xmlns:a="http://schemas.openxmlformats.org/drawingml/2006/main" xmlns:r="http://schemas.openxmlformats.org/officeDocument/2006/relationships" xmlns:p="http://schemas.openxmlformats.org/presentationml/2006/main">
   <p:cSld>
     <p:spTree>
       <p:nvGrpSpPr>
@@ -17009,7 +18159,14 @@
         <p:cNvGrpSpPr/>
         <p:nvPr/>
       </p:nvGrpSpPr>
-      <p:grpSpPr/>
+      <p:grpSpPr>
+        <a:xfrm>
+          <a:off x="0" y="0"/>
+          <a:ext cx="0" cy="0"/>
+          <a:chOff x="0" y="0"/>
+          <a:chExt cx="0" cy="0"/>
+        </a:xfrm>
+      </p:grpSpPr>
       <p:sp>
         <p:nvSpPr>
           <p:cNvPr id="2" name="Title 1"/>
@@ -17056,7 +18213,6 @@
           <a:bodyPr/>
           <a:lstStyle/>
           <a:p>
-            <a:pPr/>
             <a:r>
               <a:rPr sz="1600" b="0">
                 <a:solidFill>
@@ -17108,6 +18264,7 @@
           <a:lstStyle/>
           <a:p>
             <a:pPr algn="ctr"/>
+            <a:endParaRPr/>
           </a:p>
         </p:txBody>
       </p:sp>
@@ -17147,7 +18304,7 @@
           </a:fontRef>
         </p:style>
         <p:txBody>
-          <a:bodyPr rtlCol="0" anchor="ctr" tIns="0" bIns="0"/>
+          <a:bodyPr tIns="0" bIns="0" rtlCol="0" anchor="ctr"/>
           <a:lstStyle/>
           <a:p>
             <a:pPr algn="ctr"/>
@@ -17186,7 +18343,7 @@
             <a:fld id="{9F4AF89A-28FA-47FA-B28F-9A9C6913CB7A}" type="slidenum">
               <a:rPr lang="ko-KR" altLang="en-US" smtClean="0"/>
               <a:pPr/>
-              <a:t>3</a:t>
+              <a:t>26</a:t>
             </a:fld>
             <a:endParaRPr lang="ko-KR" altLang="en-US" dirty="0"/>
           </a:p>
@@ -18834,8 +19991,8 @@
 </p:sld>
 </file>
 
-<file path=ppt/slides/slide28.xml><?xml version="1.0" encoding="utf-8"?>
-<p:sld xmlns:a="http://schemas.openxmlformats.org/drawingml/2006/main" xmlns:p="http://schemas.openxmlformats.org/presentationml/2006/main" xmlns:r="http://schemas.openxmlformats.org/officeDocument/2006/relationships">
+<file path=ppt/slides/slide27.xml><?xml version="1.0" encoding="utf-8"?>
+<p:sld xmlns:a="http://schemas.openxmlformats.org/drawingml/2006/main" xmlns:r="http://schemas.openxmlformats.org/officeDocument/2006/relationships" xmlns:p="http://schemas.openxmlformats.org/presentationml/2006/main">
   <p:cSld>
     <p:spTree>
       <p:nvGrpSpPr>
@@ -18843,7 +20000,14 @@
         <p:cNvGrpSpPr/>
         <p:nvPr/>
       </p:nvGrpSpPr>
-      <p:grpSpPr/>
+      <p:grpSpPr>
+        <a:xfrm>
+          <a:off x="0" y="0"/>
+          <a:ext cx="0" cy="0"/>
+          <a:chOff x="0" y="0"/>
+          <a:chExt cx="0" cy="0"/>
+        </a:xfrm>
+      </p:grpSpPr>
       <p:sp>
         <p:nvSpPr>
           <p:cNvPr id="2" name="Title 1"/>
@@ -18890,7 +20054,6 @@
           <a:bodyPr/>
           <a:lstStyle/>
           <a:p>
-            <a:pPr/>
             <a:r>
               <a:rPr sz="1600" b="0">
                 <a:solidFill>
@@ -18942,6 +20105,7 @@
           <a:lstStyle/>
           <a:p>
             <a:pPr algn="ctr"/>
+            <a:endParaRPr/>
           </a:p>
         </p:txBody>
       </p:sp>
@@ -18981,7 +20145,7 @@
           </a:fontRef>
         </p:style>
         <p:txBody>
-          <a:bodyPr rtlCol="0" anchor="ctr" tIns="0" bIns="0"/>
+          <a:bodyPr tIns="0" bIns="0" rtlCol="0" anchor="ctr"/>
           <a:lstStyle/>
           <a:p>
             <a:pPr algn="ctr"/>
@@ -19020,7 +20184,7 @@
             <a:fld id="{9F4AF89A-28FA-47FA-B28F-9A9C6913CB7A}" type="slidenum">
               <a:rPr lang="ko-KR" altLang="en-US" smtClean="0"/>
               <a:pPr/>
-              <a:t>3</a:t>
+              <a:t>27</a:t>
             </a:fld>
             <a:endParaRPr lang="ko-KR" altLang="en-US" dirty="0"/>
           </a:p>
@@ -20668,8 +21832,8 @@
 </p:sld>
 </file>
 
-<file path=ppt/slides/slide29.xml><?xml version="1.0" encoding="utf-8"?>
-<p:sld xmlns:a="http://schemas.openxmlformats.org/drawingml/2006/main" xmlns:p="http://schemas.openxmlformats.org/presentationml/2006/main" xmlns:r="http://schemas.openxmlformats.org/officeDocument/2006/relationships">
+<file path=ppt/slides/slide28.xml><?xml version="1.0" encoding="utf-8"?>
+<p:sld xmlns:a="http://schemas.openxmlformats.org/drawingml/2006/main" xmlns:r="http://schemas.openxmlformats.org/officeDocument/2006/relationships" xmlns:p="http://schemas.openxmlformats.org/presentationml/2006/main">
   <p:cSld>
     <p:spTree>
       <p:nvGrpSpPr>
@@ -20677,7 +21841,14 @@
         <p:cNvGrpSpPr/>
         <p:nvPr/>
       </p:nvGrpSpPr>
-      <p:grpSpPr/>
+      <p:grpSpPr>
+        <a:xfrm>
+          <a:off x="0" y="0"/>
+          <a:ext cx="0" cy="0"/>
+          <a:chOff x="0" y="0"/>
+          <a:chExt cx="0" cy="0"/>
+        </a:xfrm>
+      </p:grpSpPr>
       <p:sp>
         <p:nvSpPr>
           <p:cNvPr id="2" name="Title 1"/>
@@ -20724,7 +21895,6 @@
           <a:bodyPr/>
           <a:lstStyle/>
           <a:p>
-            <a:pPr/>
             <a:r>
               <a:rPr sz="1600" b="0">
                 <a:solidFill>
@@ -20776,6 +21946,7 @@
           <a:lstStyle/>
           <a:p>
             <a:pPr algn="ctr"/>
+            <a:endParaRPr/>
           </a:p>
         </p:txBody>
       </p:sp>
@@ -20815,7 +21986,7 @@
           </a:fontRef>
         </p:style>
         <p:txBody>
-          <a:bodyPr rtlCol="0" anchor="ctr" tIns="0" bIns="0"/>
+          <a:bodyPr tIns="0" bIns="0" rtlCol="0" anchor="ctr"/>
           <a:lstStyle/>
           <a:p>
             <a:pPr algn="ctr"/>
@@ -20854,7 +22025,7 @@
             <a:fld id="{9F4AF89A-28FA-47FA-B28F-9A9C6913CB7A}" type="slidenum">
               <a:rPr lang="ko-KR" altLang="en-US" smtClean="0"/>
               <a:pPr/>
-              <a:t>3</a:t>
+              <a:t>28</a:t>
             </a:fld>
             <a:endParaRPr lang="ko-KR" altLang="en-US" dirty="0"/>
           </a:p>
@@ -22503,7 +23674,7 @@
 </file>
 
 <file path=ppt/slides/slide3.xml><?xml version="1.0" encoding="utf-8"?>
-<p:sld xmlns:a="http://schemas.openxmlformats.org/drawingml/2006/main" xmlns:p="http://schemas.openxmlformats.org/presentationml/2006/main" xmlns:r="http://schemas.openxmlformats.org/officeDocument/2006/relationships">
+<p:sld xmlns:a="http://schemas.openxmlformats.org/drawingml/2006/main" xmlns:r="http://schemas.openxmlformats.org/officeDocument/2006/relationships" xmlns:p="http://schemas.openxmlformats.org/presentationml/2006/main">
   <p:cSld>
     <p:spTree>
       <p:nvGrpSpPr>
@@ -22511,7 +23682,14 @@
         <p:cNvGrpSpPr/>
         <p:nvPr/>
       </p:nvGrpSpPr>
-      <p:grpSpPr/>
+      <p:grpSpPr>
+        <a:xfrm>
+          <a:off x="0" y="0"/>
+          <a:ext cx="0" cy="0"/>
+          <a:chOff x="0" y="0"/>
+          <a:chExt cx="0" cy="0"/>
+        </a:xfrm>
+      </p:grpSpPr>
       <p:sp>
         <p:nvSpPr>
           <p:cNvPr id="2" name="Title 1"/>
@@ -22558,7 +23736,6 @@
           <a:bodyPr/>
           <a:lstStyle/>
           <a:p>
-            <a:pPr/>
             <a:r>
               <a:rPr sz="1800" b="0">
                 <a:solidFill>
@@ -22577,7 +23754,6 @@
             </a:r>
           </a:p>
           <a:p>
-            <a:pPr/>
             <a:r>
               <a:rPr sz="1800" b="0">
                 <a:solidFill>
@@ -22588,7 +23764,6 @@
             </a:r>
           </a:p>
           <a:p>
-            <a:pPr/>
             <a:r>
               <a:rPr sz="1800" b="0">
                 <a:solidFill>
@@ -22640,6 +23815,7 @@
           <a:lstStyle/>
           <a:p>
             <a:pPr algn="ctr"/>
+            <a:endParaRPr/>
           </a:p>
         </p:txBody>
       </p:sp>
@@ -22679,7 +23855,7 @@
           </a:fontRef>
         </p:style>
         <p:txBody>
-          <a:bodyPr rtlCol="0" anchor="ctr" tIns="0" bIns="0"/>
+          <a:bodyPr tIns="0" bIns="0" rtlCol="0" anchor="ctr"/>
           <a:lstStyle/>
           <a:p>
             <a:pPr algn="ctr"/>
@@ -22757,7 +23933,7 @@
 </file>
 
 <file path=ppt/slides/slide4.xml><?xml version="1.0" encoding="utf-8"?>
-<p:sld xmlns:a="http://schemas.openxmlformats.org/drawingml/2006/main" xmlns:p="http://schemas.openxmlformats.org/presentationml/2006/main" xmlns:r="http://schemas.openxmlformats.org/officeDocument/2006/relationships">
+<p:sld xmlns:a="http://schemas.openxmlformats.org/drawingml/2006/main" xmlns:r="http://schemas.openxmlformats.org/officeDocument/2006/relationships" xmlns:p="http://schemas.openxmlformats.org/presentationml/2006/main">
   <p:cSld>
     <p:spTree>
       <p:nvGrpSpPr>
@@ -22765,7 +23941,14 @@
         <p:cNvGrpSpPr/>
         <p:nvPr/>
       </p:nvGrpSpPr>
-      <p:grpSpPr/>
+      <p:grpSpPr>
+        <a:xfrm>
+          <a:off x="0" y="0"/>
+          <a:ext cx="0" cy="0"/>
+          <a:chOff x="0" y="0"/>
+          <a:chExt cx="0" cy="0"/>
+        </a:xfrm>
+      </p:grpSpPr>
       <p:sp>
         <p:nvSpPr>
           <p:cNvPr id="2" name="Title 1"/>
@@ -22812,7 +23995,6 @@
           <a:bodyPr/>
           <a:lstStyle/>
           <a:p>
-            <a:pPr/>
             <a:r>
               <a:rPr sz="1800" b="0">
                 <a:solidFill>
@@ -22855,7 +24037,6 @@
             </a:r>
           </a:p>
           <a:p>
-            <a:pPr/>
             <a:r>
               <a:rPr sz="1800" b="0">
                 <a:solidFill>
@@ -22907,6 +24088,7 @@
           <a:lstStyle/>
           <a:p>
             <a:pPr algn="ctr"/>
+            <a:endParaRPr/>
           </a:p>
         </p:txBody>
       </p:sp>
@@ -22946,7 +24128,7 @@
           </a:fontRef>
         </p:style>
         <p:txBody>
-          <a:bodyPr rtlCol="0" anchor="ctr" tIns="0" bIns="0"/>
+          <a:bodyPr tIns="0" bIns="0" rtlCol="0" anchor="ctr"/>
           <a:lstStyle/>
           <a:p>
             <a:pPr algn="ctr"/>
@@ -22985,7 +24167,7 @@
             <a:fld id="{9F4AF89A-28FA-47FA-B28F-9A9C6913CB7A}" type="slidenum">
               <a:rPr lang="ko-KR" altLang="en-US" smtClean="0"/>
               <a:pPr/>
-              <a:t>3</a:t>
+              <a:t>4</a:t>
             </a:fld>
             <a:endParaRPr lang="ko-KR" altLang="en-US" dirty="0"/>
           </a:p>
@@ -23024,7 +24206,7 @@
 </file>
 
 <file path=ppt/slides/slide5.xml><?xml version="1.0" encoding="utf-8"?>
-<p:sld xmlns:a="http://schemas.openxmlformats.org/drawingml/2006/main" xmlns:p="http://schemas.openxmlformats.org/presentationml/2006/main" xmlns:r="http://schemas.openxmlformats.org/officeDocument/2006/relationships">
+<p:sld xmlns:a="http://schemas.openxmlformats.org/drawingml/2006/main" xmlns:r="http://schemas.openxmlformats.org/officeDocument/2006/relationships" xmlns:p="http://schemas.openxmlformats.org/presentationml/2006/main">
   <p:cSld>
     <p:spTree>
       <p:nvGrpSpPr>
@@ -23032,7 +24214,14 @@
         <p:cNvGrpSpPr/>
         <p:nvPr/>
       </p:nvGrpSpPr>
-      <p:grpSpPr/>
+      <p:grpSpPr>
+        <a:xfrm>
+          <a:off x="0" y="0"/>
+          <a:ext cx="0" cy="0"/>
+          <a:chOff x="0" y="0"/>
+          <a:chExt cx="0" cy="0"/>
+        </a:xfrm>
+      </p:grpSpPr>
       <p:sp>
         <p:nvSpPr>
           <p:cNvPr id="2" name="Title 1"/>
@@ -23079,7 +24268,6 @@
           <a:bodyPr/>
           <a:lstStyle/>
           <a:p>
-            <a:pPr/>
             <a:r>
               <a:rPr sz="1800" b="0">
                 <a:solidFill>
@@ -23098,7 +24286,6 @@
             </a:r>
           </a:p>
           <a:p>
-            <a:pPr/>
             <a:r>
               <a:rPr sz="1800" b="0">
                 <a:solidFill>
@@ -23166,6 +24353,7 @@
           <a:lstStyle/>
           <a:p>
             <a:pPr algn="ctr"/>
+            <a:endParaRPr/>
           </a:p>
         </p:txBody>
       </p:sp>
@@ -23205,7 +24393,7 @@
           </a:fontRef>
         </p:style>
         <p:txBody>
-          <a:bodyPr rtlCol="0" anchor="ctr" tIns="0" bIns="0"/>
+          <a:bodyPr tIns="0" bIns="0" rtlCol="0" anchor="ctr"/>
           <a:lstStyle/>
           <a:p>
             <a:pPr algn="ctr"/>
@@ -23244,7 +24432,7 @@
             <a:fld id="{9F4AF89A-28FA-47FA-B28F-9A9C6913CB7A}" type="slidenum">
               <a:rPr lang="ko-KR" altLang="en-US" smtClean="0"/>
               <a:pPr/>
-              <a:t>3</a:t>
+              <a:t>5</a:t>
             </a:fld>
             <a:endParaRPr lang="ko-KR" altLang="en-US" dirty="0"/>
           </a:p>
@@ -23283,7 +24471,7 @@
 </file>
 
 <file path=ppt/slides/slide6.xml><?xml version="1.0" encoding="utf-8"?>
-<p:sld xmlns:a="http://schemas.openxmlformats.org/drawingml/2006/main" xmlns:p="http://schemas.openxmlformats.org/presentationml/2006/main" xmlns:r="http://schemas.openxmlformats.org/officeDocument/2006/relationships">
+<p:sld xmlns:a="http://schemas.openxmlformats.org/drawingml/2006/main" xmlns:r="http://schemas.openxmlformats.org/officeDocument/2006/relationships" xmlns:p="http://schemas.openxmlformats.org/presentationml/2006/main">
   <p:cSld>
     <p:spTree>
       <p:nvGrpSpPr>
@@ -23291,7 +24479,14 @@
         <p:cNvGrpSpPr/>
         <p:nvPr/>
       </p:nvGrpSpPr>
-      <p:grpSpPr/>
+      <p:grpSpPr>
+        <a:xfrm>
+          <a:off x="0" y="0"/>
+          <a:ext cx="0" cy="0"/>
+          <a:chOff x="0" y="0"/>
+          <a:chExt cx="0" cy="0"/>
+        </a:xfrm>
+      </p:grpSpPr>
       <p:sp>
         <p:nvSpPr>
           <p:cNvPr id="2" name="Title 1"/>
@@ -23338,7 +24533,6 @@
           <a:bodyPr/>
           <a:lstStyle/>
           <a:p>
-            <a:pPr/>
             <a:r>
               <a:rPr sz="1800" b="0">
                 <a:solidFill>
@@ -23349,7 +24543,6 @@
             </a:r>
           </a:p>
           <a:p>
-            <a:pPr/>
             <a:r>
               <a:rPr sz="1800" b="0">
                 <a:solidFill>
@@ -23376,7 +24569,6 @@
             </a:r>
           </a:p>
           <a:p>
-            <a:pPr/>
             <a:r>
               <a:rPr sz="1800" b="0">
                 <a:solidFill>
@@ -23428,6 +24620,7 @@
           <a:lstStyle/>
           <a:p>
             <a:pPr algn="ctr"/>
+            <a:endParaRPr/>
           </a:p>
         </p:txBody>
       </p:sp>
@@ -23467,7 +24660,7 @@
           </a:fontRef>
         </p:style>
         <p:txBody>
-          <a:bodyPr rtlCol="0" anchor="ctr" tIns="0" bIns="0"/>
+          <a:bodyPr tIns="0" bIns="0" rtlCol="0" anchor="ctr"/>
           <a:lstStyle/>
           <a:p>
             <a:pPr algn="ctr"/>
@@ -23506,7 +24699,7 @@
             <a:fld id="{9F4AF89A-28FA-47FA-B28F-9A9C6913CB7A}" type="slidenum">
               <a:rPr lang="ko-KR" altLang="en-US" smtClean="0"/>
               <a:pPr/>
-              <a:t>3</a:t>
+              <a:t>6</a:t>
             </a:fld>
             <a:endParaRPr lang="ko-KR" altLang="en-US" dirty="0"/>
           </a:p>
@@ -23545,7 +24738,7 @@
 </file>
 
 <file path=ppt/slides/slide7.xml><?xml version="1.0" encoding="utf-8"?>
-<p:sld xmlns:a="http://schemas.openxmlformats.org/drawingml/2006/main" xmlns:p="http://schemas.openxmlformats.org/presentationml/2006/main" xmlns:r="http://schemas.openxmlformats.org/officeDocument/2006/relationships">
+<p:sld xmlns:a="http://schemas.openxmlformats.org/drawingml/2006/main" xmlns:r="http://schemas.openxmlformats.org/officeDocument/2006/relationships" xmlns:p="http://schemas.openxmlformats.org/presentationml/2006/main">
   <p:cSld>
     <p:spTree>
       <p:nvGrpSpPr>
@@ -23553,7 +24746,14 @@
         <p:cNvGrpSpPr/>
         <p:nvPr/>
       </p:nvGrpSpPr>
-      <p:grpSpPr/>
+      <p:grpSpPr>
+        <a:xfrm>
+          <a:off x="0" y="0"/>
+          <a:ext cx="0" cy="0"/>
+          <a:chOff x="0" y="0"/>
+          <a:chExt cx="0" cy="0"/>
+        </a:xfrm>
+      </p:grpSpPr>
       <p:sp>
         <p:nvSpPr>
           <p:cNvPr id="2" name="Title 1"/>
@@ -23600,7 +24800,6 @@
           <a:bodyPr/>
           <a:lstStyle/>
           <a:p>
-            <a:pPr/>
             <a:r>
               <a:rPr sz="1800" b="0">
                 <a:solidFill>
@@ -23643,7 +24842,6 @@
             </a:r>
           </a:p>
           <a:p>
-            <a:pPr/>
             <a:r>
               <a:rPr sz="1800" b="0">
                 <a:solidFill>
@@ -23662,7 +24860,6 @@
             </a:r>
           </a:p>
           <a:p>
-            <a:pPr/>
             <a:r>
               <a:rPr sz="1800" b="0">
                 <a:solidFill>
@@ -23714,6 +24911,7 @@
           <a:lstStyle/>
           <a:p>
             <a:pPr algn="ctr"/>
+            <a:endParaRPr/>
           </a:p>
         </p:txBody>
       </p:sp>
@@ -23753,7 +24951,7 @@
           </a:fontRef>
         </p:style>
         <p:txBody>
-          <a:bodyPr rtlCol="0" anchor="ctr" tIns="0" bIns="0"/>
+          <a:bodyPr tIns="0" bIns="0" rtlCol="0" anchor="ctr"/>
           <a:lstStyle/>
           <a:p>
             <a:pPr algn="ctr"/>
@@ -23792,7 +24990,7 @@
             <a:fld id="{9F4AF89A-28FA-47FA-B28F-9A9C6913CB7A}" type="slidenum">
               <a:rPr lang="ko-KR" altLang="en-US" smtClean="0"/>
               <a:pPr/>
-              <a:t>3</a:t>
+              <a:t>7</a:t>
             </a:fld>
             <a:endParaRPr lang="ko-KR" altLang="en-US" dirty="0"/>
           </a:p>
@@ -23831,7 +25029,7 @@
 </file>
 
 <file path=ppt/slides/slide8.xml><?xml version="1.0" encoding="utf-8"?>
-<p:sld xmlns:a="http://schemas.openxmlformats.org/drawingml/2006/main" xmlns:p="http://schemas.openxmlformats.org/presentationml/2006/main" xmlns:r="http://schemas.openxmlformats.org/officeDocument/2006/relationships">
+<p:sld xmlns:a="http://schemas.openxmlformats.org/drawingml/2006/main" xmlns:r="http://schemas.openxmlformats.org/officeDocument/2006/relationships" xmlns:p="http://schemas.openxmlformats.org/presentationml/2006/main">
   <p:cSld>
     <p:spTree>
       <p:nvGrpSpPr>
@@ -23839,7 +25037,14 @@
         <p:cNvGrpSpPr/>
         <p:nvPr/>
       </p:nvGrpSpPr>
-      <p:grpSpPr/>
+      <p:grpSpPr>
+        <a:xfrm>
+          <a:off x="0" y="0"/>
+          <a:ext cx="0" cy="0"/>
+          <a:chOff x="0" y="0"/>
+          <a:chExt cx="0" cy="0"/>
+        </a:xfrm>
+      </p:grpSpPr>
       <p:sp>
         <p:nvSpPr>
           <p:cNvPr id="2" name="Title 1"/>
@@ -23862,49 +25067,6 @@
                 </a:solidFill>
               </a:rPr>
               <a:t>Table 1. The Two Cohorts Differ in Case-Mix</a:t>
-            </a:r>
-          </a:p>
-        </p:txBody>
-      </p:sp>
-      <p:sp>
-        <p:nvSpPr>
-          <p:cNvPr id="3" name="Content Placeholder 2"/>
-          <p:cNvSpPr>
-            <a:spLocks noGrp="1"/>
-          </p:cNvSpPr>
-          <p:nvPr>
-            <p:ph idx="1"/>
-          </p:nvPr>
-        </p:nvSpPr>
-        <p:spPr>
-          <a:xfrm>
-            <a:off x="508000" y="1050000"/>
-            <a:ext cx="11176000" cy="850240"/>
-          </a:xfrm>
-        </p:spPr>
-        <p:txBody>
-          <a:bodyPr/>
-          <a:lstStyle/>
-          <a:p>
-            <a:pPr/>
-            <a:r>
-              <a:rPr sz="1600" b="0">
-                <a:solidFill>
-                  <a:srgbClr val="333F4D"/>
-                </a:solidFill>
-              </a:rPr>
-              <a:t>성별·연령·체성분·유병률이 모두 다름 (신촌: 남성·고령·유병률 높음)</a:t>
-            </a:r>
-          </a:p>
-          <a:p>
-            <a:pPr/>
-            <a:r>
-              <a:rPr sz="1600" b="0">
-                <a:solidFill>
-                  <a:srgbClr val="333F4D"/>
-                </a:solidFill>
-              </a:rPr>
-              <a:t>외부검증은 코호트 구성 차이를 감안해 해석</a:t>
             </a:r>
           </a:p>
         </p:txBody>
@@ -23949,6 +25111,7 @@
           <a:lstStyle/>
           <a:p>
             <a:pPr algn="ctr"/>
+            <a:endParaRPr/>
           </a:p>
         </p:txBody>
       </p:sp>
@@ -23988,7 +25151,7 @@
           </a:fontRef>
         </p:style>
         <p:txBody>
-          <a:bodyPr rtlCol="0" anchor="ctr" tIns="0" bIns="0"/>
+          <a:bodyPr tIns="0" bIns="0" rtlCol="0" anchor="ctr"/>
           <a:lstStyle/>
           <a:p>
             <a:pPr algn="ctr"/>
@@ -24027,7 +25190,7 @@
             <a:fld id="{9F4AF89A-28FA-47FA-B28F-9A9C6913CB7A}" type="slidenum">
               <a:rPr lang="ko-KR" altLang="en-US" smtClean="0"/>
               <a:pPr/>
-              <a:t>3</a:t>
+              <a:t>8</a:t>
             </a:fld>
             <a:endParaRPr lang="ko-KR" altLang="en-US" dirty="0"/>
           </a:p>
@@ -24042,14 +25205,14 @@
           <p:nvPr>
             <p:extLst>
               <p:ext uri="{D42A27DB-BD31-4B8C-83A1-F6EECF244321}">
-                <p14:modId xmlns:p14="http://schemas.microsoft.com/office/powerpoint/2010/main" val="1922671693"/>
+                <p14:modId xmlns:p14="http://schemas.microsoft.com/office/powerpoint/2010/main" val="1220433711"/>
               </p:ext>
             </p:extLst>
           </p:nvPr>
         </p:nvGraphicFramePr>
         <p:xfrm>
-          <a:off x="512064" y="1980240"/>
-          <a:ext cx="8228046" cy="4454000"/>
+          <a:off x="1981977" y="1321957"/>
+          <a:ext cx="8228046" cy="4866032"/>
         </p:xfrm>
         <a:graphic>
           <a:graphicData uri="http://schemas.openxmlformats.org/drawingml/2006/table">
@@ -24087,15 +25250,15 @@
                   </a:extLst>
                 </a:gridCol>
               </a:tblGrid>
-              <a:tr h="262000">
-                <a:tc>
-                  <a:txBody>
-                    <a:bodyPr/>
-                    <a:lstStyle/>
-                    <a:p>
-                      <a:pPr algn="ctr"/>
-                      <a:r>
-                        <a:rPr sz="1400" b="1" dirty="0"/>
+              <a:tr h="329431">
+                <a:tc>
+                  <a:txBody>
+                    <a:bodyPr/>
+                    <a:lstStyle/>
+                    <a:p>
+                      <a:pPr algn="ctr"/>
+                      <a:r>
+                        <a:rPr sz="1600" b="1" dirty="0"/>
                         <a:t>Characteristic</a:t>
                       </a:r>
                     </a:p>
@@ -24109,7 +25272,7 @@
                     <a:p>
                       <a:pPr algn="ctr"/>
                       <a:r>
-                        <a:rPr sz="1400" b="1" dirty="0"/>
+                        <a:rPr sz="1600" b="1" dirty="0"/>
                         <a:t>Gangnam</a:t>
                       </a:r>
                     </a:p>
@@ -24123,7 +25286,7 @@
                     <a:p>
                       <a:pPr algn="ctr"/>
                       <a:r>
-                        <a:rPr sz="1400" b="1"/>
+                        <a:rPr sz="1600" b="1"/>
                         <a:t>Sinchon</a:t>
                       </a:r>
                     </a:p>
@@ -24137,7 +25300,7 @@
                     <a:p>
                       <a:pPr algn="ctr"/>
                       <a:r>
-                        <a:rPr sz="1400" b="1"/>
+                        <a:rPr sz="1600" b="1"/>
                         <a:t>p-value</a:t>
                       </a:r>
                     </a:p>
@@ -24150,15 +25313,15 @@
                   </a:ext>
                 </a:extLst>
               </a:tr>
-              <a:tr h="262000">
-                <a:tc>
-                  <a:txBody>
-                    <a:bodyPr/>
-                    <a:lstStyle/>
-                    <a:p>
-                      <a:pPr algn="ctr"/>
-                      <a:r>
-                        <a:rPr sz="1100" dirty="0"/>
+              <a:tr h="283172">
+                <a:tc>
+                  <a:txBody>
+                    <a:bodyPr/>
+                    <a:lstStyle/>
+                    <a:p>
+                      <a:pPr algn="ctr"/>
+                      <a:r>
+                        <a:rPr sz="1200" dirty="0"/>
                         <a:t>n</a:t>
                       </a:r>
                     </a:p>
@@ -24172,7 +25335,7 @@
                     <a:p>
                       <a:pPr algn="ctr"/>
                       <a:r>
-                        <a:rPr sz="1100" dirty="0"/>
+                        <a:rPr sz="1200" dirty="0"/>
                         <a:t>1260</a:t>
                       </a:r>
                     </a:p>
@@ -24186,7 +25349,7 @@
                     <a:p>
                       <a:pPr algn="ctr"/>
                       <a:r>
-                        <a:rPr sz="1100"/>
+                        <a:rPr sz="1200"/>
                         <a:t>1123</a:t>
                       </a:r>
                     </a:p>
@@ -24200,7 +25363,7 @@
                     <a:p>
                       <a:pPr algn="ctr"/>
                       <a:r>
-                        <a:rPr sz="1100"/>
+                        <a:rPr sz="1200"/>
                         <a:t> </a:t>
                       </a:r>
                     </a:p>
@@ -24213,15 +25376,15 @@
                   </a:ext>
                 </a:extLst>
               </a:tr>
-              <a:tr h="262000">
-                <a:tc>
-                  <a:txBody>
-                    <a:bodyPr/>
-                    <a:lstStyle/>
-                    <a:p>
-                      <a:pPr algn="ctr"/>
-                      <a:r>
-                        <a:rPr sz="1100" dirty="0"/>
+              <a:tr h="283172">
+                <a:tc>
+                  <a:txBody>
+                    <a:bodyPr/>
+                    <a:lstStyle/>
+                    <a:p>
+                      <a:pPr algn="ctr"/>
+                      <a:r>
+                        <a:rPr sz="1200" dirty="0"/>
                         <a:t>Sex (Male), n (%)</a:t>
                       </a:r>
                     </a:p>
@@ -24235,7 +25398,7 @@
                     <a:p>
                       <a:pPr algn="ctr"/>
                       <a:r>
-                        <a:rPr sz="1100"/>
+                        <a:rPr sz="1200"/>
                         <a:t>475 (37.7%)</a:t>
                       </a:r>
                     </a:p>
@@ -24249,7 +25412,7 @@
                     <a:p>
                       <a:pPr algn="ctr"/>
                       <a:r>
-                        <a:rPr sz="1100" dirty="0"/>
+                        <a:rPr sz="1200" dirty="0"/>
                         <a:t>547 (48.7%)</a:t>
                       </a:r>
                     </a:p>
@@ -24263,7 +25426,7 @@
                     <a:p>
                       <a:pPr algn="ctr"/>
                       <a:r>
-                        <a:rPr sz="1100"/>
+                        <a:rPr sz="1200"/>
                         <a:t>&lt;0.001</a:t>
                       </a:r>
                     </a:p>
@@ -24276,15 +25439,15 @@
                   </a:ext>
                 </a:extLst>
               </a:tr>
-              <a:tr h="262000">
-                <a:tc>
-                  <a:txBody>
-                    <a:bodyPr/>
-                    <a:lstStyle/>
-                    <a:p>
-                      <a:pPr algn="ctr"/>
-                      <a:r>
-                        <a:rPr sz="1100" dirty="0"/>
+              <a:tr h="283172">
+                <a:tc>
+                  <a:txBody>
+                    <a:bodyPr/>
+                    <a:lstStyle/>
+                    <a:p>
+                      <a:pPr algn="ctr"/>
+                      <a:r>
+                        <a:rPr sz="1200" dirty="0"/>
                         <a:t>Age</a:t>
                       </a:r>
                     </a:p>
@@ -24298,7 +25461,7 @@
                     <a:p>
                       <a:pPr algn="ctr"/>
                       <a:r>
-                        <a:rPr sz="1100"/>
+                        <a:rPr sz="1200"/>
                         <a:t>57.3 ± 12.1</a:t>
                       </a:r>
                     </a:p>
@@ -24312,7 +25475,7 @@
                     <a:p>
                       <a:pPr algn="ctr"/>
                       <a:r>
-                        <a:rPr sz="1100" dirty="0"/>
+                        <a:rPr sz="1200" dirty="0"/>
                         <a:t>59.7 ± 12.3</a:t>
                       </a:r>
                     </a:p>
@@ -24326,7 +25489,7 @@
                     <a:p>
                       <a:pPr algn="ctr"/>
                       <a:r>
-                        <a:rPr sz="1100"/>
+                        <a:rPr sz="1200"/>
                         <a:t>&lt;0.001</a:t>
                       </a:r>
                     </a:p>
@@ -24339,15 +25502,15 @@
                   </a:ext>
                 </a:extLst>
               </a:tr>
-              <a:tr h="262000">
-                <a:tc>
-                  <a:txBody>
-                    <a:bodyPr/>
-                    <a:lstStyle/>
-                    <a:p>
-                      <a:pPr algn="ctr"/>
-                      <a:r>
-                        <a:rPr sz="1100" dirty="0"/>
+              <a:tr h="283172">
+                <a:tc>
+                  <a:txBody>
+                    <a:bodyPr/>
+                    <a:lstStyle/>
+                    <a:p>
+                      <a:pPr algn="ctr"/>
+                      <a:r>
+                        <a:rPr sz="1200" dirty="0"/>
                         <a:t>Height</a:t>
                       </a:r>
                     </a:p>
@@ -24361,7 +25524,7 @@
                     <a:p>
                       <a:pPr algn="ctr"/>
                       <a:r>
-                        <a:rPr sz="1100" dirty="0"/>
+                        <a:rPr sz="1200" dirty="0"/>
                         <a:t>162.8 ± 8.0</a:t>
                       </a:r>
                     </a:p>
@@ -24375,7 +25538,7 @@
                     <a:p>
                       <a:pPr algn="ctr"/>
                       <a:r>
-                        <a:rPr sz="1100"/>
+                        <a:rPr sz="1200"/>
                         <a:t>163.7 ± 8.3</a:t>
                       </a:r>
                     </a:p>
@@ -24389,7 +25552,7 @@
                     <a:p>
                       <a:pPr algn="ctr"/>
                       <a:r>
-                        <a:rPr sz="1100"/>
+                        <a:rPr sz="1200"/>
                         <a:t>0.018</a:t>
                       </a:r>
                     </a:p>
@@ -24402,15 +25565,15 @@
                   </a:ext>
                 </a:extLst>
               </a:tr>
-              <a:tr h="262000">
-                <a:tc>
-                  <a:txBody>
-                    <a:bodyPr/>
-                    <a:lstStyle/>
-                    <a:p>
-                      <a:pPr algn="ctr"/>
-                      <a:r>
-                        <a:rPr sz="1100" dirty="0"/>
+              <a:tr h="283172">
+                <a:tc>
+                  <a:txBody>
+                    <a:bodyPr/>
+                    <a:lstStyle/>
+                    <a:p>
+                      <a:pPr algn="ctr"/>
+                      <a:r>
+                        <a:rPr sz="1200" dirty="0"/>
                         <a:t>Weight</a:t>
                       </a:r>
                     </a:p>
@@ -24424,7 +25587,7 @@
                     <a:p>
                       <a:pPr algn="ctr"/>
                       <a:r>
-                        <a:rPr sz="1100"/>
+                        <a:rPr sz="1200"/>
                         <a:t>62.0 ± 10.1</a:t>
                       </a:r>
                     </a:p>
@@ -24438,7 +25601,7 @@
                     <a:p>
                       <a:pPr algn="ctr"/>
                       <a:r>
-                        <a:rPr sz="1100" dirty="0"/>
+                        <a:rPr sz="1200" dirty="0"/>
                         <a:t>62.4 ± 10.1</a:t>
                       </a:r>
                     </a:p>
@@ -24452,7 +25615,7 @@
                     <a:p>
                       <a:pPr algn="ctr"/>
                       <a:r>
-                        <a:rPr sz="1100"/>
+                        <a:rPr sz="1200"/>
                         <a:t>0.359</a:t>
                       </a:r>
                     </a:p>
@@ -24465,15 +25628,15 @@
                   </a:ext>
                 </a:extLst>
               </a:tr>
-              <a:tr h="262000">
-                <a:tc>
-                  <a:txBody>
-                    <a:bodyPr/>
-                    <a:lstStyle/>
-                    <a:p>
-                      <a:pPr algn="ctr"/>
-                      <a:r>
-                        <a:rPr sz="1100" dirty="0"/>
+              <a:tr h="283172">
+                <a:tc>
+                  <a:txBody>
+                    <a:bodyPr/>
+                    <a:lstStyle/>
+                    <a:p>
+                      <a:pPr algn="ctr"/>
+                      <a:r>
+                        <a:rPr sz="1200" dirty="0"/>
                         <a:t>BMI</a:t>
                       </a:r>
                     </a:p>
@@ -24487,7 +25650,7 @@
                     <a:p>
                       <a:pPr algn="ctr"/>
                       <a:r>
-                        <a:rPr sz="1100" dirty="0"/>
+                        <a:rPr sz="1200" dirty="0"/>
                         <a:t>23.3 ± 2.9</a:t>
                       </a:r>
                     </a:p>
@@ -24501,7 +25664,7 @@
                     <a:p>
                       <a:pPr algn="ctr"/>
                       <a:r>
-                        <a:rPr sz="1100"/>
+                        <a:rPr sz="1200"/>
                         <a:t>23.2 ± 2.9</a:t>
                       </a:r>
                     </a:p>
@@ -24515,7 +25678,7 @@
                     <a:p>
                       <a:pPr algn="ctr"/>
                       <a:r>
-                        <a:rPr sz="1100"/>
+                        <a:rPr sz="1200"/>
                         <a:t>0.322</a:t>
                       </a:r>
                     </a:p>
@@ -24528,15 +25691,15 @@
                   </a:ext>
                 </a:extLst>
               </a:tr>
-              <a:tr h="262000">
-                <a:tc>
-                  <a:txBody>
-                    <a:bodyPr/>
-                    <a:lstStyle/>
-                    <a:p>
-                      <a:pPr algn="ctr"/>
-                      <a:r>
-                        <a:rPr sz="1100" dirty="0"/>
+              <a:tr h="283172">
+                <a:tc>
+                  <a:txBody>
+                    <a:bodyPr/>
+                    <a:lstStyle/>
+                    <a:p>
+                      <a:pPr algn="ctr"/>
+                      <a:r>
+                        <a:rPr sz="1200" dirty="0"/>
                         <a:t>SMI</a:t>
                       </a:r>
                     </a:p>
@@ -24550,7 +25713,7 @@
                     <a:p>
                       <a:pPr algn="ctr"/>
                       <a:r>
-                        <a:rPr sz="1100"/>
+                        <a:rPr sz="1200"/>
                         <a:t>6873.5 ± 1562.8</a:t>
                       </a:r>
                     </a:p>
@@ -24564,7 +25727,7 @@
                     <a:p>
                       <a:pPr algn="ctr"/>
                       <a:r>
-                        <a:rPr sz="1100"/>
+                        <a:rPr sz="1200"/>
                         <a:t>6661.3 ± 1639.9</a:t>
                       </a:r>
                     </a:p>
@@ -24578,7 +25741,7 @@
                     <a:p>
                       <a:pPr algn="ctr"/>
                       <a:r>
-                        <a:rPr sz="1100"/>
+                        <a:rPr sz="1200"/>
                         <a:t>0.108</a:t>
                       </a:r>
                     </a:p>
@@ -24591,15 +25754,15 @@
                   </a:ext>
                 </a:extLst>
               </a:tr>
-              <a:tr h="262000">
-                <a:tc>
-                  <a:txBody>
-                    <a:bodyPr/>
-                    <a:lstStyle/>
-                    <a:p>
-                      <a:pPr algn="ctr"/>
-                      <a:r>
-                        <a:rPr sz="1100" dirty="0"/>
+              <a:tr h="283172">
+                <a:tc>
+                  <a:txBody>
+                    <a:bodyPr/>
+                    <a:lstStyle/>
+                    <a:p>
+                      <a:pPr algn="ctr"/>
+                      <a:r>
+                        <a:rPr sz="1200" dirty="0"/>
                         <a:t>VAT</a:t>
                       </a:r>
                     </a:p>
@@ -24613,7 +25776,7 @@
                     <a:p>
                       <a:pPr algn="ctr"/>
                       <a:r>
-                        <a:rPr sz="1100"/>
+                        <a:rPr sz="1200"/>
                         <a:t>8486.2 ± 5165.1</a:t>
                       </a:r>
                     </a:p>
@@ -24627,7 +25790,7 @@
                     <a:p>
                       <a:pPr algn="ctr"/>
                       <a:r>
-                        <a:rPr sz="1100" dirty="0"/>
+                        <a:rPr sz="1200" dirty="0"/>
                         <a:t>9096.4 ± 5280.4</a:t>
                       </a:r>
                     </a:p>
@@ -24641,7 +25804,7 @@
                     <a:p>
                       <a:pPr algn="ctr"/>
                       <a:r>
-                        <a:rPr sz="1100"/>
+                        <a:rPr sz="1200"/>
                         <a:t>0.002</a:t>
                       </a:r>
                     </a:p>
@@ -24654,15 +25817,15 @@
                   </a:ext>
                 </a:extLst>
               </a:tr>
-              <a:tr h="262000">
-                <a:tc>
-                  <a:txBody>
-                    <a:bodyPr/>
-                    <a:lstStyle/>
-                    <a:p>
-                      <a:pPr algn="ctr"/>
-                      <a:r>
-                        <a:rPr sz="1100"/>
+              <a:tr h="283172">
+                <a:tc>
+                  <a:txBody>
+                    <a:bodyPr/>
+                    <a:lstStyle/>
+                    <a:p>
+                      <a:pPr algn="ctr"/>
+                      <a:r>
+                        <a:rPr sz="1200"/>
                         <a:t>SAT</a:t>
                       </a:r>
                     </a:p>
@@ -24676,7 +25839,7 @@
                     <a:p>
                       <a:pPr algn="ctr"/>
                       <a:r>
-                        <a:rPr sz="1100"/>
+                        <a:rPr sz="1200"/>
                         <a:t>19243.6 ± 7914.4</a:t>
                       </a:r>
                     </a:p>
@@ -24690,7 +25853,7 @@
                     <a:p>
                       <a:pPr algn="ctr"/>
                       <a:r>
-                        <a:rPr sz="1100"/>
+                        <a:rPr sz="1200"/>
                         <a:t>17914.4 ± 8631.1</a:t>
                       </a:r>
                     </a:p>
@@ -24704,7 +25867,7 @@
                     <a:p>
                       <a:pPr algn="ctr"/>
                       <a:r>
-                        <a:rPr sz="1100"/>
+                        <a:rPr sz="1200"/>
                         <a:t>&lt;0.001</a:t>
                       </a:r>
                     </a:p>
@@ -24717,15 +25880,15 @@
                   </a:ext>
                 </a:extLst>
               </a:tr>
-              <a:tr h="262000">
-                <a:tc>
-                  <a:txBody>
-                    <a:bodyPr/>
-                    <a:lstStyle/>
-                    <a:p>
-                      <a:pPr algn="ctr"/>
-                      <a:r>
-                        <a:rPr sz="1100"/>
+              <a:tr h="283172">
+                <a:tc>
+                  <a:txBody>
+                    <a:bodyPr/>
+                    <a:lstStyle/>
+                    <a:p>
+                      <a:pPr algn="ctr"/>
+                      <a:r>
+                        <a:rPr sz="1200"/>
                         <a:t>IMATA</a:t>
                       </a:r>
                     </a:p>
@@ -24739,7 +25902,7 @@
                     <a:p>
                       <a:pPr algn="ctr"/>
                       <a:r>
-                        <a:rPr sz="1100"/>
+                        <a:rPr sz="1200"/>
                         <a:t>1175.5 ± 576.0</a:t>
                       </a:r>
                     </a:p>
@@ -24753,7 +25916,7 @@
                     <a:p>
                       <a:pPr algn="ctr"/>
                       <a:r>
-                        <a:rPr sz="1100" dirty="0"/>
+                        <a:rPr sz="1200" dirty="0"/>
                         <a:t>1224.9 ± 617.6</a:t>
                       </a:r>
                     </a:p>
@@ -24767,7 +25930,7 @@
                     <a:p>
                       <a:pPr algn="ctr"/>
                       <a:r>
-                        <a:rPr sz="1100"/>
+                        <a:rPr sz="1200"/>
                         <a:t>0.019</a:t>
                       </a:r>
                     </a:p>
@@ -24780,15 +25943,15 @@
                   </a:ext>
                 </a:extLst>
               </a:tr>
-              <a:tr h="262000">
-                <a:tc>
-                  <a:txBody>
-                    <a:bodyPr/>
-                    <a:lstStyle/>
-                    <a:p>
-                      <a:pPr algn="ctr"/>
-                      <a:r>
-                        <a:rPr sz="1100" dirty="0"/>
+              <a:tr h="283172">
+                <a:tc>
+                  <a:txBody>
+                    <a:bodyPr/>
+                    <a:lstStyle/>
+                    <a:p>
+                      <a:pPr algn="ctr"/>
+                      <a:r>
+                        <a:rPr sz="1200" dirty="0"/>
                         <a:t>NAMA</a:t>
                       </a:r>
                     </a:p>
@@ -24802,7 +25965,7 @@
                     <a:p>
                       <a:pPr algn="ctr"/>
                       <a:r>
-                        <a:rPr sz="1100"/>
+                        <a:rPr sz="1200"/>
                         <a:t>14279.5 ± 4408.5</a:t>
                       </a:r>
                     </a:p>
@@ -24816,7 +25979,7 @@
                     <a:p>
                       <a:pPr algn="ctr"/>
                       <a:r>
-                        <a:rPr sz="1100"/>
+                        <a:rPr sz="1200"/>
                         <a:t>12931.5 ± 4709.8</a:t>
                       </a:r>
                     </a:p>
@@ -24830,7 +25993,7 @@
                     <a:p>
                       <a:pPr algn="ctr"/>
                       <a:r>
-                        <a:rPr sz="1100"/>
+                        <a:rPr sz="1200"/>
                         <a:t>&lt;0.001</a:t>
                       </a:r>
                     </a:p>
@@ -24843,15 +26006,15 @@
                   </a:ext>
                 </a:extLst>
               </a:tr>
-              <a:tr h="262000">
-                <a:tc>
-                  <a:txBody>
-                    <a:bodyPr/>
-                    <a:lstStyle/>
-                    <a:p>
-                      <a:pPr algn="ctr"/>
-                      <a:r>
-                        <a:rPr sz="1100" dirty="0"/>
+              <a:tr h="283172">
+                <a:tc>
+                  <a:txBody>
+                    <a:bodyPr/>
+                    <a:lstStyle/>
+                    <a:p>
+                      <a:pPr algn="ctr"/>
+                      <a:r>
+                        <a:rPr sz="1200" dirty="0"/>
                         <a:t>LAMA</a:t>
                       </a:r>
                     </a:p>
@@ -24865,7 +26028,7 @@
                     <a:p>
                       <a:pPr algn="ctr"/>
                       <a:r>
-                        <a:rPr sz="1100"/>
+                        <a:rPr sz="1200"/>
                         <a:t>4127.4 ± 1962.2</a:t>
                       </a:r>
                     </a:p>
@@ -24879,7 +26042,7 @@
                     <a:p>
                       <a:pPr algn="ctr"/>
                       <a:r>
-                        <a:rPr sz="1100" dirty="0"/>
+                        <a:rPr sz="1200" dirty="0"/>
                         <a:t>5093.2 ± 2123.8</a:t>
                       </a:r>
                     </a:p>
@@ -24893,7 +26056,7 @@
                     <a:p>
                       <a:pPr algn="ctr"/>
                       <a:r>
-                        <a:rPr sz="1100"/>
+                        <a:rPr sz="1200"/>
                         <a:t>&lt;0.001</a:t>
                       </a:r>
                     </a:p>
@@ -24906,15 +26069,15 @@
                   </a:ext>
                 </a:extLst>
               </a:tr>
-              <a:tr h="262000">
-                <a:tc>
-                  <a:txBody>
-                    <a:bodyPr/>
-                    <a:lstStyle/>
-                    <a:p>
-                      <a:pPr algn="ctr"/>
-                      <a:r>
-                        <a:rPr sz="1100" dirty="0"/>
+              <a:tr h="283172">
+                <a:tc>
+                  <a:txBody>
+                    <a:bodyPr/>
+                    <a:lstStyle/>
+                    <a:p>
+                      <a:pPr algn="ctr"/>
+                      <a:r>
+                        <a:rPr sz="1200" dirty="0"/>
                         <a:t>TAMA</a:t>
                       </a:r>
                     </a:p>
@@ -24928,7 +26091,7 @@
                     <a:p>
                       <a:pPr algn="ctr"/>
                       <a:r>
-                        <a:rPr sz="1100"/>
+                        <a:rPr sz="1200"/>
                         <a:t>18406.9 ± 5171.0</a:t>
                       </a:r>
                     </a:p>
@@ -24942,7 +26105,7 @@
                     <a:p>
                       <a:pPr algn="ctr"/>
                       <a:r>
-                        <a:rPr sz="1100" dirty="0"/>
+                        <a:rPr sz="1200" dirty="0"/>
                         <a:t>18024.7 ± 5311.8</a:t>
                       </a:r>
                     </a:p>
@@ -24956,7 +26119,7 @@
                     <a:p>
                       <a:pPr algn="ctr"/>
                       <a:r>
-                        <a:rPr sz="1100"/>
+                        <a:rPr sz="1200"/>
                         <a:t>0.378</a:t>
                       </a:r>
                     </a:p>
@@ -24969,15 +26132,15 @@
                   </a:ext>
                 </a:extLst>
               </a:tr>
-              <a:tr h="262000">
-                <a:tc>
-                  <a:txBody>
-                    <a:bodyPr/>
-                    <a:lstStyle/>
-                    <a:p>
-                      <a:pPr algn="ctr"/>
-                      <a:r>
-                        <a:rPr sz="1100" dirty="0"/>
+              <a:tr h="283172">
+                <a:tc>
+                  <a:txBody>
+                    <a:bodyPr/>
+                    <a:lstStyle/>
+                    <a:p>
+                      <a:pPr algn="ctr"/>
+                      <a:r>
+                        <a:rPr sz="1200" dirty="0"/>
                         <a:t>HTN, n (%)</a:t>
                       </a:r>
                     </a:p>
@@ -24991,7 +26154,7 @@
                     <a:p>
                       <a:pPr algn="ctr"/>
                       <a:r>
-                        <a:rPr sz="1100"/>
+                        <a:rPr sz="1200"/>
                         <a:t>386 (30.6%)</a:t>
                       </a:r>
                     </a:p>
@@ -25005,7 +26168,7 @@
                     <a:p>
                       <a:pPr algn="ctr"/>
                       <a:r>
-                        <a:rPr sz="1100" dirty="0"/>
+                        <a:rPr sz="1200" dirty="0"/>
                         <a:t>507 (45.1%)</a:t>
                       </a:r>
                     </a:p>
@@ -25019,7 +26182,7 @@
                     <a:p>
                       <a:pPr algn="ctr"/>
                       <a:r>
-                        <a:rPr sz="1100"/>
+                        <a:rPr sz="1200"/>
                         <a:t>&lt;0.001</a:t>
                       </a:r>
                     </a:p>
@@ -25032,15 +26195,15 @@
                   </a:ext>
                 </a:extLst>
               </a:tr>
-              <a:tr h="262000">
-                <a:tc>
-                  <a:txBody>
-                    <a:bodyPr/>
-                    <a:lstStyle/>
-                    <a:p>
-                      <a:pPr algn="ctr"/>
-                      <a:r>
-                        <a:rPr sz="1100" dirty="0"/>
+              <a:tr h="283172">
+                <a:tc>
+                  <a:txBody>
+                    <a:bodyPr/>
+                    <a:lstStyle/>
+                    <a:p>
+                      <a:pPr algn="ctr"/>
+                      <a:r>
+                        <a:rPr sz="1200" dirty="0"/>
                         <a:t>DM, n (%)</a:t>
                       </a:r>
                     </a:p>
@@ -25054,7 +26217,7 @@
                     <a:p>
                       <a:pPr algn="ctr"/>
                       <a:r>
-                        <a:rPr sz="1100"/>
+                        <a:rPr sz="1200"/>
                         <a:t>233 (18.5%)</a:t>
                       </a:r>
                     </a:p>
@@ -25068,7 +26231,7 @@
                     <a:p>
                       <a:pPr algn="ctr"/>
                       <a:r>
-                        <a:rPr sz="1100" dirty="0"/>
+                        <a:rPr sz="1200" dirty="0"/>
                         <a:t>335 (29.8%)</a:t>
                       </a:r>
                     </a:p>
@@ -25082,7 +26245,7 @@
                     <a:p>
                       <a:pPr algn="ctr"/>
                       <a:r>
-                        <a:rPr sz="1100"/>
+                        <a:rPr sz="1200"/>
                         <a:t>&lt;0.001</a:t>
                       </a:r>
                     </a:p>
@@ -25095,15 +26258,15 @@
                   </a:ext>
                 </a:extLst>
               </a:tr>
-              <a:tr h="262000">
-                <a:tc>
-                  <a:txBody>
-                    <a:bodyPr/>
-                    <a:lstStyle/>
-                    <a:p>
-                      <a:pPr algn="ctr"/>
-                      <a:r>
-                        <a:rPr sz="1100" dirty="0"/>
+              <a:tr h="283172">
+                <a:tc>
+                  <a:txBody>
+                    <a:bodyPr/>
+                    <a:lstStyle/>
+                    <a:p>
+                      <a:pPr algn="ctr"/>
+                      <a:r>
+                        <a:rPr sz="1200" dirty="0"/>
                         <a:t>CKD, n (%)</a:t>
                       </a:r>
                     </a:p>
@@ -25117,7 +26280,7 @@
                     <a:p>
                       <a:pPr algn="ctr"/>
                       <a:r>
-                        <a:rPr sz="1100"/>
+                        <a:rPr sz="1200"/>
                         <a:t>105 (8.3%)</a:t>
                       </a:r>
                     </a:p>
@@ -25131,7 +26294,7 @@
                     <a:p>
                       <a:pPr algn="ctr"/>
                       <a:r>
-                        <a:rPr sz="1100" dirty="0"/>
+                        <a:rPr sz="1200" dirty="0"/>
                         <a:t>188 (16.7%)</a:t>
                       </a:r>
                     </a:p>
@@ -25145,7 +26308,7 @@
                     <a:p>
                       <a:pPr algn="ctr"/>
                       <a:r>
-                        <a:rPr sz="1100" dirty="0"/>
+                        <a:rPr sz="1200" dirty="0"/>
                         <a:t>&lt;0.001</a:t>
                       </a:r>
                     </a:p>
@@ -25171,7 +26334,7 @@
 </file>
 
 <file path=ppt/slides/slide9.xml><?xml version="1.0" encoding="utf-8"?>
-<p:sld xmlns:a="http://schemas.openxmlformats.org/drawingml/2006/main" xmlns:p="http://schemas.openxmlformats.org/presentationml/2006/main" xmlns:r="http://schemas.openxmlformats.org/officeDocument/2006/relationships">
+<p:sld xmlns:a="http://schemas.openxmlformats.org/drawingml/2006/main" xmlns:r="http://schemas.openxmlformats.org/officeDocument/2006/relationships" xmlns:p="http://schemas.openxmlformats.org/presentationml/2006/main">
   <p:cSld>
     <p:spTree>
       <p:nvGrpSpPr>
@@ -25179,7 +26342,14 @@
         <p:cNvGrpSpPr/>
         <p:nvPr/>
       </p:nvGrpSpPr>
-      <p:grpSpPr/>
+      <p:grpSpPr>
+        <a:xfrm>
+          <a:off x="0" y="0"/>
+          <a:ext cx="0" cy="0"/>
+          <a:chOff x="0" y="0"/>
+          <a:chExt cx="0" cy="0"/>
+        </a:xfrm>
+      </p:grpSpPr>
       <p:sp>
         <p:nvSpPr>
           <p:cNvPr id="2" name="Title 1"/>
@@ -25226,7 +26396,6 @@
           <a:bodyPr/>
           <a:lstStyle/>
           <a:p>
-            <a:pPr/>
             <a:r>
               <a:rPr sz="1800" b="0">
                 <a:solidFill>
@@ -25237,7 +26406,6 @@
             </a:r>
           </a:p>
           <a:p>
-            <a:pPr/>
             <a:r>
               <a:rPr sz="1800" b="0">
                 <a:solidFill>
@@ -25259,7 +26427,6 @@
             </a:r>
           </a:p>
           <a:p>
-            <a:pPr/>
             <a:r>
               <a:rPr sz="1800" b="0">
                 <a:solidFill>
@@ -25270,7 +26437,6 @@
             </a:r>
           </a:p>
           <a:p>
-            <a:pPr/>
             <a:r>
               <a:rPr sz="1800" b="0">
                 <a:solidFill>
@@ -25281,7 +26447,6 @@
             </a:r>
           </a:p>
           <a:p>
-            <a:pPr/>
             <a:r>
               <a:rPr sz="1800" b="0">
                 <a:solidFill>
@@ -25344,6 +26509,7 @@
           <a:lstStyle/>
           <a:p>
             <a:pPr algn="ctr"/>
+            <a:endParaRPr/>
           </a:p>
         </p:txBody>
       </p:sp>
@@ -25383,7 +26549,7 @@
           </a:fontRef>
         </p:style>
         <p:txBody>
-          <a:bodyPr rtlCol="0" anchor="ctr" tIns="0" bIns="0"/>
+          <a:bodyPr tIns="0" bIns="0" rtlCol="0" anchor="ctr"/>
           <a:lstStyle/>
           <a:p>
             <a:pPr algn="ctr"/>
@@ -25422,7 +26588,7 @@
             <a:fld id="{9F4AF89A-28FA-47FA-B28F-9A9C6913CB7A}" type="slidenum">
               <a:rPr lang="ko-KR" altLang="en-US" smtClean="0"/>
               <a:pPr/>
-              <a:t>3</a:t>
+              <a:t>9</a:t>
             </a:fld>
             <a:endParaRPr lang="ko-KR" altLang="en-US" dirty="0"/>
           </a:p>
